--- a/projects/project_3/Presentation.pptx
+++ b/projects/project_3/Presentation.pptx
@@ -5,23 +5,26 @@
     <p:sldMasterId id="2147483699" r:id="rId1"/>
   </p:sldMasterIdLst>
   <p:notesMasterIdLst>
-    <p:notesMasterId r:id="rId16"/>
+    <p:notesMasterId r:id="rId19"/>
   </p:notesMasterIdLst>
   <p:sldIdLst>
     <p:sldId id="256" r:id="rId2"/>
-    <p:sldId id="258" r:id="rId3"/>
-    <p:sldId id="259" r:id="rId4"/>
-    <p:sldId id="260" r:id="rId5"/>
-    <p:sldId id="261" r:id="rId6"/>
-    <p:sldId id="263" r:id="rId7"/>
-    <p:sldId id="264" r:id="rId8"/>
-    <p:sldId id="265" r:id="rId9"/>
-    <p:sldId id="262" r:id="rId10"/>
-    <p:sldId id="266" r:id="rId11"/>
-    <p:sldId id="267" r:id="rId12"/>
-    <p:sldId id="268" r:id="rId13"/>
-    <p:sldId id="269" r:id="rId14"/>
-    <p:sldId id="270" r:id="rId15"/>
+    <p:sldId id="271" r:id="rId3"/>
+    <p:sldId id="258" r:id="rId4"/>
+    <p:sldId id="259" r:id="rId5"/>
+    <p:sldId id="260" r:id="rId6"/>
+    <p:sldId id="261" r:id="rId7"/>
+    <p:sldId id="263" r:id="rId8"/>
+    <p:sldId id="264" r:id="rId9"/>
+    <p:sldId id="265" r:id="rId10"/>
+    <p:sldId id="273" r:id="rId11"/>
+    <p:sldId id="262" r:id="rId12"/>
+    <p:sldId id="266" r:id="rId13"/>
+    <p:sldId id="267" r:id="rId14"/>
+    <p:sldId id="268" r:id="rId15"/>
+    <p:sldId id="269" r:id="rId16"/>
+    <p:sldId id="270" r:id="rId17"/>
+    <p:sldId id="272" r:id="rId18"/>
   </p:sldIdLst>
   <p:sldSz cx="12192000" cy="6858000"/>
   <p:notesSz cx="6858000" cy="9144000"/>
@@ -6584,7 +6587,7 @@
           <a:p>
             <a:fld id="{779F1C75-CF8B-4EFB-8062-168F22DF2049}" type="slidenum">
               <a:rPr lang="en-US" smtClean="0"/>
-              <a:t>11</a:t>
+              <a:t>13</a:t>
             </a:fld>
             <a:endParaRPr lang="en-US"/>
           </a:p>
@@ -6668,7 +6671,7 @@
           <a:p>
             <a:fld id="{779F1C75-CF8B-4EFB-8062-168F22DF2049}" type="slidenum">
               <a:rPr lang="en-US" smtClean="0"/>
-              <a:t>12</a:t>
+              <a:t>14</a:t>
             </a:fld>
             <a:endParaRPr lang="en-US"/>
           </a:p>
@@ -6752,7 +6755,7 @@
           <a:p>
             <a:fld id="{779F1C75-CF8B-4EFB-8062-168F22DF2049}" type="slidenum">
               <a:rPr lang="en-US" smtClean="0"/>
-              <a:t>13</a:t>
+              <a:t>15</a:t>
             </a:fld>
             <a:endParaRPr lang="en-US"/>
           </a:p>
@@ -11969,7 +11972,7 @@
                 <a:effectLst/>
                 <a:latin typeface="system-ui"/>
               </a:rPr>
-              <a:t>Subreddit </a:t>
+              <a:t>Understanding </a:t>
             </a:r>
             <a:br>
               <a:rPr lang="en-GB" sz="6600" b="1" i="0" dirty="0">
@@ -12003,7 +12006,7 @@
                 <a:effectLst/>
                 <a:latin typeface="system-ui"/>
               </a:rPr>
-              <a:t> vs </a:t>
+              <a:t> and </a:t>
             </a:r>
             <a:r>
               <a:rPr lang="en-GB" sz="6600" b="1" i="0" dirty="0">
@@ -12122,19 +12125,42 @@
         </p:spPr>
         <p:txBody>
           <a:bodyPr anchor="ctr">
-            <a:normAutofit/>
+            <a:normAutofit fontScale="92500"/>
           </a:bodyPr>
           <a:lstStyle/>
           <a:p>
             <a:r>
-              <a:rPr lang="en-US">
+              <a:rPr lang="en-US" b="1" dirty="0">
+                <a:ln>
+                  <a:solidFill>
+                    <a:sysClr val="windowText" lastClr="000000"/>
+                  </a:solidFill>
+                </a:ln>
+                <a:solidFill>
+                  <a:schemeClr val="bg1"/>
+                </a:solidFill>
+              </a:rPr>
+              <a:t>Trends, Sentiment, and Brand Fit                 </a:t>
+            </a:r>
+            <a:r>
+              <a:rPr lang="en-US" dirty="0">
+                <a:ln>
+                  <a:solidFill>
+                    <a:sysClr val="windowText" lastClr="000000"/>
+                  </a:solidFill>
+                </a:ln>
                 <a:solidFill>
                   <a:schemeClr val="bg1"/>
                 </a:solidFill>
               </a:rPr>
               <a:t>2024-11-21</a:t>
             </a:r>
-            <a:endParaRPr lang="en-AE">
+            <a:endParaRPr lang="en-AE" dirty="0">
+              <a:ln>
+                <a:solidFill>
+                  <a:sysClr val="windowText" lastClr="000000"/>
+                </a:solidFill>
+              </a:ln>
               <a:solidFill>
                 <a:schemeClr val="bg1"/>
               </a:solidFill>
@@ -12171,7 +12197,7 @@
         </p:blipFill>
         <p:spPr bwMode="auto">
           <a:xfrm>
-            <a:off x="7075680" y="4532548"/>
+            <a:off x="7710680" y="4537609"/>
             <a:ext cx="880537" cy="880537"/>
           </a:xfrm>
           <a:prstGeom prst="rect">
@@ -12311,186 +12337,10 @@
           <a:chExt cx="0" cy="0"/>
         </a:xfrm>
       </p:grpSpPr>
-      <p:sp>
-        <p:nvSpPr>
-          <p:cNvPr id="1052" name="Content Placeholder 1051">
-            <a:extLst>
-              <a:ext uri="{FF2B5EF4-FFF2-40B4-BE49-F238E27FC236}">
-                <a16:creationId xmlns:a16="http://schemas.microsoft.com/office/drawing/2014/main" id="{DC497184-26A8-1738-B444-94F4B5840577}"/>
-              </a:ext>
-            </a:extLst>
-          </p:cNvPr>
-          <p:cNvSpPr>
-            <a:spLocks noGrp="1"/>
-          </p:cNvSpPr>
-          <p:nvPr>
-            <p:ph idx="1"/>
-          </p:nvPr>
-        </p:nvSpPr>
-        <p:spPr>
-          <a:xfrm>
-            <a:off x="371094" y="2718054"/>
-            <a:ext cx="3438906" cy="3207258"/>
-          </a:xfrm>
-        </p:spPr>
-        <p:txBody>
-          <a:bodyPr anchor="t">
-            <a:normAutofit/>
-          </a:bodyPr>
-          <a:lstStyle/>
-          <a:p>
-            <a:r>
-              <a:rPr lang="en-US" sz="1700" dirty="0"/>
-              <a:t>None </a:t>
-            </a:r>
-          </a:p>
-          <a:p>
-            <a:r>
-              <a:rPr lang="en-US" sz="1700" dirty="0" err="1"/>
-              <a:t>Lemmatizer</a:t>
-            </a:r>
-            <a:endParaRPr lang="en-US" sz="1700" dirty="0"/>
-          </a:p>
-          <a:p>
-            <a:r>
-              <a:rPr lang="en-US" sz="1700" dirty="0"/>
-              <a:t>Stemmer</a:t>
-            </a:r>
-          </a:p>
-        </p:txBody>
-      </p:sp>
-      <p:pic>
-        <p:nvPicPr>
-          <p:cNvPr id="2" name="Content Placeholder 6" descr="A graph of different colored bars&#10;&#10;Description automatically generated with medium confidence">
-            <a:extLst>
-              <a:ext uri="{FF2B5EF4-FFF2-40B4-BE49-F238E27FC236}">
-                <a16:creationId xmlns:a16="http://schemas.microsoft.com/office/drawing/2014/main" id="{F3248D7A-2371-8B44-09F0-E350DDC43376}"/>
-              </a:ext>
-            </a:extLst>
-          </p:cNvPr>
-          <p:cNvPicPr>
-            <a:picLocks noChangeAspect="1"/>
-          </p:cNvPicPr>
-          <p:nvPr/>
-        </p:nvPicPr>
-        <p:blipFill rotWithShape="1">
-          <a:blip r:embed="rId2">
-            <a:extLst>
-              <a:ext uri="{28A0092B-C50C-407E-A947-70E740481C1C}">
-                <a14:useLocalDpi xmlns:a14="http://schemas.microsoft.com/office/drawing/2010/main" val="0"/>
-              </a:ext>
-            </a:extLst>
-          </a:blip>
-          <a:srcRect l="6463" r="7934"/>
-          <a:stretch/>
-        </p:blipFill>
-        <p:spPr>
-          <a:xfrm>
-            <a:off x="5155749" y="1278529"/>
-            <a:ext cx="6752243" cy="4507355"/>
-          </a:xfrm>
-          <a:prstGeom prst="rect">
-            <a:avLst/>
-          </a:prstGeom>
-        </p:spPr>
-      </p:pic>
-      <p:sp>
-        <p:nvSpPr>
-          <p:cNvPr id="3" name="Title 1">
-            <a:extLst>
-              <a:ext uri="{FF2B5EF4-FFF2-40B4-BE49-F238E27FC236}">
-                <a16:creationId xmlns:a16="http://schemas.microsoft.com/office/drawing/2014/main" id="{661477AE-CB92-3B97-541B-59D599634BBA}"/>
-              </a:ext>
-            </a:extLst>
-          </p:cNvPr>
-          <p:cNvSpPr>
-            <a:spLocks noGrp="1"/>
-          </p:cNvSpPr>
-          <p:nvPr>
-            <p:ph type="title"/>
-          </p:nvPr>
-        </p:nvSpPr>
-        <p:spPr>
-          <a:xfrm>
-            <a:off x="426317" y="1431416"/>
-            <a:ext cx="4451985" cy="1153923"/>
-          </a:xfrm>
-        </p:spPr>
-        <p:txBody>
-          <a:bodyPr/>
-          <a:lstStyle/>
-          <a:p>
-            <a:r>
-              <a:rPr lang="en-US" dirty="0"/>
-              <a:t>Tokenizer</a:t>
-            </a:r>
-          </a:p>
-        </p:txBody>
-      </p:sp>
-      <p:sp>
-        <p:nvSpPr>
-          <p:cNvPr id="4" name="TextBox 3">
-            <a:extLst>
-              <a:ext uri="{FF2B5EF4-FFF2-40B4-BE49-F238E27FC236}">
-                <a16:creationId xmlns:a16="http://schemas.microsoft.com/office/drawing/2014/main" id="{EE3BA496-410A-3F38-9278-4891CA71949D}"/>
-              </a:ext>
-            </a:extLst>
-          </p:cNvPr>
-          <p:cNvSpPr txBox="1"/>
-          <p:nvPr/>
-        </p:nvSpPr>
-        <p:spPr>
-          <a:xfrm>
-            <a:off x="371094" y="5550195"/>
-            <a:ext cx="4915282" cy="1323439"/>
-          </a:xfrm>
-          <a:prstGeom prst="rect">
-            <a:avLst/>
-          </a:prstGeom>
-          <a:noFill/>
-        </p:spPr>
-        <p:txBody>
-          <a:bodyPr wrap="square">
-            <a:spAutoFit/>
-          </a:bodyPr>
-          <a:lstStyle/>
-          <a:p>
-            <a:r>
-              <a:rPr lang="en-US" sz="2000" dirty="0"/>
-              <a:t>The highest train score : </a:t>
-            </a:r>
-            <a:r>
-              <a:rPr lang="en-US" sz="2000" b="1" dirty="0"/>
-              <a:t>Naïve Bayes</a:t>
-            </a:r>
-          </a:p>
-          <a:p>
-            <a:r>
-              <a:rPr lang="en-US" sz="2000" dirty="0"/>
-              <a:t>The highest test score : </a:t>
-            </a:r>
-            <a:r>
-              <a:rPr lang="en-US" sz="2000" b="1" dirty="0" err="1"/>
-              <a:t>GredientBoosting</a:t>
-            </a:r>
-            <a:endParaRPr lang="en-US" sz="2000" b="1" dirty="0"/>
-          </a:p>
-          <a:p>
-            <a:r>
-              <a:rPr lang="en-US" sz="2000" dirty="0"/>
-              <a:t>The least overfitting : </a:t>
-            </a:r>
-            <a:r>
-              <a:rPr lang="en-US" sz="2000" b="1" dirty="0"/>
-              <a:t>AdaBoost</a:t>
-            </a:r>
-          </a:p>
-        </p:txBody>
-      </p:sp>
     </p:spTree>
     <p:extLst>
       <p:ext uri="{BB962C8B-B14F-4D97-AF65-F5344CB8AC3E}">
-        <p14:creationId xmlns:p14="http://schemas.microsoft.com/office/powerpoint/2010/main" val="582136250"/>
+        <p14:creationId xmlns:p14="http://schemas.microsoft.com/office/powerpoint/2010/main" val="2063566481"/>
       </p:ext>
     </p:extLst>
   </p:cSld>
@@ -12519,6 +12369,192 @@
       </p:grpSpPr>
       <p:sp>
         <p:nvSpPr>
+          <p:cNvPr id="2" name="Title 1">
+            <a:extLst>
+              <a:ext uri="{FF2B5EF4-FFF2-40B4-BE49-F238E27FC236}">
+                <a16:creationId xmlns:a16="http://schemas.microsoft.com/office/drawing/2014/main" id="{C503AEFE-B90E-F7A1-61A4-1081A2910E34}"/>
+              </a:ext>
+            </a:extLst>
+          </p:cNvPr>
+          <p:cNvSpPr>
+            <a:spLocks noGrp="1"/>
+          </p:cNvSpPr>
+          <p:nvPr>
+            <p:ph type="title"/>
+          </p:nvPr>
+        </p:nvSpPr>
+        <p:spPr>
+          <a:xfrm>
+            <a:off x="426317" y="1431416"/>
+            <a:ext cx="4451985" cy="1153923"/>
+          </a:xfrm>
+        </p:spPr>
+        <p:txBody>
+          <a:bodyPr/>
+          <a:lstStyle/>
+          <a:p>
+            <a:r>
+              <a:rPr lang="en-US" dirty="0"/>
+              <a:t>Vectorizer</a:t>
+            </a:r>
+          </a:p>
+        </p:txBody>
+      </p:sp>
+      <p:sp>
+        <p:nvSpPr>
+          <p:cNvPr id="3" name="Content Placeholder 1051">
+            <a:extLst>
+              <a:ext uri="{FF2B5EF4-FFF2-40B4-BE49-F238E27FC236}">
+                <a16:creationId xmlns:a16="http://schemas.microsoft.com/office/drawing/2014/main" id="{39238455-3290-8A12-24DF-5CDE8E0A7AF1}"/>
+              </a:ext>
+            </a:extLst>
+          </p:cNvPr>
+          <p:cNvSpPr>
+            <a:spLocks noGrp="1"/>
+          </p:cNvSpPr>
+          <p:nvPr>
+            <p:ph idx="1"/>
+          </p:nvPr>
+        </p:nvSpPr>
+        <p:spPr>
+          <a:xfrm>
+            <a:off x="371475" y="2717800"/>
+            <a:ext cx="3438525" cy="3206750"/>
+          </a:xfrm>
+        </p:spPr>
+        <p:txBody>
+          <a:bodyPr anchor="t">
+            <a:normAutofit/>
+          </a:bodyPr>
+          <a:lstStyle/>
+          <a:p>
+            <a:r>
+              <a:rPr lang="en-US" sz="1700" dirty="0"/>
+              <a:t>TF-IDF vectorizer</a:t>
+            </a:r>
+          </a:p>
+          <a:p>
+            <a:r>
+              <a:rPr lang="en-US" sz="1700" dirty="0"/>
+              <a:t>Count vectorizer</a:t>
+            </a:r>
+          </a:p>
+        </p:txBody>
+      </p:sp>
+      <p:pic>
+        <p:nvPicPr>
+          <p:cNvPr id="4" name="Picture 3" descr="A graph of blue and red bars&#10;&#10;Description automatically generated">
+            <a:extLst>
+              <a:ext uri="{FF2B5EF4-FFF2-40B4-BE49-F238E27FC236}">
+                <a16:creationId xmlns:a16="http://schemas.microsoft.com/office/drawing/2014/main" id="{93D2A8E2-20FE-C509-C020-1B4EEE577390}"/>
+              </a:ext>
+            </a:extLst>
+          </p:cNvPr>
+          <p:cNvPicPr>
+            <a:picLocks noChangeAspect="1"/>
+          </p:cNvPicPr>
+          <p:nvPr/>
+        </p:nvPicPr>
+        <p:blipFill rotWithShape="1">
+          <a:blip r:embed="rId2">
+            <a:extLst>
+              <a:ext uri="{28A0092B-C50C-407E-A947-70E740481C1C}">
+                <a14:useLocalDpi xmlns:a14="http://schemas.microsoft.com/office/drawing/2010/main" val="0"/>
+              </a:ext>
+            </a:extLst>
+          </a:blip>
+          <a:srcRect l="7163" r="7486"/>
+          <a:stretch/>
+        </p:blipFill>
+        <p:spPr>
+          <a:xfrm>
+            <a:off x="5449455" y="1545716"/>
+            <a:ext cx="6541595" cy="4379590"/>
+          </a:xfrm>
+          <a:prstGeom prst="rect">
+            <a:avLst/>
+          </a:prstGeom>
+        </p:spPr>
+      </p:pic>
+      <p:sp>
+        <p:nvSpPr>
+          <p:cNvPr id="5" name="TextBox 4">
+            <a:extLst>
+              <a:ext uri="{FF2B5EF4-FFF2-40B4-BE49-F238E27FC236}">
+                <a16:creationId xmlns:a16="http://schemas.microsoft.com/office/drawing/2014/main" id="{579DB309-44CB-87A2-BE25-3CF711BBA0E3}"/>
+              </a:ext>
+            </a:extLst>
+          </p:cNvPr>
+          <p:cNvSpPr txBox="1"/>
+          <p:nvPr/>
+        </p:nvSpPr>
+        <p:spPr>
+          <a:xfrm>
+            <a:off x="424815" y="4918752"/>
+            <a:ext cx="4228234" cy="1015663"/>
+          </a:xfrm>
+          <a:prstGeom prst="rect">
+            <a:avLst/>
+          </a:prstGeom>
+          <a:noFill/>
+        </p:spPr>
+        <p:txBody>
+          <a:bodyPr wrap="square">
+            <a:spAutoFit/>
+          </a:bodyPr>
+          <a:lstStyle/>
+          <a:p>
+            <a:r>
+              <a:rPr lang="en-US" sz="2000" dirty="0"/>
+              <a:t>The Train score increased     </a:t>
+            </a:r>
+          </a:p>
+          <a:p>
+            <a:r>
+              <a:rPr lang="en-US" sz="2000" dirty="0"/>
+              <a:t>when using the TF-IDF vectorizer.</a:t>
+            </a:r>
+          </a:p>
+          <a:p>
+            <a:r>
+              <a:rPr lang="en-US" sz="2000" dirty="0"/>
+              <a:t>But not affect with Test Score</a:t>
+            </a:r>
+          </a:p>
+        </p:txBody>
+      </p:sp>
+    </p:spTree>
+    <p:extLst>
+      <p:ext uri="{BB962C8B-B14F-4D97-AF65-F5344CB8AC3E}">
+        <p14:creationId xmlns:p14="http://schemas.microsoft.com/office/powerpoint/2010/main" val="2774357573"/>
+      </p:ext>
+    </p:extLst>
+  </p:cSld>
+  <p:clrMapOvr>
+    <a:masterClrMapping/>
+  </p:clrMapOvr>
+</p:sld>
+</file>
+
+<file path=ppt/slides/slide12.xml><?xml version="1.0" encoding="utf-8"?>
+<p:sld xmlns:a="http://schemas.openxmlformats.org/drawingml/2006/main" xmlns:r="http://schemas.openxmlformats.org/officeDocument/2006/relationships" xmlns:p="http://schemas.openxmlformats.org/presentationml/2006/main">
+  <p:cSld>
+    <p:spTree>
+      <p:nvGrpSpPr>
+        <p:cNvPr id="1" name=""/>
+        <p:cNvGrpSpPr/>
+        <p:nvPr/>
+      </p:nvGrpSpPr>
+      <p:grpSpPr>
+        <a:xfrm>
+          <a:off x="0" y="0"/>
+          <a:ext cx="0" cy="0"/>
+          <a:chOff x="0" y="0"/>
+          <a:chExt cx="0" cy="0"/>
+        </a:xfrm>
+      </p:grpSpPr>
+      <p:sp>
+        <p:nvSpPr>
           <p:cNvPr id="1052" name="Content Placeholder 1051">
             <a:extLst>
               <a:ext uri="{FF2B5EF4-FFF2-40B4-BE49-F238E27FC236}">
@@ -12547,30 +12583,30 @@
           <a:p>
             <a:r>
               <a:rPr lang="en-US" sz="1700" dirty="0"/>
-              <a:t>AdaBoost</a:t>
+              <a:t>None </a:t>
             </a:r>
           </a:p>
           <a:p>
             <a:r>
               <a:rPr lang="en-US" sz="1700" dirty="0" err="1"/>
-              <a:t>GredientBoosting</a:t>
+              <a:t>Lemmatizer</a:t>
             </a:r>
             <a:endParaRPr lang="en-US" sz="1700" dirty="0"/>
           </a:p>
           <a:p>
             <a:r>
               <a:rPr lang="en-US" sz="1700" dirty="0"/>
-              <a:t>Naïve Bayes</a:t>
+              <a:t>Stemmer</a:t>
             </a:r>
           </a:p>
         </p:txBody>
       </p:sp>
       <p:pic>
         <p:nvPicPr>
-          <p:cNvPr id="8" name="Content Placeholder 6" descr="A graph of blue and orange bars&#10;&#10;Description automatically generated">
-            <a:extLst>
-              <a:ext uri="{FF2B5EF4-FFF2-40B4-BE49-F238E27FC236}">
-                <a16:creationId xmlns:a16="http://schemas.microsoft.com/office/drawing/2014/main" id="{A946CEB1-B144-A837-18C9-214DBCC76E74}"/>
+          <p:cNvPr id="2" name="Content Placeholder 6" descr="A graph of different colored bars&#10;&#10;Description automatically generated with medium confidence">
+            <a:extLst>
+              <a:ext uri="{FF2B5EF4-FFF2-40B4-BE49-F238E27FC236}">
+                <a16:creationId xmlns:a16="http://schemas.microsoft.com/office/drawing/2014/main" id="{F3248D7A-2371-8B44-09F0-E350DDC43376}"/>
               </a:ext>
             </a:extLst>
           </p:cNvPr>
@@ -12580,20 +12616,20 @@
           <p:nvPr/>
         </p:nvPicPr>
         <p:blipFill rotWithShape="1">
-          <a:blip r:embed="rId3">
+          <a:blip r:embed="rId2">
             <a:extLst>
               <a:ext uri="{28A0092B-C50C-407E-A947-70E740481C1C}">
                 <a14:useLocalDpi xmlns:a14="http://schemas.microsoft.com/office/drawing/2010/main" val="0"/>
               </a:ext>
             </a:extLst>
           </a:blip>
-          <a:srcRect l="5165" t="3677" r="8848" b="1837"/>
+          <a:srcRect l="6463" r="7934"/>
           <a:stretch/>
         </p:blipFill>
         <p:spPr>
           <a:xfrm>
-            <a:off x="5150494" y="1061961"/>
-            <a:ext cx="6463016" cy="4261105"/>
+            <a:off x="5155749" y="1278529"/>
+            <a:ext cx="6752243" cy="4507355"/>
           </a:xfrm>
           <a:prstGeom prst="rect">
             <a:avLst/>
@@ -12602,10 +12638,10 @@
       </p:pic>
       <p:sp>
         <p:nvSpPr>
-          <p:cNvPr id="9" name="Title 1">
-            <a:extLst>
-              <a:ext uri="{FF2B5EF4-FFF2-40B4-BE49-F238E27FC236}">
-                <a16:creationId xmlns:a16="http://schemas.microsoft.com/office/drawing/2014/main" id="{4046A24D-B513-18DE-6C63-9F4FCD8A4DA3}"/>
+          <p:cNvPr id="3" name="Title 1">
+            <a:extLst>
+              <a:ext uri="{FF2B5EF4-FFF2-40B4-BE49-F238E27FC236}">
+                <a16:creationId xmlns:a16="http://schemas.microsoft.com/office/drawing/2014/main" id="{661477AE-CB92-3B97-541B-59D599634BBA}"/>
               </a:ext>
             </a:extLst>
           </p:cNvPr>
@@ -12628,17 +12664,17 @@
           <a:p>
             <a:r>
               <a:rPr lang="en-US" dirty="0"/>
-              <a:t>Classifier</a:t>
+              <a:t>Tokenizer</a:t>
             </a:r>
           </a:p>
         </p:txBody>
       </p:sp>
       <p:sp>
         <p:nvSpPr>
-          <p:cNvPr id="10" name="TextBox 9">
-            <a:extLst>
-              <a:ext uri="{FF2B5EF4-FFF2-40B4-BE49-F238E27FC236}">
-                <a16:creationId xmlns:a16="http://schemas.microsoft.com/office/drawing/2014/main" id="{F83F5E4E-409D-0777-B28C-93ED0DCAC086}"/>
+          <p:cNvPr id="4" name="TextBox 3">
+            <a:extLst>
+              <a:ext uri="{FF2B5EF4-FFF2-40B4-BE49-F238E27FC236}">
+                <a16:creationId xmlns:a16="http://schemas.microsoft.com/office/drawing/2014/main" id="{EE3BA496-410A-3F38-9278-4891CA71949D}"/>
               </a:ext>
             </a:extLst>
           </p:cNvPr>
@@ -12696,6 +12732,212 @@
     </p:spTree>
     <p:extLst>
       <p:ext uri="{BB962C8B-B14F-4D97-AF65-F5344CB8AC3E}">
+        <p14:creationId xmlns:p14="http://schemas.microsoft.com/office/powerpoint/2010/main" val="582136250"/>
+      </p:ext>
+    </p:extLst>
+  </p:cSld>
+  <p:clrMapOvr>
+    <a:masterClrMapping/>
+  </p:clrMapOvr>
+</p:sld>
+</file>
+
+<file path=ppt/slides/slide13.xml><?xml version="1.0" encoding="utf-8"?>
+<p:sld xmlns:a="http://schemas.openxmlformats.org/drawingml/2006/main" xmlns:r="http://schemas.openxmlformats.org/officeDocument/2006/relationships" xmlns:p="http://schemas.openxmlformats.org/presentationml/2006/main">
+  <p:cSld>
+    <p:spTree>
+      <p:nvGrpSpPr>
+        <p:cNvPr id="1" name=""/>
+        <p:cNvGrpSpPr/>
+        <p:nvPr/>
+      </p:nvGrpSpPr>
+      <p:grpSpPr>
+        <a:xfrm>
+          <a:off x="0" y="0"/>
+          <a:ext cx="0" cy="0"/>
+          <a:chOff x="0" y="0"/>
+          <a:chExt cx="0" cy="0"/>
+        </a:xfrm>
+      </p:grpSpPr>
+      <p:sp>
+        <p:nvSpPr>
+          <p:cNvPr id="1052" name="Content Placeholder 1051">
+            <a:extLst>
+              <a:ext uri="{FF2B5EF4-FFF2-40B4-BE49-F238E27FC236}">
+                <a16:creationId xmlns:a16="http://schemas.microsoft.com/office/drawing/2014/main" id="{DC497184-26A8-1738-B444-94F4B5840577}"/>
+              </a:ext>
+            </a:extLst>
+          </p:cNvPr>
+          <p:cNvSpPr>
+            <a:spLocks noGrp="1"/>
+          </p:cNvSpPr>
+          <p:nvPr>
+            <p:ph idx="1"/>
+          </p:nvPr>
+        </p:nvSpPr>
+        <p:spPr>
+          <a:xfrm>
+            <a:off x="371094" y="2718054"/>
+            <a:ext cx="3438906" cy="3207258"/>
+          </a:xfrm>
+        </p:spPr>
+        <p:txBody>
+          <a:bodyPr anchor="t">
+            <a:normAutofit/>
+          </a:bodyPr>
+          <a:lstStyle/>
+          <a:p>
+            <a:r>
+              <a:rPr lang="en-US" sz="1700" dirty="0"/>
+              <a:t>AdaBoost</a:t>
+            </a:r>
+          </a:p>
+          <a:p>
+            <a:r>
+              <a:rPr lang="en-US" sz="1700" dirty="0" err="1"/>
+              <a:t>GredientBoosting</a:t>
+            </a:r>
+            <a:endParaRPr lang="en-US" sz="1700" dirty="0"/>
+          </a:p>
+          <a:p>
+            <a:r>
+              <a:rPr lang="en-US" sz="1700" dirty="0"/>
+              <a:t>Naïve Bayes</a:t>
+            </a:r>
+          </a:p>
+        </p:txBody>
+      </p:sp>
+      <p:pic>
+        <p:nvPicPr>
+          <p:cNvPr id="8" name="Content Placeholder 6" descr="A graph of blue and orange bars&#10;&#10;Description automatically generated">
+            <a:extLst>
+              <a:ext uri="{FF2B5EF4-FFF2-40B4-BE49-F238E27FC236}">
+                <a16:creationId xmlns:a16="http://schemas.microsoft.com/office/drawing/2014/main" id="{A946CEB1-B144-A837-18C9-214DBCC76E74}"/>
+              </a:ext>
+            </a:extLst>
+          </p:cNvPr>
+          <p:cNvPicPr>
+            <a:picLocks noChangeAspect="1"/>
+          </p:cNvPicPr>
+          <p:nvPr/>
+        </p:nvPicPr>
+        <p:blipFill rotWithShape="1">
+          <a:blip r:embed="rId3">
+            <a:extLst>
+              <a:ext uri="{28A0092B-C50C-407E-A947-70E740481C1C}">
+                <a14:useLocalDpi xmlns:a14="http://schemas.microsoft.com/office/drawing/2010/main" val="0"/>
+              </a:ext>
+            </a:extLst>
+          </a:blip>
+          <a:srcRect l="5165" t="3677" r="8848" b="1837"/>
+          <a:stretch/>
+        </p:blipFill>
+        <p:spPr>
+          <a:xfrm>
+            <a:off x="5150494" y="1061961"/>
+            <a:ext cx="6463016" cy="4261105"/>
+          </a:xfrm>
+          <a:prstGeom prst="rect">
+            <a:avLst/>
+          </a:prstGeom>
+        </p:spPr>
+      </p:pic>
+      <p:sp>
+        <p:nvSpPr>
+          <p:cNvPr id="9" name="Title 1">
+            <a:extLst>
+              <a:ext uri="{FF2B5EF4-FFF2-40B4-BE49-F238E27FC236}">
+                <a16:creationId xmlns:a16="http://schemas.microsoft.com/office/drawing/2014/main" id="{4046A24D-B513-18DE-6C63-9F4FCD8A4DA3}"/>
+              </a:ext>
+            </a:extLst>
+          </p:cNvPr>
+          <p:cNvSpPr>
+            <a:spLocks noGrp="1"/>
+          </p:cNvSpPr>
+          <p:nvPr>
+            <p:ph type="title"/>
+          </p:nvPr>
+        </p:nvSpPr>
+        <p:spPr>
+          <a:xfrm>
+            <a:off x="426317" y="1431416"/>
+            <a:ext cx="4451985" cy="1153923"/>
+          </a:xfrm>
+        </p:spPr>
+        <p:txBody>
+          <a:bodyPr/>
+          <a:lstStyle/>
+          <a:p>
+            <a:r>
+              <a:rPr lang="en-US" dirty="0"/>
+              <a:t>Classifier</a:t>
+            </a:r>
+          </a:p>
+        </p:txBody>
+      </p:sp>
+      <p:sp>
+        <p:nvSpPr>
+          <p:cNvPr id="10" name="TextBox 9">
+            <a:extLst>
+              <a:ext uri="{FF2B5EF4-FFF2-40B4-BE49-F238E27FC236}">
+                <a16:creationId xmlns:a16="http://schemas.microsoft.com/office/drawing/2014/main" id="{F83F5E4E-409D-0777-B28C-93ED0DCAC086}"/>
+              </a:ext>
+            </a:extLst>
+          </p:cNvPr>
+          <p:cNvSpPr txBox="1"/>
+          <p:nvPr/>
+        </p:nvSpPr>
+        <p:spPr>
+          <a:xfrm>
+            <a:off x="371094" y="5550195"/>
+            <a:ext cx="4915282" cy="1323439"/>
+          </a:xfrm>
+          <a:prstGeom prst="rect">
+            <a:avLst/>
+          </a:prstGeom>
+          <a:noFill/>
+        </p:spPr>
+        <p:txBody>
+          <a:bodyPr wrap="square">
+            <a:spAutoFit/>
+          </a:bodyPr>
+          <a:lstStyle/>
+          <a:p>
+            <a:r>
+              <a:rPr lang="en-US" sz="2000" dirty="0"/>
+              <a:t>The highest train score : </a:t>
+            </a:r>
+            <a:r>
+              <a:rPr lang="en-US" sz="2000" b="1" dirty="0"/>
+              <a:t>Naïve Bayes</a:t>
+            </a:r>
+          </a:p>
+          <a:p>
+            <a:r>
+              <a:rPr lang="en-US" sz="2000" dirty="0"/>
+              <a:t>The highest test score : </a:t>
+            </a:r>
+            <a:r>
+              <a:rPr lang="en-US" sz="2000" b="1" dirty="0" err="1"/>
+              <a:t>GredientBoosting</a:t>
+            </a:r>
+            <a:endParaRPr lang="en-US" sz="2000" b="1" dirty="0"/>
+          </a:p>
+          <a:p>
+            <a:r>
+              <a:rPr lang="en-US" sz="2000" dirty="0"/>
+              <a:t>The least overfitting : </a:t>
+            </a:r>
+            <a:r>
+              <a:rPr lang="en-US" sz="2000" b="1" dirty="0"/>
+              <a:t>AdaBoost</a:t>
+            </a:r>
+          </a:p>
+        </p:txBody>
+      </p:sp>
+    </p:spTree>
+    <p:extLst>
+      <p:ext uri="{BB962C8B-B14F-4D97-AF65-F5344CB8AC3E}">
         <p14:creationId xmlns:p14="http://schemas.microsoft.com/office/powerpoint/2010/main" val="181495067"/>
       </p:ext>
     </p:extLst>
@@ -12706,7 +12948,7 @@
 </p:sld>
 </file>
 
-<file path=ppt/slides/slide12.xml><?xml version="1.0" encoding="utf-8"?>
+<file path=ppt/slides/slide14.xml><?xml version="1.0" encoding="utf-8"?>
 <p:sld xmlns:a="http://schemas.openxmlformats.org/drawingml/2006/main" xmlns:r="http://schemas.openxmlformats.org/officeDocument/2006/relationships" xmlns:p="http://schemas.openxmlformats.org/presentationml/2006/main">
   <p:cSld>
     <p:spTree>
@@ -12812,7 +13054,7 @@
 </p:sld>
 </file>
 
-<file path=ppt/slides/slide13.xml><?xml version="1.0" encoding="utf-8"?>
+<file path=ppt/slides/slide15.xml><?xml version="1.0" encoding="utf-8"?>
 <p:sld xmlns:a="http://schemas.openxmlformats.org/drawingml/2006/main" xmlns:r="http://schemas.openxmlformats.org/officeDocument/2006/relationships" xmlns:p="http://schemas.openxmlformats.org/presentationml/2006/main">
   <p:cSld>
     <p:spTree>
@@ -12908,7 +13150,7 @@
 </p:sld>
 </file>
 
-<file path=ppt/slides/slide14.xml><?xml version="1.0" encoding="utf-8"?>
+<file path=ppt/slides/slide16.xml><?xml version="1.0" encoding="utf-8"?>
 <p:sld xmlns:a="http://schemas.openxmlformats.org/drawingml/2006/main" xmlns:r="http://schemas.openxmlformats.org/officeDocument/2006/relationships" xmlns:p="http://schemas.openxmlformats.org/presentationml/2006/main">
   <p:cSld>
     <p:spTree>
@@ -13239,7 +13481,7 @@
 </p:sld>
 </file>
 
-<file path=ppt/slides/slide2.xml><?xml version="1.0" encoding="utf-8"?>
+<file path=ppt/slides/slide17.xml><?xml version="1.0" encoding="utf-8"?>
 <p:sld xmlns:a="http://schemas.openxmlformats.org/drawingml/2006/main" xmlns:r="http://schemas.openxmlformats.org/officeDocument/2006/relationships" xmlns:p="http://schemas.openxmlformats.org/presentationml/2006/main">
   <p:cSld>
     <p:bg>
@@ -13252,7 +13494,13 @@
     </p:bg>
     <p:spTree>
       <p:nvGrpSpPr>
-        <p:cNvPr id="1" name=""/>
+        <p:cNvPr id="1" name="">
+          <a:extLst>
+            <a:ext uri="{FF2B5EF4-FFF2-40B4-BE49-F238E27FC236}">
+              <a16:creationId xmlns:a16="http://schemas.microsoft.com/office/drawing/2014/main" id="{50CF2ECD-BFD5-E881-D6AD-31503F9C09CE}"/>
+            </a:ext>
+          </a:extLst>
+        </p:cNvPr>
         <p:cNvGrpSpPr/>
         <p:nvPr/>
       </p:nvGrpSpPr>
@@ -13269,7 +13517,7 @@
           <p:cNvPr id="29" name="Rectangle 28">
             <a:extLst>
               <a:ext uri="{FF2B5EF4-FFF2-40B4-BE49-F238E27FC236}">
-                <a16:creationId xmlns:a16="http://schemas.microsoft.com/office/drawing/2014/main" id="{2D6FBB9D-1CAA-4D05-AB33-BABDFE17B843}"/>
+                <a16:creationId xmlns:a16="http://schemas.microsoft.com/office/drawing/2014/main" id="{62F857DD-921B-45B3-8EDA-FB5079C9D84C}"/>
               </a:ext>
               <a:ext uri="{C183D7F6-B498-43B3-948B-1728B52AA6E4}">
                 <adec:decorative xmlns:adec="http://schemas.microsoft.com/office/drawing/2017/decorative" val="1"/>
@@ -13371,7 +13619,7 @@
           <p:cNvPr id="31" name="Rectangle 30">
             <a:extLst>
               <a:ext uri="{FF2B5EF4-FFF2-40B4-BE49-F238E27FC236}">
-                <a16:creationId xmlns:a16="http://schemas.microsoft.com/office/drawing/2014/main" id="{04727B71-B4B6-4823-80A1-68C40B475118}"/>
+                <a16:creationId xmlns:a16="http://schemas.microsoft.com/office/drawing/2014/main" id="{63202D47-3FEC-F30D-F026-B640D0C5C817}"/>
               </a:ext>
               <a:ext uri="{C183D7F6-B498-43B3-948B-1728B52AA6E4}">
                 <adec:decorative xmlns:adec="http://schemas.microsoft.com/office/drawing/2017/decorative" val="1"/>
@@ -13461,7 +13709,7 @@
           <p:cNvPr id="33" name="Rectangle 32">
             <a:extLst>
               <a:ext uri="{FF2B5EF4-FFF2-40B4-BE49-F238E27FC236}">
-                <a16:creationId xmlns:a16="http://schemas.microsoft.com/office/drawing/2014/main" id="{79A6DB05-9FB5-4B07-8675-74C23D4FD89D}"/>
+                <a16:creationId xmlns:a16="http://schemas.microsoft.com/office/drawing/2014/main" id="{55F5B2AE-8720-55EF-1B27-7A847503E463}"/>
               </a:ext>
               <a:ext uri="{C183D7F6-B498-43B3-948B-1728B52AA6E4}">
                 <adec:decorative xmlns:adec="http://schemas.microsoft.com/office/drawing/2017/decorative" val="1"/>
@@ -13553,7 +13801,7 @@
           <p:cNvPr id="35" name="Rectangle 34">
             <a:extLst>
               <a:ext uri="{FF2B5EF4-FFF2-40B4-BE49-F238E27FC236}">
-                <a16:creationId xmlns:a16="http://schemas.microsoft.com/office/drawing/2014/main" id="{8FC9BE17-9A7B-462D-AE50-3D8777387304}"/>
+                <a16:creationId xmlns:a16="http://schemas.microsoft.com/office/drawing/2014/main" id="{F50FDE42-04F9-45DB-1DAF-F45D67CB0ED0}"/>
               </a:ext>
               <a:ext uri="{C183D7F6-B498-43B3-948B-1728B52AA6E4}">
                 <adec:decorative xmlns:adec="http://schemas.microsoft.com/office/drawing/2017/decorative" val="1"/>
@@ -13613,7 +13861,7 @@
           <p:cNvPr id="5" name="Picture 6" descr="The Coca-Cola and Pepsi Duopoly: The Secret Ingredients">
             <a:extLst>
               <a:ext uri="{FF2B5EF4-FFF2-40B4-BE49-F238E27FC236}">
-                <a16:creationId xmlns:a16="http://schemas.microsoft.com/office/drawing/2014/main" id="{E9578439-BA63-A91F-285F-397EF7087382}"/>
+                <a16:creationId xmlns:a16="http://schemas.microsoft.com/office/drawing/2014/main" id="{E28A5E70-9E07-F81A-AE03-9B865EEB647B}"/>
               </a:ext>
             </a:extLst>
           </p:cNvPr>
@@ -13658,7 +13906,7 @@
           <p:cNvPr id="37" name="Rectangle 36">
             <a:extLst>
               <a:ext uri="{FF2B5EF4-FFF2-40B4-BE49-F238E27FC236}">
-                <a16:creationId xmlns:a16="http://schemas.microsoft.com/office/drawing/2014/main" id="{3EBE8569-6AEC-4B8C-8D53-2DE337CDBA65}"/>
+                <a16:creationId xmlns:a16="http://schemas.microsoft.com/office/drawing/2014/main" id="{F784A420-03B8-F1F4-694B-B84EA40519DD}"/>
               </a:ext>
               <a:ext uri="{C183D7F6-B498-43B3-948B-1728B52AA6E4}">
                 <adec:decorative xmlns:adec="http://schemas.microsoft.com/office/drawing/2017/decorative" val="1"/>
@@ -13744,7 +13992,7 @@
           <p:cNvPr id="24" name="TextBox 23">
             <a:extLst>
               <a:ext uri="{FF2B5EF4-FFF2-40B4-BE49-F238E27FC236}">
-                <a16:creationId xmlns:a16="http://schemas.microsoft.com/office/drawing/2014/main" id="{DB4589A8-ADED-D66C-50FE-1F43A66226F1}"/>
+                <a16:creationId xmlns:a16="http://schemas.microsoft.com/office/drawing/2014/main" id="{295079EB-B16D-98AC-E3B8-F822941808A4}"/>
               </a:ext>
             </a:extLst>
           </p:cNvPr>
@@ -13790,7 +14038,7 @@
                 <a:effectLst/>
                 <a:latin typeface="system-ui"/>
               </a:rPr>
-              <a:t>Study</a:t>
+              <a:t>Key</a:t>
             </a:r>
             <a:r>
               <a:rPr lang="en-GB" sz="4000" b="1" dirty="0">
@@ -13819,7 +14067,7 @@
                 <a:effectLst/>
                 <a:latin typeface="system-ui"/>
               </a:rPr>
-              <a:t>Process</a:t>
+              <a:t>Findings</a:t>
             </a:r>
             <a:endParaRPr lang="en-US" sz="4000" b="1" dirty="0">
               <a:latin typeface="+mj-lt"/>
@@ -13834,7 +14082,7 @@
           <p:cNvPr id="39" name="Rectangle 38">
             <a:extLst>
               <a:ext uri="{FF2B5EF4-FFF2-40B4-BE49-F238E27FC236}">
-                <a16:creationId xmlns:a16="http://schemas.microsoft.com/office/drawing/2014/main" id="{55D4142C-5077-457F-A6AD-3FECFDB39685}"/>
+                <a16:creationId xmlns:a16="http://schemas.microsoft.com/office/drawing/2014/main" id="{F3747817-D297-B81D-4E68-79125F6DB30D}"/>
               </a:ext>
               <a:ext uri="{C183D7F6-B498-43B3-948B-1728B52AA6E4}">
                 <adec:decorative xmlns:adec="http://schemas.microsoft.com/office/drawing/2017/decorative" val="1"/>
@@ -13926,7 +14174,7 @@
           <p:cNvPr id="41" name="Rectangle 40">
             <a:extLst>
               <a:ext uri="{FF2B5EF4-FFF2-40B4-BE49-F238E27FC236}">
-                <a16:creationId xmlns:a16="http://schemas.microsoft.com/office/drawing/2014/main" id="{7A5F0580-5EE9-419F-96EE-B6529EF6E7D0}"/>
+                <a16:creationId xmlns:a16="http://schemas.microsoft.com/office/drawing/2014/main" id="{86D57AFB-EED0-5FB0-D0DF-C82C633D0F9D}"/>
               </a:ext>
               <a:ext uri="{C183D7F6-B498-43B3-948B-1728B52AA6E4}">
                 <adec:decorative xmlns:adec="http://schemas.microsoft.com/office/drawing/2017/decorative" val="1"/>
@@ -14027,7 +14275,7 @@
           <p:cNvPr id="18" name="TextBox 17">
             <a:extLst>
               <a:ext uri="{FF2B5EF4-FFF2-40B4-BE49-F238E27FC236}">
-                <a16:creationId xmlns:a16="http://schemas.microsoft.com/office/drawing/2014/main" id="{3B0BC12E-1DFE-6BB8-A0A5-3F0930720820}"/>
+                <a16:creationId xmlns:a16="http://schemas.microsoft.com/office/drawing/2014/main" id="{5811E8A8-6C32-9A7C-8510-3F429ED24372}"/>
               </a:ext>
             </a:extLst>
           </p:cNvPr>
@@ -14058,41 +14306,97 @@
             </a:pPr>
             <a:r>
               <a:rPr lang="en-US" b="1" dirty="0"/>
-              <a:t>Extract Subreddit Posts from </a:t>
-            </a:r>
-            <a:r>
-              <a:rPr lang="en-US" b="1" dirty="0">
+              <a:t>What People Are Talking About:</a:t>
+            </a:r>
+            <a:r>
+              <a:rPr lang="en-US" dirty="0"/>
+              <a:t> </a:t>
+            </a:r>
+          </a:p>
+          <a:p>
+            <a:pPr marL="114300">
+              <a:spcAft>
+                <a:spcPts val="600"/>
+              </a:spcAft>
+            </a:pPr>
+            <a:r>
+              <a:rPr lang="en-US" sz="1400" b="1" dirty="0">
                 <a:solidFill>
                   <a:srgbClr val="004A97"/>
                 </a:solidFill>
               </a:rPr>
-              <a:t>r/Pepsi </a:t>
-            </a:r>
-            <a:r>
-              <a:rPr lang="en-US" b="1" dirty="0"/>
-              <a:t>and </a:t>
-            </a:r>
-            <a:r>
-              <a:rPr lang="en-US" b="1" dirty="0">
+              <a:t>Pepsi: </a:t>
+            </a:r>
+            <a:r>
+              <a:rPr lang="en-US" sz="1400" dirty="0"/>
+              <a:t>Jobs</a:t>
+            </a:r>
+          </a:p>
+          <a:p>
+            <a:pPr marL="114300">
+              <a:spcAft>
+                <a:spcPts val="600"/>
+              </a:spcAft>
+            </a:pPr>
+            <a:r>
+              <a:rPr lang="en-US" sz="1400" b="1" dirty="0">
                 <a:solidFill>
-                  <a:srgbClr val="F40009"/>
+                  <a:srgbClr val="D61F25"/>
                 </a:solidFill>
               </a:rPr>
-              <a:t>r/</a:t>
-            </a:r>
-            <a:r>
-              <a:rPr lang="en-US" b="1" dirty="0" err="1">
+              <a:t>Coca-Cola: </a:t>
+            </a:r>
+            <a:r>
+              <a:rPr lang="en-US" sz="1400" dirty="0"/>
+              <a:t>Oreo, zero, bottles</a:t>
+            </a:r>
+          </a:p>
+          <a:p>
+            <a:pPr marL="114300">
+              <a:spcAft>
+                <a:spcPts val="600"/>
+              </a:spcAft>
+            </a:pPr>
+            <a:r>
+              <a:rPr lang="en-US" sz="1400" b="1" dirty="0"/>
+              <a:t>Sentiment: </a:t>
+            </a:r>
+            <a:r>
+              <a:rPr lang="en-US" sz="1400" b="1" dirty="0">
                 <a:solidFill>
-                  <a:srgbClr val="F40009"/>
+                  <a:srgbClr val="004A97"/>
                 </a:solidFill>
               </a:rPr>
-              <a:t>cocacola</a:t>
-            </a:r>
-            <a:endParaRPr lang="en-US" b="1" dirty="0">
-              <a:solidFill>
-                <a:srgbClr val="F40009"/>
-              </a:solidFill>
-            </a:endParaRPr>
+              <a:t>Pepsi </a:t>
+            </a:r>
+            <a:r>
+              <a:rPr lang="en-US" sz="1400" b="1" dirty="0"/>
+              <a:t>&lt;</a:t>
+            </a:r>
+            <a:r>
+              <a:rPr lang="en-US" sz="1400" b="1" dirty="0">
+                <a:solidFill>
+                  <a:srgbClr val="004A97"/>
+                </a:solidFill>
+              </a:rPr>
+              <a:t> </a:t>
+            </a:r>
+            <a:r>
+              <a:rPr lang="en-US" sz="1400" b="1" dirty="0">
+                <a:solidFill>
+                  <a:srgbClr val="D61F25"/>
+                </a:solidFill>
+              </a:rPr>
+              <a:t>Coca-Cola</a:t>
+            </a:r>
+          </a:p>
+          <a:p>
+            <a:pPr marL="114300">
+              <a:spcAft>
+                <a:spcPts val="600"/>
+              </a:spcAft>
+            </a:pPr>
+            <a:endParaRPr lang="en-US" sz="1400" b="1" dirty="0"/>
           </a:p>
           <a:p>
             <a:pPr marL="342900" indent="-228600">
@@ -14104,72 +14408,7 @@
             </a:pPr>
             <a:r>
               <a:rPr lang="en-US" b="1" dirty="0"/>
-              <a:t>Preparing Data</a:t>
-            </a:r>
-          </a:p>
-          <a:p>
-            <a:pPr marL="342900" indent="-228600">
-              <a:spcAft>
-                <a:spcPts val="600"/>
-              </a:spcAft>
-              <a:buFont typeface="Arial" panose="020B0604020202020204" pitchFamily="34" charset="0"/>
-              <a:buChar char="•"/>
-            </a:pPr>
-            <a:r>
-              <a:rPr lang="en-US" b="1" dirty="0"/>
-              <a:t>Exploratory Data Analysis</a:t>
-            </a:r>
-          </a:p>
-          <a:p>
-            <a:pPr marL="342900" indent="-228600">
-              <a:spcAft>
-                <a:spcPts val="600"/>
-              </a:spcAft>
-              <a:buFont typeface="Arial" panose="020B0604020202020204" pitchFamily="34" charset="0"/>
-              <a:buChar char="•"/>
-            </a:pPr>
-            <a:r>
-              <a:rPr lang="en-US" b="1" dirty="0"/>
-              <a:t>Sentiment Analysis</a:t>
-            </a:r>
-          </a:p>
-          <a:p>
-            <a:pPr marL="342900" indent="-228600">
-              <a:spcAft>
-                <a:spcPts val="600"/>
-              </a:spcAft>
-              <a:buFont typeface="Arial" panose="020B0604020202020204" pitchFamily="34" charset="0"/>
-              <a:buChar char="•"/>
-            </a:pPr>
-            <a:r>
-              <a:rPr lang="en-US" b="1" dirty="0"/>
-              <a:t>Vectorizer and Tokenizer</a:t>
-            </a:r>
-          </a:p>
-          <a:p>
-            <a:pPr marL="342900" indent="-228600">
-              <a:spcAft>
-                <a:spcPts val="600"/>
-              </a:spcAft>
-              <a:buFont typeface="Arial" panose="020B0604020202020204" pitchFamily="34" charset="0"/>
-              <a:buChar char="•"/>
-            </a:pPr>
-            <a:r>
-              <a:rPr lang="en-US" b="1" dirty="0"/>
-              <a:t>Model Tuning</a:t>
-            </a:r>
-          </a:p>
-          <a:p>
-            <a:pPr marL="342900" indent="-228600">
-              <a:spcAft>
-                <a:spcPts val="600"/>
-              </a:spcAft>
-              <a:buFont typeface="Arial" panose="020B0604020202020204" pitchFamily="34" charset="0"/>
-              <a:buChar char="•"/>
-            </a:pPr>
-            <a:r>
-              <a:rPr lang="en-US" b="1" dirty="0"/>
-              <a:t>Application</a:t>
+              <a:t>Matching Brand Identity:</a:t>
             </a:r>
           </a:p>
         </p:txBody>
@@ -14177,7 +14416,7 @@
     </p:spTree>
     <p:extLst>
       <p:ext uri="{BB962C8B-B14F-4D97-AF65-F5344CB8AC3E}">
-        <p14:creationId xmlns:p14="http://schemas.microsoft.com/office/powerpoint/2010/main" val="2723364762"/>
+        <p14:creationId xmlns:p14="http://schemas.microsoft.com/office/powerpoint/2010/main" val="1773957956"/>
       </p:ext>
     </p:extLst>
   </p:cSld>
@@ -14187,7 +14426,7 @@
 </p:sld>
 </file>
 
-<file path=ppt/slides/slide3.xml><?xml version="1.0" encoding="utf-8"?>
+<file path=ppt/slides/slide2.xml><?xml version="1.0" encoding="utf-8"?>
 <p:sld xmlns:a="http://schemas.openxmlformats.org/drawingml/2006/main" xmlns:r="http://schemas.openxmlformats.org/officeDocument/2006/relationships" xmlns:p="http://schemas.openxmlformats.org/presentationml/2006/main">
   <p:cSld>
     <p:bg>
@@ -14203,7 +14442,7 @@
         <p:cNvPr id="1" name="">
           <a:extLst>
             <a:ext uri="{FF2B5EF4-FFF2-40B4-BE49-F238E27FC236}">
-              <a16:creationId xmlns:a16="http://schemas.microsoft.com/office/drawing/2014/main" id="{D6A32D94-B11E-19CF-94C5-D38DE309AA69}"/>
+              <a16:creationId xmlns:a16="http://schemas.microsoft.com/office/drawing/2014/main" id="{23418FA2-0832-6F34-E1EF-642151058400}"/>
             </a:ext>
           </a:extLst>
         </p:cNvPr>
@@ -14223,7 +14462,7 @@
           <p:cNvPr id="29" name="Rectangle 28">
             <a:extLst>
               <a:ext uri="{FF2B5EF4-FFF2-40B4-BE49-F238E27FC236}">
-                <a16:creationId xmlns:a16="http://schemas.microsoft.com/office/drawing/2014/main" id="{63B55CE6-9AE2-7F9D-28A5-596A3900E9F0}"/>
+                <a16:creationId xmlns:a16="http://schemas.microsoft.com/office/drawing/2014/main" id="{9371A6DF-FFFB-DABA-D75F-59791C00B356}"/>
               </a:ext>
               <a:ext uri="{C183D7F6-B498-43B3-948B-1728B52AA6E4}">
                 <adec:decorative xmlns:adec="http://schemas.microsoft.com/office/drawing/2017/decorative" val="1"/>
@@ -14325,7 +14564,7 @@
           <p:cNvPr id="31" name="Rectangle 30">
             <a:extLst>
               <a:ext uri="{FF2B5EF4-FFF2-40B4-BE49-F238E27FC236}">
-                <a16:creationId xmlns:a16="http://schemas.microsoft.com/office/drawing/2014/main" id="{5DAE085F-2511-5595-3E26-3CEBC77276F4}"/>
+                <a16:creationId xmlns:a16="http://schemas.microsoft.com/office/drawing/2014/main" id="{EBA5D3FE-B707-31EF-F632-ADD0B272106B}"/>
               </a:ext>
               <a:ext uri="{C183D7F6-B498-43B3-948B-1728B52AA6E4}">
                 <adec:decorative xmlns:adec="http://schemas.microsoft.com/office/drawing/2017/decorative" val="1"/>
@@ -14415,7 +14654,7 @@
           <p:cNvPr id="33" name="Rectangle 32">
             <a:extLst>
               <a:ext uri="{FF2B5EF4-FFF2-40B4-BE49-F238E27FC236}">
-                <a16:creationId xmlns:a16="http://schemas.microsoft.com/office/drawing/2014/main" id="{D160E1A2-1C6C-6585-73B7-3D903E5ACACD}"/>
+                <a16:creationId xmlns:a16="http://schemas.microsoft.com/office/drawing/2014/main" id="{C239F4CE-D9A8-7F67-45C3-17213A7DBEDA}"/>
               </a:ext>
               <a:ext uri="{C183D7F6-B498-43B3-948B-1728B52AA6E4}">
                 <adec:decorative xmlns:adec="http://schemas.microsoft.com/office/drawing/2017/decorative" val="1"/>
@@ -14507,7 +14746,7 @@
           <p:cNvPr id="35" name="Rectangle 34">
             <a:extLst>
               <a:ext uri="{FF2B5EF4-FFF2-40B4-BE49-F238E27FC236}">
-                <a16:creationId xmlns:a16="http://schemas.microsoft.com/office/drawing/2014/main" id="{DFDCD7A2-B35A-FFD2-A404-DD29B753DFC4}"/>
+                <a16:creationId xmlns:a16="http://schemas.microsoft.com/office/drawing/2014/main" id="{28D9D36B-7CE3-50CE-99B2-DBC07FA93047}"/>
               </a:ext>
               <a:ext uri="{C183D7F6-B498-43B3-948B-1728B52AA6E4}">
                 <adec:decorative xmlns:adec="http://schemas.microsoft.com/office/drawing/2017/decorative" val="1"/>
@@ -14562,12 +14801,57 @@
           </a:p>
         </p:txBody>
       </p:sp>
+      <p:pic>
+        <p:nvPicPr>
+          <p:cNvPr id="5" name="Picture 6" descr="The Coca-Cola and Pepsi Duopoly: The Secret Ingredients">
+            <a:extLst>
+              <a:ext uri="{FF2B5EF4-FFF2-40B4-BE49-F238E27FC236}">
+                <a16:creationId xmlns:a16="http://schemas.microsoft.com/office/drawing/2014/main" id="{19BECBAA-D8EC-3FCB-DDC3-FA4890A08C44}"/>
+              </a:ext>
+            </a:extLst>
+          </p:cNvPr>
+          <p:cNvPicPr>
+            <a:picLocks noGrp="1" noRot="1" noChangeAspect="1" noMove="1" noResize="1" noEditPoints="1" noAdjustHandles="1" noChangeArrowheads="1" noChangeShapeType="1" noCrop="1"/>
+          </p:cNvPicPr>
+          <p:nvPr/>
+        </p:nvPicPr>
+        <p:blipFill>
+          <a:blip r:embed="rId2">
+            <a:extLst>
+              <a:ext uri="{28A0092B-C50C-407E-A947-70E740481C1C}">
+                <a14:useLocalDpi xmlns:a14="http://schemas.microsoft.com/office/drawing/2010/main" val="0"/>
+              </a:ext>
+            </a:extLst>
+          </a:blip>
+          <a:srcRect l="15363" r="18277"/>
+          <a:stretch/>
+        </p:blipFill>
+        <p:spPr bwMode="auto">
+          <a:xfrm>
+            <a:off x="3523488" y="10"/>
+            <a:ext cx="8668512" cy="6857990"/>
+          </a:xfrm>
+          <a:prstGeom prst="rect">
+            <a:avLst/>
+          </a:prstGeom>
+          <a:noFill/>
+          <a:extLst>
+            <a:ext uri="{909E8E84-426E-40DD-AFC4-6F175D3DCCD1}">
+              <a14:hiddenFill xmlns:a14="http://schemas.microsoft.com/office/drawing/2010/main">
+                <a:solidFill>
+                  <a:srgbClr val="FFFFFF"/>
+                </a:solidFill>
+              </a14:hiddenFill>
+            </a:ext>
+          </a:extLst>
+        </p:spPr>
+      </p:pic>
       <p:sp>
         <p:nvSpPr>
           <p:cNvPr id="37" name="Rectangle 36">
             <a:extLst>
               <a:ext uri="{FF2B5EF4-FFF2-40B4-BE49-F238E27FC236}">
-                <a16:creationId xmlns:a16="http://schemas.microsoft.com/office/drawing/2014/main" id="{B46C994E-CAFA-3D90-403B-077D92F45153}"/>
+                <a16:creationId xmlns:a16="http://schemas.microsoft.com/office/drawing/2014/main" id="{AE24CC89-8D4E-186C-8AC4-44FC4E0511DC}"/>
               </a:ext>
               <a:ext uri="{C183D7F6-B498-43B3-948B-1728B52AA6E4}">
                 <adec:decorative xmlns:adec="http://schemas.microsoft.com/office/drawing/2017/decorative" val="1"/>
@@ -14653,7 +14937,7 @@
           <p:cNvPr id="24" name="TextBox 23">
             <a:extLst>
               <a:ext uri="{FF2B5EF4-FFF2-40B4-BE49-F238E27FC236}">
-                <a16:creationId xmlns:a16="http://schemas.microsoft.com/office/drawing/2014/main" id="{D4476A09-97C9-87B9-5FF7-01CA50242AB7}"/>
+                <a16:creationId xmlns:a16="http://schemas.microsoft.com/office/drawing/2014/main" id="{5A667AFC-D8DF-5C6C-D479-0A3D12D3390C}"/>
               </a:ext>
             </a:extLst>
           </p:cNvPr>
@@ -14671,7 +14955,7 @@
         </p:spPr>
         <p:txBody>
           <a:bodyPr vert="horz" lIns="91440" tIns="45720" rIns="91440" bIns="45720" rtlCol="0" anchor="b">
-            <a:normAutofit/>
+            <a:normAutofit lnSpcReduction="10000"/>
           </a:bodyPr>
           <a:lstStyle/>
           <a:p>
@@ -14699,7 +14983,7 @@
                 <a:effectLst/>
                 <a:latin typeface="system-ui"/>
               </a:rPr>
-              <a:t>Preparing</a:t>
+              <a:t>Problem</a:t>
             </a:r>
             <a:r>
               <a:rPr lang="en-GB" sz="4000" b="1" dirty="0">
@@ -14728,7 +15012,7 @@
                 <a:effectLst/>
                 <a:latin typeface="system-ui"/>
               </a:rPr>
-              <a:t>Data</a:t>
+              <a:t>Statements</a:t>
             </a:r>
             <a:endParaRPr lang="en-US" sz="4000" b="1" dirty="0">
               <a:latin typeface="+mj-lt"/>
@@ -14743,7 +15027,7 @@
           <p:cNvPr id="39" name="Rectangle 38">
             <a:extLst>
               <a:ext uri="{FF2B5EF4-FFF2-40B4-BE49-F238E27FC236}">
-                <a16:creationId xmlns:a16="http://schemas.microsoft.com/office/drawing/2014/main" id="{CECA7B59-0646-D084-2370-EAB346C64724}"/>
+                <a16:creationId xmlns:a16="http://schemas.microsoft.com/office/drawing/2014/main" id="{0F335DD2-E6C5-8CC5-D561-F93C9B9EF118}"/>
               </a:ext>
               <a:ext uri="{C183D7F6-B498-43B3-948B-1728B52AA6E4}">
                 <adec:decorative xmlns:adec="http://schemas.microsoft.com/office/drawing/2017/decorative" val="1"/>
@@ -14835,7 +15119,7 @@
           <p:cNvPr id="41" name="Rectangle 40">
             <a:extLst>
               <a:ext uri="{FF2B5EF4-FFF2-40B4-BE49-F238E27FC236}">
-                <a16:creationId xmlns:a16="http://schemas.microsoft.com/office/drawing/2014/main" id="{8E9C2CA0-62A6-806E-C7A0-3E7D6CDA4E75}"/>
+                <a16:creationId xmlns:a16="http://schemas.microsoft.com/office/drawing/2014/main" id="{B33172F3-9494-1177-9A97-106BA1D34771}"/>
               </a:ext>
               <a:ext uri="{C183D7F6-B498-43B3-948B-1728B52AA6E4}">
                 <adec:decorative xmlns:adec="http://schemas.microsoft.com/office/drawing/2017/decorative" val="1"/>
@@ -14933,10 +15217,10 @@
       </p:sp>
       <p:sp>
         <p:nvSpPr>
-          <p:cNvPr id="11" name="TextBox 10">
-            <a:extLst>
-              <a:ext uri="{FF2B5EF4-FFF2-40B4-BE49-F238E27FC236}">
-                <a16:creationId xmlns:a16="http://schemas.microsoft.com/office/drawing/2014/main" id="{1C2AE4BB-E3B1-9960-7F82-FACE3067476E}"/>
+          <p:cNvPr id="18" name="TextBox 17">
+            <a:extLst>
+              <a:ext uri="{FF2B5EF4-FFF2-40B4-BE49-F238E27FC236}">
+                <a16:creationId xmlns:a16="http://schemas.microsoft.com/office/drawing/2014/main" id="{0D4962A4-F8DA-D284-7C5F-6E96D3548991}"/>
               </a:ext>
             </a:extLst>
           </p:cNvPr>
@@ -14965,7 +15249,53 @@
               <a:buFont typeface="Arial" panose="020B0604020202020204" pitchFamily="34" charset="0"/>
               <a:buChar char="•"/>
             </a:pPr>
-            <a:endParaRPr lang="en-US" sz="1600" b="1" dirty="0"/>
+            <a:r>
+              <a:rPr lang="en-US" b="1" dirty="0"/>
+              <a:t>What People Are Talking About:</a:t>
+            </a:r>
+            <a:r>
+              <a:rPr lang="en-US" dirty="0"/>
+              <a:t> </a:t>
+            </a:r>
+          </a:p>
+          <a:p>
+            <a:pPr marL="114300">
+              <a:spcAft>
+                <a:spcPts val="600"/>
+              </a:spcAft>
+            </a:pPr>
+            <a:r>
+              <a:rPr lang="en-US" sz="1400" dirty="0"/>
+              <a:t>Find the common words and sentiment in discussions about </a:t>
+            </a:r>
+            <a:r>
+              <a:rPr lang="en-US" sz="1400" b="1" dirty="0">
+                <a:solidFill>
+                  <a:srgbClr val="004A97"/>
+                </a:solidFill>
+              </a:rPr>
+              <a:t>Pepsi</a:t>
+            </a:r>
+            <a:r>
+              <a:rPr lang="en-US" sz="1400" dirty="0"/>
+              <a:t> and </a:t>
+            </a:r>
+            <a:r>
+              <a:rPr lang="en-US" sz="1400" b="1" dirty="0">
+                <a:solidFill>
+                  <a:srgbClr val="D61F25"/>
+                </a:solidFill>
+              </a:rPr>
+              <a:t>Coca-Cola</a:t>
+            </a:r>
+            <a:r>
+              <a:rPr lang="en-US" sz="1400" dirty="0"/>
+              <a:t> to see what people are interested in.</a:t>
+            </a:r>
+            <a:r>
+              <a:rPr lang="en-US" sz="1400" b="1" dirty="0"/>
+              <a:t> </a:t>
+            </a:r>
           </a:p>
           <a:p>
             <a:pPr marL="342900" indent="-228600">
@@ -14975,591 +15305,23 @@
               <a:buFont typeface="Arial" panose="020B0604020202020204" pitchFamily="34" charset="0"/>
               <a:buChar char="•"/>
             </a:pPr>
-            <a:endParaRPr lang="en-US" sz="1600" b="1" dirty="0"/>
-          </a:p>
-          <a:p>
-            <a:pPr marL="342900" indent="-228600">
-              <a:spcAft>
-                <a:spcPts val="600"/>
-              </a:spcAft>
-              <a:buFont typeface="Arial" panose="020B0604020202020204" pitchFamily="34" charset="0"/>
-              <a:buChar char="•"/>
-            </a:pPr>
-            <a:endParaRPr lang="en-US" sz="1600" b="1" dirty="0"/>
-          </a:p>
-          <a:p>
-            <a:pPr marL="342900" indent="-228600">
-              <a:spcAft>
-                <a:spcPts val="600"/>
-              </a:spcAft>
-              <a:buFont typeface="Arial" panose="020B0604020202020204" pitchFamily="34" charset="0"/>
-              <a:buChar char="•"/>
-            </a:pPr>
-            <a:endParaRPr lang="en-US" sz="1600" b="1" dirty="0"/>
-          </a:p>
-          <a:p>
-            <a:pPr marL="342900" indent="-228600">
-              <a:spcAft>
-                <a:spcPts val="600"/>
-              </a:spcAft>
-              <a:buFont typeface="Arial" panose="020B0604020202020204" pitchFamily="34" charset="0"/>
-              <a:buChar char="•"/>
-            </a:pPr>
-            <a:endParaRPr lang="en-US" sz="1600" b="1" dirty="0"/>
-          </a:p>
-          <a:p>
-            <a:pPr marL="342900" indent="-228600">
-              <a:spcAft>
-                <a:spcPts val="600"/>
-              </a:spcAft>
-              <a:buFont typeface="Arial" panose="020B0604020202020204" pitchFamily="34" charset="0"/>
-              <a:buChar char="•"/>
-            </a:pPr>
-            <a:r>
-              <a:rPr lang="en-US" sz="1600" b="1" dirty="0"/>
-              <a:t>Concatenate Title and Body</a:t>
-            </a:r>
-          </a:p>
-          <a:p>
-            <a:pPr marL="342900" indent="-228600">
-              <a:spcAft>
-                <a:spcPts val="600"/>
-              </a:spcAft>
-              <a:buFont typeface="Arial" panose="020B0604020202020204" pitchFamily="34" charset="0"/>
-              <a:buChar char="•"/>
-            </a:pPr>
-            <a:r>
-              <a:rPr lang="en-US" sz="1600" b="1" dirty="0"/>
-              <a:t>Create column </a:t>
-            </a:r>
-            <a:r>
-              <a:rPr lang="en-US" sz="1600" b="1" dirty="0">
-                <a:solidFill>
-                  <a:srgbClr val="D61F25"/>
-                </a:solidFill>
-              </a:rPr>
-              <a:t>is_</a:t>
-            </a:r>
-            <a:r>
-              <a:rPr lang="en-US" sz="1600" b="1" dirty="0">
-                <a:solidFill>
-                  <a:srgbClr val="004A97"/>
-                </a:solidFill>
-              </a:rPr>
-              <a:t>pepsi</a:t>
-            </a:r>
-          </a:p>
-          <a:p>
-            <a:pPr marL="342900" indent="-228600">
-              <a:spcAft>
-                <a:spcPts val="600"/>
-              </a:spcAft>
-              <a:buFont typeface="Arial" panose="020B0604020202020204" pitchFamily="34" charset="0"/>
-              <a:buChar char="•"/>
-            </a:pPr>
-            <a:r>
-              <a:rPr lang="en-US" sz="1600" b="1" dirty="0"/>
-              <a:t>Lower text and remove related words; </a:t>
-            </a:r>
-            <a:r>
-              <a:rPr lang="en-US" sz="1600" b="1" dirty="0">
-                <a:solidFill>
-                  <a:srgbClr val="004A97"/>
-                </a:solidFill>
-              </a:rPr>
-              <a:t>pepsi, pepsico,</a:t>
-            </a:r>
-            <a:r>
-              <a:rPr lang="en-US" sz="1600" b="1" dirty="0"/>
-              <a:t> </a:t>
-            </a:r>
-            <a:r>
-              <a:rPr lang="en-US" sz="1600" b="1" dirty="0">
-                <a:solidFill>
-                  <a:srgbClr val="D61F25"/>
-                </a:solidFill>
-              </a:rPr>
-              <a:t>coca, cola, coke</a:t>
-            </a:r>
-          </a:p>
-          <a:p>
-            <a:pPr marL="571500" lvl="1">
+            <a:r>
+              <a:rPr lang="en-US" b="1" dirty="0"/>
+              <a:t>Matching Brand Identity:</a:t>
+            </a:r>
+          </a:p>
+          <a:p>
+            <a:pPr marL="114300">
               <a:spcAft>
                 <a:spcPts val="600"/>
               </a:spcAft>
             </a:pPr>
-            <a:endParaRPr lang="en-US" sz="1600" b="1" dirty="0"/>
-          </a:p>
-        </p:txBody>
-      </p:sp>
-      <p:pic>
-        <p:nvPicPr>
-          <p:cNvPr id="6" name="Picture 5">
-            <a:extLst>
-              <a:ext uri="{FF2B5EF4-FFF2-40B4-BE49-F238E27FC236}">
-                <a16:creationId xmlns:a16="http://schemas.microsoft.com/office/drawing/2014/main" id="{DA883CC9-4924-6FFD-BBEC-F45B3544CC96}"/>
-              </a:ext>
-            </a:extLst>
-          </p:cNvPr>
-          <p:cNvPicPr>
-            <a:picLocks noChangeAspect="1"/>
-          </p:cNvPicPr>
-          <p:nvPr/>
-        </p:nvPicPr>
-        <p:blipFill>
-          <a:blip r:embed="rId2"/>
-          <a:stretch>
-            <a:fillRect/>
-          </a:stretch>
-        </p:blipFill>
-        <p:spPr>
-          <a:xfrm>
-            <a:off x="4801442" y="483955"/>
-            <a:ext cx="6171336" cy="5890089"/>
-          </a:xfrm>
-          <a:prstGeom prst="rect">
-            <a:avLst/>
-          </a:prstGeom>
-        </p:spPr>
-      </p:pic>
-      <p:pic>
-        <p:nvPicPr>
-          <p:cNvPr id="3" name="Picture 4" descr="Reddit - Wikipedia">
-            <a:extLst>
-              <a:ext uri="{FF2B5EF4-FFF2-40B4-BE49-F238E27FC236}">
-                <a16:creationId xmlns:a16="http://schemas.microsoft.com/office/drawing/2014/main" id="{D56EEECA-EE93-234C-6682-4DE9ED0215C0}"/>
-              </a:ext>
-            </a:extLst>
-          </p:cNvPr>
-          <p:cNvPicPr>
-            <a:picLocks noChangeAspect="1" noChangeArrowheads="1"/>
-          </p:cNvPicPr>
-          <p:nvPr/>
-        </p:nvPicPr>
-        <p:blipFill>
-          <a:blip r:embed="rId3">
-            <a:extLst>
-              <a:ext uri="{28A0092B-C50C-407E-A947-70E740481C1C}">
-                <a14:useLocalDpi xmlns:a14="http://schemas.microsoft.com/office/drawing/2010/main" val="0"/>
-              </a:ext>
-            </a:extLst>
-          </a:blip>
-          <a:srcRect/>
-          <a:stretch>
-            <a:fillRect/>
-          </a:stretch>
-        </p:blipFill>
-        <p:spPr bwMode="auto">
-          <a:xfrm>
-            <a:off x="9129004" y="4956102"/>
-            <a:ext cx="880537" cy="880537"/>
-          </a:xfrm>
-          <a:prstGeom prst="rect">
-            <a:avLst/>
-          </a:prstGeom>
-          <a:noFill/>
-          <a:extLst>
-            <a:ext uri="{909E8E84-426E-40DD-AFC4-6F175D3DCCD1}">
-              <a14:hiddenFill xmlns:a14="http://schemas.microsoft.com/office/drawing/2010/main">
-                <a:solidFill>
-                  <a:srgbClr val="FFFFFF"/>
-                </a:solidFill>
-              </a14:hiddenFill>
-            </a:ext>
-          </a:extLst>
-        </p:spPr>
-      </p:pic>
-      <p:sp>
-        <p:nvSpPr>
-          <p:cNvPr id="7" name="Rectangle 6">
-            <a:extLst>
-              <a:ext uri="{FF2B5EF4-FFF2-40B4-BE49-F238E27FC236}">
-                <a16:creationId xmlns:a16="http://schemas.microsoft.com/office/drawing/2014/main" id="{A6B81A6E-9A8A-75DD-0AA2-419868695A2A}"/>
-              </a:ext>
-            </a:extLst>
-          </p:cNvPr>
-          <p:cNvSpPr/>
-          <p:nvPr/>
-        </p:nvSpPr>
-        <p:spPr>
-          <a:xfrm>
-            <a:off x="5145432" y="4674870"/>
-            <a:ext cx="963168" cy="286893"/>
-          </a:xfrm>
-          <a:prstGeom prst="rect">
-            <a:avLst/>
-          </a:prstGeom>
-        </p:spPr>
-        <p:style>
-          <a:lnRef idx="2">
-            <a:schemeClr val="dk1">
-              <a:shade val="15000"/>
-            </a:schemeClr>
-          </a:lnRef>
-          <a:fillRef idx="1">
-            <a:schemeClr val="dk1"/>
-          </a:fillRef>
-          <a:effectRef idx="0">
-            <a:schemeClr val="dk1"/>
-          </a:effectRef>
-          <a:fontRef idx="minor">
-            <a:schemeClr val="lt1"/>
-          </a:fontRef>
-        </p:style>
-        <p:txBody>
-          <a:bodyPr rtlCol="0" anchor="ctr"/>
-          <a:lstStyle/>
-          <a:p>
-            <a:pPr algn="ctr"/>
-            <a:endParaRPr lang="en-AE"/>
-          </a:p>
-        </p:txBody>
-      </p:sp>
-      <p:sp>
-        <p:nvSpPr>
-          <p:cNvPr id="8" name="Rectangle 7">
-            <a:extLst>
-              <a:ext uri="{FF2B5EF4-FFF2-40B4-BE49-F238E27FC236}">
-                <a16:creationId xmlns:a16="http://schemas.microsoft.com/office/drawing/2014/main" id="{E8077362-D49F-CC1C-4720-9595B7E1F7AF}"/>
-              </a:ext>
-            </a:extLst>
-          </p:cNvPr>
-          <p:cNvSpPr/>
-          <p:nvPr/>
-        </p:nvSpPr>
-        <p:spPr>
-          <a:xfrm>
-            <a:off x="5145432" y="5588554"/>
-            <a:ext cx="1219200" cy="286893"/>
-          </a:xfrm>
-          <a:prstGeom prst="rect">
-            <a:avLst/>
-          </a:prstGeom>
-        </p:spPr>
-        <p:style>
-          <a:lnRef idx="2">
-            <a:schemeClr val="dk1">
-              <a:shade val="15000"/>
-            </a:schemeClr>
-          </a:lnRef>
-          <a:fillRef idx="1">
-            <a:schemeClr val="dk1"/>
-          </a:fillRef>
-          <a:effectRef idx="0">
-            <a:schemeClr val="dk1"/>
-          </a:effectRef>
-          <a:fontRef idx="minor">
-            <a:schemeClr val="lt1"/>
-          </a:fontRef>
-        </p:style>
-        <p:txBody>
-          <a:bodyPr rtlCol="0" anchor="ctr"/>
-          <a:lstStyle/>
-          <a:p>
-            <a:pPr algn="ctr"/>
-            <a:endParaRPr lang="en-AE"/>
-          </a:p>
-        </p:txBody>
-      </p:sp>
-      <p:sp>
-        <p:nvSpPr>
-          <p:cNvPr id="9" name="Rectangle 8">
-            <a:extLst>
-              <a:ext uri="{FF2B5EF4-FFF2-40B4-BE49-F238E27FC236}">
-                <a16:creationId xmlns:a16="http://schemas.microsoft.com/office/drawing/2014/main" id="{DC4CD9B4-63B2-FF2F-AC0B-831A49D284D6}"/>
-              </a:ext>
-            </a:extLst>
-          </p:cNvPr>
-          <p:cNvSpPr/>
-          <p:nvPr/>
-        </p:nvSpPr>
-        <p:spPr>
-          <a:xfrm>
-            <a:off x="5130404" y="736663"/>
-            <a:ext cx="1023916" cy="106871"/>
-          </a:xfrm>
-          <a:prstGeom prst="rect">
-            <a:avLst/>
-          </a:prstGeom>
-        </p:spPr>
-        <p:style>
-          <a:lnRef idx="2">
-            <a:schemeClr val="dk1">
-              <a:shade val="15000"/>
-            </a:schemeClr>
-          </a:lnRef>
-          <a:fillRef idx="1">
-            <a:schemeClr val="dk1"/>
-          </a:fillRef>
-          <a:effectRef idx="0">
-            <a:schemeClr val="dk1"/>
-          </a:effectRef>
-          <a:fontRef idx="minor">
-            <a:schemeClr val="lt1"/>
-          </a:fontRef>
-        </p:style>
-        <p:txBody>
-          <a:bodyPr rtlCol="0" anchor="ctr"/>
-          <a:lstStyle/>
-          <a:p>
-            <a:pPr algn="ctr"/>
-            <a:endParaRPr lang="en-AE"/>
-          </a:p>
-        </p:txBody>
-      </p:sp>
-      <p:cxnSp>
-        <p:nvCxnSpPr>
-          <p:cNvPr id="14" name="Straight Arrow Connector 13">
-            <a:extLst>
-              <a:ext uri="{FF2B5EF4-FFF2-40B4-BE49-F238E27FC236}">
-                <a16:creationId xmlns:a16="http://schemas.microsoft.com/office/drawing/2014/main" id="{5AE7ED98-16AA-8727-A3C8-C00CB857592E}"/>
-              </a:ext>
-            </a:extLst>
-          </p:cNvPr>
-          <p:cNvCxnSpPr>
-            <a:cxnSpLocks/>
-            <a:endCxn id="17" idx="3"/>
-          </p:cNvCxnSpPr>
-          <p:nvPr/>
-        </p:nvCxnSpPr>
-        <p:spPr>
-          <a:xfrm>
-            <a:off x="7362455" y="1161288"/>
-            <a:ext cx="3626291" cy="21892"/>
-          </a:xfrm>
-          <a:prstGeom prst="straightConnector1">
-            <a:avLst/>
-          </a:prstGeom>
-          <a:ln w="57150">
-            <a:solidFill>
-              <a:srgbClr val="FF4500"/>
-            </a:solidFill>
-            <a:tailEnd type="triangle"/>
-          </a:ln>
-        </p:spPr>
-        <p:style>
-          <a:lnRef idx="1">
-            <a:schemeClr val="accent1"/>
-          </a:lnRef>
-          <a:fillRef idx="0">
-            <a:schemeClr val="accent1"/>
-          </a:fillRef>
-          <a:effectRef idx="0">
-            <a:schemeClr val="accent1"/>
-          </a:effectRef>
-          <a:fontRef idx="minor">
-            <a:schemeClr val="tx1"/>
-          </a:fontRef>
-        </p:style>
-      </p:cxnSp>
-      <p:cxnSp>
-        <p:nvCxnSpPr>
-          <p:cNvPr id="16" name="Straight Arrow Connector 15">
-            <a:extLst>
-              <a:ext uri="{FF2B5EF4-FFF2-40B4-BE49-F238E27FC236}">
-                <a16:creationId xmlns:a16="http://schemas.microsoft.com/office/drawing/2014/main" id="{2ADDDB5E-BB0C-7228-B4C1-802173E04BD5}"/>
-              </a:ext>
-            </a:extLst>
-          </p:cNvPr>
-          <p:cNvCxnSpPr>
-            <a:cxnSpLocks/>
-            <a:endCxn id="18" idx="3"/>
-          </p:cNvCxnSpPr>
-          <p:nvPr/>
-        </p:nvCxnSpPr>
-        <p:spPr>
-          <a:xfrm>
-            <a:off x="7362455" y="1461629"/>
-            <a:ext cx="3533099" cy="21892"/>
-          </a:xfrm>
-          <a:prstGeom prst="straightConnector1">
-            <a:avLst/>
-          </a:prstGeom>
-          <a:ln w="57150">
-            <a:solidFill>
-              <a:srgbClr val="FF4500"/>
-            </a:solidFill>
-            <a:tailEnd type="triangle"/>
-          </a:ln>
-        </p:spPr>
-        <p:style>
-          <a:lnRef idx="1">
-            <a:schemeClr val="accent1"/>
-          </a:lnRef>
-          <a:fillRef idx="0">
-            <a:schemeClr val="accent1"/>
-          </a:fillRef>
-          <a:effectRef idx="0">
-            <a:schemeClr val="accent1"/>
-          </a:effectRef>
-          <a:fontRef idx="minor">
-            <a:schemeClr val="tx1"/>
-          </a:fontRef>
-        </p:style>
-      </p:cxnSp>
-      <p:sp>
-        <p:nvSpPr>
-          <p:cNvPr id="17" name="TextBox 16">
-            <a:extLst>
-              <a:ext uri="{FF2B5EF4-FFF2-40B4-BE49-F238E27FC236}">
-                <a16:creationId xmlns:a16="http://schemas.microsoft.com/office/drawing/2014/main" id="{188778BD-F1B6-3D8C-5B8B-B9A813CEEE16}"/>
-              </a:ext>
-            </a:extLst>
-          </p:cNvPr>
-          <p:cNvSpPr txBox="1"/>
-          <p:nvPr/>
-        </p:nvSpPr>
-        <p:spPr>
-          <a:xfrm flipH="1">
-            <a:off x="10988746" y="998514"/>
-            <a:ext cx="699505" cy="369332"/>
-          </a:xfrm>
-          <a:prstGeom prst="rect">
-            <a:avLst/>
-          </a:prstGeom>
-          <a:noFill/>
-        </p:spPr>
-        <p:txBody>
-          <a:bodyPr wrap="square" rtlCol="0">
-            <a:spAutoFit/>
-          </a:bodyPr>
-          <a:lstStyle/>
-          <a:p>
-            <a:r>
-              <a:rPr lang="en-US" b="1" dirty="0">
-                <a:solidFill>
-                  <a:srgbClr val="FF0000"/>
-                </a:solidFill>
-              </a:rPr>
-              <a:t>Title</a:t>
-            </a:r>
-            <a:endParaRPr lang="en-AE" b="1" dirty="0">
-              <a:solidFill>
-                <a:srgbClr val="FF0000"/>
-              </a:solidFill>
-            </a:endParaRPr>
-          </a:p>
-        </p:txBody>
-      </p:sp>
-      <p:sp>
-        <p:nvSpPr>
-          <p:cNvPr id="18" name="TextBox 17">
-            <a:extLst>
-              <a:ext uri="{FF2B5EF4-FFF2-40B4-BE49-F238E27FC236}">
-                <a16:creationId xmlns:a16="http://schemas.microsoft.com/office/drawing/2014/main" id="{2809B77A-FE57-0CA7-4E88-49DBCCEFB705}"/>
-              </a:ext>
-            </a:extLst>
-          </p:cNvPr>
-          <p:cNvSpPr txBox="1"/>
-          <p:nvPr/>
-        </p:nvSpPr>
-        <p:spPr>
-          <a:xfrm flipH="1">
-            <a:off x="10895554" y="1298855"/>
-            <a:ext cx="797611" cy="369332"/>
-          </a:xfrm>
-          <a:prstGeom prst="rect">
-            <a:avLst/>
-          </a:prstGeom>
-          <a:noFill/>
-        </p:spPr>
-        <p:txBody>
-          <a:bodyPr wrap="square" rtlCol="0">
-            <a:spAutoFit/>
-          </a:bodyPr>
-          <a:lstStyle/>
-          <a:p>
-            <a:r>
-              <a:rPr lang="en-US" b="1" dirty="0">
-                <a:solidFill>
-                  <a:srgbClr val="FF0000"/>
-                </a:solidFill>
-              </a:rPr>
-              <a:t>Body</a:t>
-            </a:r>
-            <a:endParaRPr lang="en-AE" b="1" dirty="0">
-              <a:solidFill>
-                <a:srgbClr val="FF0000"/>
-              </a:solidFill>
-            </a:endParaRPr>
-          </a:p>
-        </p:txBody>
-      </p:sp>
-      <p:sp>
-        <p:nvSpPr>
-          <p:cNvPr id="22" name="TextBox 21">
-            <a:extLst>
-              <a:ext uri="{FF2B5EF4-FFF2-40B4-BE49-F238E27FC236}">
-                <a16:creationId xmlns:a16="http://schemas.microsoft.com/office/drawing/2014/main" id="{6FBD832C-837B-886E-61A5-224BDFEEBBB2}"/>
-              </a:ext>
-            </a:extLst>
-          </p:cNvPr>
-          <p:cNvSpPr txBox="1"/>
-          <p:nvPr/>
-        </p:nvSpPr>
-        <p:spPr>
-          <a:xfrm flipH="1">
-            <a:off x="9372959" y="529103"/>
-            <a:ext cx="1425211" cy="369332"/>
-          </a:xfrm>
-          <a:prstGeom prst="rect">
-            <a:avLst/>
-          </a:prstGeom>
-          <a:noFill/>
-        </p:spPr>
-        <p:txBody>
-          <a:bodyPr wrap="square" rtlCol="0">
-            <a:spAutoFit/>
-          </a:bodyPr>
-          <a:lstStyle/>
-          <a:p>
-            <a:r>
-              <a:rPr lang="en-US" b="1" dirty="0">
-                <a:solidFill>
-                  <a:srgbClr val="FF0000"/>
-                </a:solidFill>
-              </a:rPr>
-              <a:t>is_pepsi = 1</a:t>
-            </a:r>
-            <a:endParaRPr lang="en-AE" b="1" dirty="0">
-              <a:solidFill>
-                <a:srgbClr val="FF0000"/>
-              </a:solidFill>
-            </a:endParaRPr>
-          </a:p>
-        </p:txBody>
-      </p:sp>
-      <p:sp>
-        <p:nvSpPr>
-          <p:cNvPr id="23" name="TextBox 22">
-            <a:extLst>
-              <a:ext uri="{FF2B5EF4-FFF2-40B4-BE49-F238E27FC236}">
-                <a16:creationId xmlns:a16="http://schemas.microsoft.com/office/drawing/2014/main" id="{A149F613-606A-839B-EE7A-425107FBACF6}"/>
-              </a:ext>
-            </a:extLst>
-          </p:cNvPr>
-          <p:cNvSpPr txBox="1"/>
-          <p:nvPr/>
-        </p:nvSpPr>
-        <p:spPr>
-          <a:xfrm>
-            <a:off x="848087" y="2906974"/>
-            <a:ext cx="872355" cy="923330"/>
-          </a:xfrm>
-          <a:prstGeom prst="rect">
-            <a:avLst/>
-          </a:prstGeom>
-          <a:noFill/>
-        </p:spPr>
-        <p:txBody>
-          <a:bodyPr wrap="none" rtlCol="0">
-            <a:spAutoFit/>
-          </a:bodyPr>
-          <a:lstStyle/>
-          <a:p>
-            <a:pPr algn="ctr"/>
-            <a:r>
-              <a:rPr lang="en-US" b="1" dirty="0">
+            <a:r>
+              <a:rPr lang="en-US" sz="1400" dirty="0"/>
+              <a:t>Use an NLP model to predict if a message is about </a:t>
+            </a:r>
+            <a:r>
+              <a:rPr lang="en-US" sz="1400" b="1" dirty="0">
                 <a:solidFill>
                   <a:srgbClr val="004A97"/>
                 </a:solidFill>
@@ -15567,59 +15329,11 @@
               <a:t>Pepsi</a:t>
             </a:r>
             <a:r>
-              <a:rPr lang="en-US" dirty="0"/>
-              <a:t> </a:t>
-            </a:r>
-            <a:endParaRPr lang="en-US" b="1" dirty="0"/>
-          </a:p>
-          <a:p>
-            <a:pPr algn="ctr"/>
-            <a:r>
-              <a:rPr lang="en-US" b="1" dirty="0"/>
-              <a:t>995</a:t>
-            </a:r>
-          </a:p>
-          <a:p>
-            <a:pPr algn="ctr"/>
-            <a:r>
-              <a:rPr lang="en-US" b="1" dirty="0"/>
-              <a:t>Posts</a:t>
-            </a:r>
-            <a:endParaRPr lang="en-AE" b="1" dirty="0"/>
-          </a:p>
-        </p:txBody>
-      </p:sp>
-      <p:sp>
-        <p:nvSpPr>
-          <p:cNvPr id="25" name="TextBox 24">
-            <a:extLst>
-              <a:ext uri="{FF2B5EF4-FFF2-40B4-BE49-F238E27FC236}">
-                <a16:creationId xmlns:a16="http://schemas.microsoft.com/office/drawing/2014/main" id="{16F199D4-AD0F-021E-1BEF-A0F695CBE4B1}"/>
-              </a:ext>
-            </a:extLst>
-          </p:cNvPr>
-          <p:cNvSpPr txBox="1"/>
-          <p:nvPr/>
-        </p:nvSpPr>
-        <p:spPr>
-          <a:xfrm>
-            <a:off x="2058669" y="2888686"/>
-            <a:ext cx="1418978" cy="923330"/>
-          </a:xfrm>
-          <a:prstGeom prst="rect">
-            <a:avLst/>
-          </a:prstGeom>
-          <a:noFill/>
-        </p:spPr>
-        <p:txBody>
-          <a:bodyPr wrap="none" rtlCol="0">
-            <a:spAutoFit/>
-          </a:bodyPr>
-          <a:lstStyle/>
-          <a:p>
-            <a:pPr algn="ctr"/>
-            <a:r>
-              <a:rPr lang="en-US" b="1" dirty="0">
+              <a:rPr lang="en-US" sz="1400" dirty="0"/>
+              <a:t> or </a:t>
+            </a:r>
+            <a:r>
+              <a:rPr lang="en-US" sz="1400" b="1" dirty="0">
                 <a:solidFill>
                   <a:srgbClr val="D61F25"/>
                 </a:solidFill>
@@ -15627,31 +15341,17 @@
               <a:t>Coca-Cola</a:t>
             </a:r>
             <a:r>
-              <a:rPr lang="en-US" b="1" dirty="0"/>
-              <a:t> </a:t>
-            </a:r>
-          </a:p>
-          <a:p>
-            <a:pPr algn="ctr"/>
-            <a:r>
-              <a:rPr lang="en-US" b="1" dirty="0"/>
-              <a:t>963</a:t>
-            </a:r>
-          </a:p>
-          <a:p>
-            <a:pPr algn="ctr"/>
-            <a:r>
-              <a:rPr lang="en-US" b="1" dirty="0"/>
-              <a:t>Post</a:t>
-            </a:r>
-            <a:endParaRPr lang="en-AE" b="1" dirty="0"/>
+              <a:rPr lang="en-US" sz="1400" dirty="0"/>
+              <a:t> and check if it matches each brand's mission.</a:t>
+            </a:r>
+            <a:endParaRPr lang="en-US" sz="1400" b="1" dirty="0"/>
           </a:p>
         </p:txBody>
       </p:sp>
     </p:spTree>
     <p:extLst>
       <p:ext uri="{BB962C8B-B14F-4D97-AF65-F5344CB8AC3E}">
-        <p14:creationId xmlns:p14="http://schemas.microsoft.com/office/powerpoint/2010/main" val="1491957436"/>
+        <p14:creationId xmlns:p14="http://schemas.microsoft.com/office/powerpoint/2010/main" val="1880447282"/>
       </p:ext>
     </p:extLst>
   </p:cSld>
@@ -15661,7 +15361,7 @@
 </p:sld>
 </file>
 
-<file path=ppt/slides/slide4.xml><?xml version="1.0" encoding="utf-8"?>
+<file path=ppt/slides/slide3.xml><?xml version="1.0" encoding="utf-8"?>
 <p:sld xmlns:a="http://schemas.openxmlformats.org/drawingml/2006/main" xmlns:r="http://schemas.openxmlformats.org/officeDocument/2006/relationships" xmlns:p="http://schemas.openxmlformats.org/presentationml/2006/main">
   <p:cSld>
     <p:bg>
@@ -15674,13 +15374,7 @@
     </p:bg>
     <p:spTree>
       <p:nvGrpSpPr>
-        <p:cNvPr id="1" name="">
-          <a:extLst>
-            <a:ext uri="{FF2B5EF4-FFF2-40B4-BE49-F238E27FC236}">
-              <a16:creationId xmlns:a16="http://schemas.microsoft.com/office/drawing/2014/main" id="{C288AC5A-61D9-1A24-37D9-B7F850B204EA}"/>
-            </a:ext>
-          </a:extLst>
-        </p:cNvPr>
+        <p:cNvPr id="1" name=""/>
         <p:cNvGrpSpPr/>
         <p:nvPr/>
       </p:nvGrpSpPr>
@@ -15697,7 +15391,7 @@
           <p:cNvPr id="29" name="Rectangle 28">
             <a:extLst>
               <a:ext uri="{FF2B5EF4-FFF2-40B4-BE49-F238E27FC236}">
-                <a16:creationId xmlns:a16="http://schemas.microsoft.com/office/drawing/2014/main" id="{8F5D788B-BD87-B29E-E036-C5E747511046}"/>
+                <a16:creationId xmlns:a16="http://schemas.microsoft.com/office/drawing/2014/main" id="{2D6FBB9D-1CAA-4D05-AB33-BABDFE17B843}"/>
               </a:ext>
               <a:ext uri="{C183D7F6-B498-43B3-948B-1728B52AA6E4}">
                 <adec:decorative xmlns:adec="http://schemas.microsoft.com/office/drawing/2017/decorative" val="1"/>
@@ -15799,7 +15493,7 @@
           <p:cNvPr id="31" name="Rectangle 30">
             <a:extLst>
               <a:ext uri="{FF2B5EF4-FFF2-40B4-BE49-F238E27FC236}">
-                <a16:creationId xmlns:a16="http://schemas.microsoft.com/office/drawing/2014/main" id="{3DEFE4F9-1900-081D-EE6C-D9184B244C38}"/>
+                <a16:creationId xmlns:a16="http://schemas.microsoft.com/office/drawing/2014/main" id="{04727B71-B4B6-4823-80A1-68C40B475118}"/>
               </a:ext>
               <a:ext uri="{C183D7F6-B498-43B3-948B-1728B52AA6E4}">
                 <adec:decorative xmlns:adec="http://schemas.microsoft.com/office/drawing/2017/decorative" val="1"/>
@@ -15889,7 +15583,7 @@
           <p:cNvPr id="33" name="Rectangle 32">
             <a:extLst>
               <a:ext uri="{FF2B5EF4-FFF2-40B4-BE49-F238E27FC236}">
-                <a16:creationId xmlns:a16="http://schemas.microsoft.com/office/drawing/2014/main" id="{7E1B7086-B841-4D71-59B3-9CE357A04F1C}"/>
+                <a16:creationId xmlns:a16="http://schemas.microsoft.com/office/drawing/2014/main" id="{79A6DB05-9FB5-4B07-8675-74C23D4FD89D}"/>
               </a:ext>
               <a:ext uri="{C183D7F6-B498-43B3-948B-1728B52AA6E4}">
                 <adec:decorative xmlns:adec="http://schemas.microsoft.com/office/drawing/2017/decorative" val="1"/>
@@ -15981,7 +15675,7 @@
           <p:cNvPr id="35" name="Rectangle 34">
             <a:extLst>
               <a:ext uri="{FF2B5EF4-FFF2-40B4-BE49-F238E27FC236}">
-                <a16:creationId xmlns:a16="http://schemas.microsoft.com/office/drawing/2014/main" id="{813D45DA-B74D-70B5-9A46-0B75B27AF4B4}"/>
+                <a16:creationId xmlns:a16="http://schemas.microsoft.com/office/drawing/2014/main" id="{8FC9BE17-9A7B-462D-AE50-3D8777387304}"/>
               </a:ext>
               <a:ext uri="{C183D7F6-B498-43B3-948B-1728B52AA6E4}">
                 <adec:decorative xmlns:adec="http://schemas.microsoft.com/office/drawing/2017/decorative" val="1"/>
@@ -16036,12 +15730,57 @@
           </a:p>
         </p:txBody>
       </p:sp>
+      <p:pic>
+        <p:nvPicPr>
+          <p:cNvPr id="5" name="Picture 6" descr="The Coca-Cola and Pepsi Duopoly: The Secret Ingredients">
+            <a:extLst>
+              <a:ext uri="{FF2B5EF4-FFF2-40B4-BE49-F238E27FC236}">
+                <a16:creationId xmlns:a16="http://schemas.microsoft.com/office/drawing/2014/main" id="{E9578439-BA63-A91F-285F-397EF7087382}"/>
+              </a:ext>
+            </a:extLst>
+          </p:cNvPr>
+          <p:cNvPicPr>
+            <a:picLocks noGrp="1" noRot="1" noChangeAspect="1" noMove="1" noResize="1" noEditPoints="1" noAdjustHandles="1" noChangeArrowheads="1" noChangeShapeType="1" noCrop="1"/>
+          </p:cNvPicPr>
+          <p:nvPr/>
+        </p:nvPicPr>
+        <p:blipFill>
+          <a:blip r:embed="rId2">
+            <a:extLst>
+              <a:ext uri="{28A0092B-C50C-407E-A947-70E740481C1C}">
+                <a14:useLocalDpi xmlns:a14="http://schemas.microsoft.com/office/drawing/2010/main" val="0"/>
+              </a:ext>
+            </a:extLst>
+          </a:blip>
+          <a:srcRect l="15363" r="18277"/>
+          <a:stretch/>
+        </p:blipFill>
+        <p:spPr bwMode="auto">
+          <a:xfrm>
+            <a:off x="3523488" y="10"/>
+            <a:ext cx="8668512" cy="6857990"/>
+          </a:xfrm>
+          <a:prstGeom prst="rect">
+            <a:avLst/>
+          </a:prstGeom>
+          <a:noFill/>
+          <a:extLst>
+            <a:ext uri="{909E8E84-426E-40DD-AFC4-6F175D3DCCD1}">
+              <a14:hiddenFill xmlns:a14="http://schemas.microsoft.com/office/drawing/2010/main">
+                <a:solidFill>
+                  <a:srgbClr val="FFFFFF"/>
+                </a:solidFill>
+              </a14:hiddenFill>
+            </a:ext>
+          </a:extLst>
+        </p:spPr>
+      </p:pic>
       <p:sp>
         <p:nvSpPr>
           <p:cNvPr id="37" name="Rectangle 36">
             <a:extLst>
               <a:ext uri="{FF2B5EF4-FFF2-40B4-BE49-F238E27FC236}">
-                <a16:creationId xmlns:a16="http://schemas.microsoft.com/office/drawing/2014/main" id="{5E8CDE99-77F9-1330-A212-22C9A494E929}"/>
+                <a16:creationId xmlns:a16="http://schemas.microsoft.com/office/drawing/2014/main" id="{3EBE8569-6AEC-4B8C-8D53-2DE337CDBA65}"/>
               </a:ext>
               <a:ext uri="{C183D7F6-B498-43B3-948B-1728B52AA6E4}">
                 <adec:decorative xmlns:adec="http://schemas.microsoft.com/office/drawing/2017/decorative" val="1"/>
@@ -16127,7 +15866,7 @@
           <p:cNvPr id="24" name="TextBox 23">
             <a:extLst>
               <a:ext uri="{FF2B5EF4-FFF2-40B4-BE49-F238E27FC236}">
-                <a16:creationId xmlns:a16="http://schemas.microsoft.com/office/drawing/2014/main" id="{819C3008-8F32-1DD2-F1FD-CF9B1223180C}"/>
+                <a16:creationId xmlns:a16="http://schemas.microsoft.com/office/drawing/2014/main" id="{DB4589A8-ADED-D66C-50FE-1F43A66226F1}"/>
               </a:ext>
             </a:extLst>
           </p:cNvPr>
@@ -16145,7 +15884,7 @@
         </p:spPr>
         <p:txBody>
           <a:bodyPr vert="horz" lIns="91440" tIns="45720" rIns="91440" bIns="45720" rtlCol="0" anchor="b">
-            <a:normAutofit lnSpcReduction="10000"/>
+            <a:normAutofit/>
           </a:bodyPr>
           <a:lstStyle/>
           <a:p>
@@ -16168,12 +15907,12 @@
                   </a:solidFill>
                 </a:ln>
                 <a:solidFill>
-                  <a:srgbClr val="134A84"/>
+                  <a:srgbClr val="050E8B"/>
                 </a:solidFill>
                 <a:effectLst/>
                 <a:latin typeface="system-ui"/>
               </a:rPr>
-              <a:t>Exploratory</a:t>
+              <a:t>Study</a:t>
             </a:r>
             <a:r>
               <a:rPr lang="en-GB" sz="4000" b="1" dirty="0">
@@ -16197,17 +15936,14 @@
                   </a:solidFill>
                 </a:ln>
                 <a:solidFill>
-                  <a:srgbClr val="D71F25"/>
+                  <a:srgbClr val="D41515"/>
                 </a:solidFill>
                 <a:effectLst/>
                 <a:latin typeface="system-ui"/>
               </a:rPr>
-              <a:t>Data Analysis</a:t>
+              <a:t>Process</a:t>
             </a:r>
             <a:endParaRPr lang="en-US" sz="4000" b="1" dirty="0">
-              <a:solidFill>
-                <a:srgbClr val="D71F25"/>
-              </a:solidFill>
               <a:latin typeface="+mj-lt"/>
               <a:ea typeface="+mj-ea"/>
               <a:cs typeface="+mj-cs"/>
@@ -16220,7 +15956,7 @@
           <p:cNvPr id="39" name="Rectangle 38">
             <a:extLst>
               <a:ext uri="{FF2B5EF4-FFF2-40B4-BE49-F238E27FC236}">
-                <a16:creationId xmlns:a16="http://schemas.microsoft.com/office/drawing/2014/main" id="{8F49DC3C-1EF7-8703-6A04-2247611F89FF}"/>
+                <a16:creationId xmlns:a16="http://schemas.microsoft.com/office/drawing/2014/main" id="{55D4142C-5077-457F-A6AD-3FECFDB39685}"/>
               </a:ext>
               <a:ext uri="{C183D7F6-B498-43B3-948B-1728B52AA6E4}">
                 <adec:decorative xmlns:adec="http://schemas.microsoft.com/office/drawing/2017/decorative" val="1"/>
@@ -16312,7 +16048,7 @@
           <p:cNvPr id="41" name="Rectangle 40">
             <a:extLst>
               <a:ext uri="{FF2B5EF4-FFF2-40B4-BE49-F238E27FC236}">
-                <a16:creationId xmlns:a16="http://schemas.microsoft.com/office/drawing/2014/main" id="{3467AA8B-209F-FC12-6C2E-EA7DB0C432E8}"/>
+                <a16:creationId xmlns:a16="http://schemas.microsoft.com/office/drawing/2014/main" id="{7A5F0580-5EE9-419F-96EE-B6529EF6E7D0}"/>
               </a:ext>
               <a:ext uri="{C183D7F6-B498-43B3-948B-1728B52AA6E4}">
                 <adec:decorative xmlns:adec="http://schemas.microsoft.com/office/drawing/2017/decorative" val="1"/>
@@ -16410,10 +16146,10 @@
       </p:sp>
       <p:sp>
         <p:nvSpPr>
-          <p:cNvPr id="11" name="TextBox 10">
-            <a:extLst>
-              <a:ext uri="{FF2B5EF4-FFF2-40B4-BE49-F238E27FC236}">
-                <a16:creationId xmlns:a16="http://schemas.microsoft.com/office/drawing/2014/main" id="{D8395523-AD42-7046-2B41-ECEBA446FE13}"/>
+          <p:cNvPr id="18" name="TextBox 17">
+            <a:extLst>
+              <a:ext uri="{FF2B5EF4-FFF2-40B4-BE49-F238E27FC236}">
+                <a16:creationId xmlns:a16="http://schemas.microsoft.com/office/drawing/2014/main" id="{3B0BC12E-1DFE-6BB8-A0A5-3F0930720820}"/>
               </a:ext>
             </a:extLst>
           </p:cNvPr>
@@ -16435,416 +16171,135 @@
           </a:bodyPr>
           <a:lstStyle/>
           <a:p>
-            <a:pPr marL="114300">
+            <a:pPr marL="342900" indent="-228600">
               <a:spcAft>
                 <a:spcPts val="600"/>
               </a:spcAft>
+              <a:buFont typeface="Arial" panose="020B0604020202020204" pitchFamily="34" charset="0"/>
+              <a:buChar char="•"/>
             </a:pPr>
             <a:r>
-              <a:rPr lang="en-US" sz="2400" b="1" dirty="0"/>
-              <a:t>Word Counts</a:t>
-            </a:r>
-          </a:p>
-          <a:p>
-            <a:pPr marL="114300">
+              <a:rPr lang="en-US" b="1" dirty="0"/>
+              <a:t>Extract Subreddit Posts from </a:t>
+            </a:r>
+            <a:r>
+              <a:rPr lang="en-US" b="1" dirty="0">
+                <a:solidFill>
+                  <a:srgbClr val="004A97"/>
+                </a:solidFill>
+              </a:rPr>
+              <a:t>r/Pepsi </a:t>
+            </a:r>
+            <a:r>
+              <a:rPr lang="en-US" b="1" dirty="0"/>
+              <a:t>and </a:t>
+            </a:r>
+            <a:r>
+              <a:rPr lang="en-US" b="1" dirty="0">
+                <a:solidFill>
+                  <a:srgbClr val="F40009"/>
+                </a:solidFill>
+              </a:rPr>
+              <a:t>r/</a:t>
+            </a:r>
+            <a:r>
+              <a:rPr lang="en-US" b="1" dirty="0" err="1">
+                <a:solidFill>
+                  <a:srgbClr val="F40009"/>
+                </a:solidFill>
+              </a:rPr>
+              <a:t>cocacola</a:t>
+            </a:r>
+            <a:endParaRPr lang="en-US" b="1" dirty="0">
+              <a:solidFill>
+                <a:srgbClr val="F40009"/>
+              </a:solidFill>
+            </a:endParaRPr>
+          </a:p>
+          <a:p>
+            <a:pPr marL="342900" indent="-228600">
               <a:spcAft>
                 <a:spcPts val="600"/>
               </a:spcAft>
+              <a:buFont typeface="Arial" panose="020B0604020202020204" pitchFamily="34" charset="0"/>
+              <a:buChar char="•"/>
             </a:pPr>
-            <a:endParaRPr lang="en-US" sz="2400" b="1" dirty="0"/>
-          </a:p>
-          <a:p>
-            <a:pPr marL="114300">
+            <a:r>
+              <a:rPr lang="en-US" b="1" dirty="0"/>
+              <a:t>Preparing Data</a:t>
+            </a:r>
+          </a:p>
+          <a:p>
+            <a:pPr marL="342900" indent="-228600">
               <a:spcAft>
                 <a:spcPts val="600"/>
               </a:spcAft>
+              <a:buFont typeface="Arial" panose="020B0604020202020204" pitchFamily="34" charset="0"/>
+              <a:buChar char="•"/>
             </a:pPr>
             <a:r>
-              <a:rPr lang="en-US" sz="1600" b="1" dirty="0"/>
-              <a:t>Similarities in Lower Quartiles</a:t>
-            </a:r>
-          </a:p>
-          <a:p>
-            <a:pPr marL="114300">
+              <a:rPr lang="en-US" b="1" dirty="0"/>
+              <a:t>Exploratory Data Analysis</a:t>
+            </a:r>
+          </a:p>
+          <a:p>
+            <a:pPr marL="342900" indent="-228600">
               <a:spcAft>
                 <a:spcPts val="600"/>
               </a:spcAft>
+              <a:buFont typeface="Arial" panose="020B0604020202020204" pitchFamily="34" charset="0"/>
+              <a:buChar char="•"/>
             </a:pPr>
-            <a:endParaRPr lang="en-US" sz="1600" b="1" dirty="0"/>
-          </a:p>
-          <a:p>
-            <a:pPr marL="114300">
+            <a:r>
+              <a:rPr lang="en-US" b="1" dirty="0"/>
+              <a:t>Sentiment Analysis</a:t>
+            </a:r>
+          </a:p>
+          <a:p>
+            <a:pPr marL="342900" indent="-228600">
               <a:spcAft>
                 <a:spcPts val="600"/>
               </a:spcAft>
+              <a:buFont typeface="Arial" panose="020B0604020202020204" pitchFamily="34" charset="0"/>
+              <a:buChar char="•"/>
             </a:pPr>
             <a:r>
-              <a:rPr lang="en-US" sz="1600" b="1" dirty="0"/>
-              <a:t>Differences in Higher Quartiles</a:t>
-            </a:r>
-          </a:p>
-          <a:p>
-            <a:pPr marL="114300">
+              <a:rPr lang="en-US" b="1" dirty="0"/>
+              <a:t>Vectorizer and Tokenizer</a:t>
+            </a:r>
+          </a:p>
+          <a:p>
+            <a:pPr marL="342900" indent="-228600">
               <a:spcAft>
                 <a:spcPts val="600"/>
               </a:spcAft>
+              <a:buFont typeface="Arial" panose="020B0604020202020204" pitchFamily="34" charset="0"/>
+              <a:buChar char="•"/>
             </a:pPr>
             <a:r>
-              <a:rPr lang="en-US" sz="1600" dirty="0">
-                <a:solidFill>
-                  <a:srgbClr val="134A84"/>
-                </a:solidFill>
-              </a:rPr>
-              <a:t>Pepsi </a:t>
-            </a:r>
-            <a:r>
-              <a:rPr lang="en-US" sz="1600" dirty="0"/>
-              <a:t>have more word counts than </a:t>
-            </a:r>
-            <a:r>
-              <a:rPr lang="en-US" sz="1600" dirty="0">
-                <a:solidFill>
-                  <a:srgbClr val="D61F25"/>
-                </a:solidFill>
-              </a:rPr>
-              <a:t>Coca-Cola</a:t>
-            </a:r>
-          </a:p>
-          <a:p>
-            <a:pPr marL="571500" lvl="1">
+              <a:rPr lang="en-US" b="1" dirty="0"/>
+              <a:t>Model Tuning</a:t>
+            </a:r>
+          </a:p>
+          <a:p>
+            <a:pPr marL="342900" indent="-228600">
               <a:spcAft>
                 <a:spcPts val="600"/>
               </a:spcAft>
+              <a:buFont typeface="Arial" panose="020B0604020202020204" pitchFamily="34" charset="0"/>
+              <a:buChar char="•"/>
             </a:pPr>
-            <a:endParaRPr lang="en-US" sz="1600" b="1" dirty="0"/>
-          </a:p>
-        </p:txBody>
-      </p:sp>
-      <p:pic>
-        <p:nvPicPr>
-          <p:cNvPr id="6" name="Picture 5" descr="A red and blue diagram&#10;&#10;Description automatically generated">
-            <a:extLst>
-              <a:ext uri="{FF2B5EF4-FFF2-40B4-BE49-F238E27FC236}">
-                <a16:creationId xmlns:a16="http://schemas.microsoft.com/office/drawing/2014/main" id="{E486C81D-BCAE-8560-7947-7038AED53990}"/>
-              </a:ext>
-            </a:extLst>
-          </p:cNvPr>
-          <p:cNvPicPr>
-            <a:picLocks noChangeAspect="1"/>
-          </p:cNvPicPr>
-          <p:nvPr/>
-        </p:nvPicPr>
-        <p:blipFill>
-          <a:blip r:embed="rId2">
-            <a:extLst>
-              <a:ext uri="{28A0092B-C50C-407E-A947-70E740481C1C}">
-                <a14:useLocalDpi xmlns:a14="http://schemas.microsoft.com/office/drawing/2010/main" val="0"/>
-              </a:ext>
-            </a:extLst>
-          </a:blip>
-          <a:srcRect l="51555" r="1915" b="8879"/>
-          <a:stretch/>
-        </p:blipFill>
-        <p:spPr>
-          <a:xfrm>
-            <a:off x="5639754" y="1295969"/>
-            <a:ext cx="5484496" cy="4266062"/>
-          </a:xfrm>
-          <a:prstGeom prst="rect">
-            <a:avLst/>
-          </a:prstGeom>
-        </p:spPr>
-      </p:pic>
-      <p:sp>
-        <p:nvSpPr>
-          <p:cNvPr id="10" name="TextBox 9">
-            <a:extLst>
-              <a:ext uri="{FF2B5EF4-FFF2-40B4-BE49-F238E27FC236}">
-                <a16:creationId xmlns:a16="http://schemas.microsoft.com/office/drawing/2014/main" id="{E03429B0-ABA1-DB64-E438-FBFD8205E418}"/>
-              </a:ext>
-            </a:extLst>
-          </p:cNvPr>
-          <p:cNvSpPr txBox="1"/>
-          <p:nvPr/>
-        </p:nvSpPr>
-        <p:spPr>
-          <a:xfrm>
-            <a:off x="9488855" y="2938307"/>
-            <a:ext cx="1133854" cy="369332"/>
-          </a:xfrm>
-          <a:prstGeom prst="rect">
-            <a:avLst/>
-          </a:prstGeom>
-          <a:noFill/>
-        </p:spPr>
-        <p:txBody>
-          <a:bodyPr wrap="square">
-            <a:spAutoFit/>
-          </a:bodyPr>
-          <a:lstStyle/>
-          <a:p>
-            <a:pPr algn="ctr"/>
-            <a:r>
-              <a:rPr lang="en-GB" sz="1800" b="1" i="0" dirty="0">
-                <a:ln>
-                  <a:solidFill>
-                    <a:schemeClr val="bg1"/>
-                  </a:solidFill>
-                </a:ln>
-                <a:solidFill>
-                  <a:srgbClr val="D71F25"/>
-                </a:solidFill>
-                <a:effectLst/>
-                <a:latin typeface="system-ui"/>
-              </a:rPr>
-              <a:t>Coca-Cola</a:t>
-            </a:r>
-            <a:endParaRPr lang="en-AE" b="1" dirty="0"/>
-          </a:p>
-        </p:txBody>
-      </p:sp>
-      <p:sp>
-        <p:nvSpPr>
-          <p:cNvPr id="12" name="TextBox 11">
-            <a:extLst>
-              <a:ext uri="{FF2B5EF4-FFF2-40B4-BE49-F238E27FC236}">
-                <a16:creationId xmlns:a16="http://schemas.microsoft.com/office/drawing/2014/main" id="{05B6AFF2-36DB-829D-95FE-67851010E0ED}"/>
-              </a:ext>
-            </a:extLst>
-          </p:cNvPr>
-          <p:cNvSpPr txBox="1"/>
-          <p:nvPr/>
-        </p:nvSpPr>
-        <p:spPr>
-          <a:xfrm>
-            <a:off x="9488855" y="3504642"/>
-            <a:ext cx="1133854" cy="369332"/>
-          </a:xfrm>
-          <a:prstGeom prst="rect">
-            <a:avLst/>
-          </a:prstGeom>
-          <a:noFill/>
-        </p:spPr>
-        <p:txBody>
-          <a:bodyPr wrap="square">
-            <a:spAutoFit/>
-          </a:bodyPr>
-          <a:lstStyle/>
-          <a:p>
-            <a:pPr algn="ctr"/>
-            <a:r>
-              <a:rPr lang="en-GB" sz="1800" b="1" i="0" dirty="0">
-                <a:ln>
-                  <a:solidFill>
-                    <a:schemeClr val="bg1"/>
-                  </a:solidFill>
-                </a:ln>
-                <a:solidFill>
-                  <a:srgbClr val="134A84"/>
-                </a:solidFill>
-                <a:effectLst/>
-                <a:latin typeface="system-ui"/>
-              </a:rPr>
-              <a:t>Pepsi</a:t>
-            </a:r>
-            <a:endParaRPr lang="en-AE" dirty="0">
-              <a:solidFill>
-                <a:srgbClr val="134A84"/>
-              </a:solidFill>
-            </a:endParaRPr>
-          </a:p>
-        </p:txBody>
-      </p:sp>
-      <p:sp>
-        <p:nvSpPr>
-          <p:cNvPr id="17" name="TextBox 16">
-            <a:extLst>
-              <a:ext uri="{FF2B5EF4-FFF2-40B4-BE49-F238E27FC236}">
-                <a16:creationId xmlns:a16="http://schemas.microsoft.com/office/drawing/2014/main" id="{089F5E00-602A-5D83-7FFA-45029DDAC56D}"/>
-              </a:ext>
-            </a:extLst>
-          </p:cNvPr>
-          <p:cNvSpPr txBox="1"/>
-          <p:nvPr/>
-        </p:nvSpPr>
-        <p:spPr>
-          <a:xfrm>
-            <a:off x="7787579" y="2011680"/>
-            <a:ext cx="1601385" cy="369332"/>
-          </a:xfrm>
-          <a:prstGeom prst="rect">
-            <a:avLst/>
-          </a:prstGeom>
-          <a:noFill/>
-        </p:spPr>
-        <p:txBody>
-          <a:bodyPr wrap="square">
-            <a:spAutoFit/>
-          </a:bodyPr>
-          <a:lstStyle/>
-          <a:p>
-            <a:pPr algn="ctr"/>
-            <a:r>
-              <a:rPr lang="en-GB" sz="1800" b="1" i="0" dirty="0">
-                <a:ln>
-                  <a:solidFill>
-                    <a:schemeClr val="bg1"/>
-                  </a:solidFill>
-                </a:ln>
-                <a:solidFill>
-                  <a:srgbClr val="D71F25"/>
-                </a:solidFill>
-                <a:effectLst/>
-                <a:latin typeface="system-ui"/>
-              </a:rPr>
-              <a:t>Q3 – 43 words</a:t>
-            </a:r>
-            <a:endParaRPr lang="en-AE" dirty="0"/>
-          </a:p>
-        </p:txBody>
-      </p:sp>
-      <p:cxnSp>
-        <p:nvCxnSpPr>
-          <p:cNvPr id="19" name="Connector: Elbow 18">
-            <a:extLst>
-              <a:ext uri="{FF2B5EF4-FFF2-40B4-BE49-F238E27FC236}">
-                <a16:creationId xmlns:a16="http://schemas.microsoft.com/office/drawing/2014/main" id="{2638F757-B99E-E84E-7102-114F3E47C87E}"/>
-              </a:ext>
-            </a:extLst>
-          </p:cNvPr>
-          <p:cNvCxnSpPr>
-            <a:cxnSpLocks/>
-            <a:endCxn id="17" idx="1"/>
-          </p:cNvCxnSpPr>
-          <p:nvPr/>
-        </p:nvCxnSpPr>
-        <p:spPr>
-          <a:xfrm flipV="1">
-            <a:off x="6885432" y="2196346"/>
-            <a:ext cx="902147" cy="629150"/>
-          </a:xfrm>
-          <a:prstGeom prst="bentConnector3">
-            <a:avLst/>
-          </a:prstGeom>
-          <a:ln w="38100">
-            <a:headEnd type="triangle"/>
-            <a:tailEnd type="triangle"/>
-          </a:ln>
-        </p:spPr>
-        <p:style>
-          <a:lnRef idx="1">
-            <a:schemeClr val="accent1"/>
-          </a:lnRef>
-          <a:fillRef idx="0">
-            <a:schemeClr val="accent1"/>
-          </a:fillRef>
-          <a:effectRef idx="0">
-            <a:schemeClr val="accent1"/>
-          </a:effectRef>
-          <a:fontRef idx="minor">
-            <a:schemeClr val="tx1"/>
-          </a:fontRef>
-        </p:style>
-      </p:cxnSp>
-      <p:cxnSp>
-        <p:nvCxnSpPr>
-          <p:cNvPr id="21" name="Connector: Elbow 20">
-            <a:extLst>
-              <a:ext uri="{FF2B5EF4-FFF2-40B4-BE49-F238E27FC236}">
-                <a16:creationId xmlns:a16="http://schemas.microsoft.com/office/drawing/2014/main" id="{03016860-0010-C04F-7551-E53D907B273C}"/>
-              </a:ext>
-            </a:extLst>
-          </p:cNvPr>
-          <p:cNvCxnSpPr>
-            <a:cxnSpLocks/>
-            <a:endCxn id="25" idx="1"/>
-          </p:cNvCxnSpPr>
-          <p:nvPr/>
-        </p:nvCxnSpPr>
-        <p:spPr>
-          <a:xfrm>
-            <a:off x="7123176" y="4121455"/>
-            <a:ext cx="652939" cy="423367"/>
-          </a:xfrm>
-          <a:prstGeom prst="bentConnector3">
-            <a:avLst/>
-          </a:prstGeom>
-          <a:ln w="38100">
-            <a:headEnd type="triangle"/>
-            <a:tailEnd type="triangle"/>
-          </a:ln>
-        </p:spPr>
-        <p:style>
-          <a:lnRef idx="1">
-            <a:schemeClr val="accent1"/>
-          </a:lnRef>
-          <a:fillRef idx="0">
-            <a:schemeClr val="accent1"/>
-          </a:fillRef>
-          <a:effectRef idx="0">
-            <a:schemeClr val="accent1"/>
-          </a:effectRef>
-          <a:fontRef idx="minor">
-            <a:schemeClr val="tx1"/>
-          </a:fontRef>
-        </p:style>
-      </p:cxnSp>
-      <p:sp>
-        <p:nvSpPr>
-          <p:cNvPr id="25" name="TextBox 24">
-            <a:extLst>
-              <a:ext uri="{FF2B5EF4-FFF2-40B4-BE49-F238E27FC236}">
-                <a16:creationId xmlns:a16="http://schemas.microsoft.com/office/drawing/2014/main" id="{A15B810C-76D3-88D1-0F3B-625C4B0614BB}"/>
-              </a:ext>
-            </a:extLst>
-          </p:cNvPr>
-          <p:cNvSpPr txBox="1"/>
-          <p:nvPr/>
-        </p:nvSpPr>
-        <p:spPr>
-          <a:xfrm>
-            <a:off x="7776115" y="4360156"/>
-            <a:ext cx="1601385" cy="369332"/>
-          </a:xfrm>
-          <a:prstGeom prst="rect">
-            <a:avLst/>
-          </a:prstGeom>
-          <a:noFill/>
-        </p:spPr>
-        <p:txBody>
-          <a:bodyPr wrap="square">
-            <a:spAutoFit/>
-          </a:bodyPr>
-          <a:lstStyle/>
-          <a:p>
-            <a:pPr algn="ctr"/>
-            <a:r>
-              <a:rPr lang="en-GB" sz="1800" b="1" i="0" dirty="0">
-                <a:ln>
-                  <a:solidFill>
-                    <a:schemeClr val="bg1"/>
-                  </a:solidFill>
-                </a:ln>
-                <a:solidFill>
-                  <a:srgbClr val="134A84"/>
-                </a:solidFill>
-                <a:effectLst/>
-                <a:latin typeface="system-ui"/>
-              </a:rPr>
-              <a:t>Q3 – 51 words</a:t>
-            </a:r>
-            <a:endParaRPr lang="en-AE" dirty="0">
-              <a:solidFill>
-                <a:srgbClr val="134A84"/>
-              </a:solidFill>
-            </a:endParaRPr>
+            <a:r>
+              <a:rPr lang="en-US" b="1" dirty="0"/>
+              <a:t>Application</a:t>
+            </a:r>
           </a:p>
         </p:txBody>
       </p:sp>
     </p:spTree>
     <p:extLst>
       <p:ext uri="{BB962C8B-B14F-4D97-AF65-F5344CB8AC3E}">
-        <p14:creationId xmlns:p14="http://schemas.microsoft.com/office/powerpoint/2010/main" val="2893670814"/>
+        <p14:creationId xmlns:p14="http://schemas.microsoft.com/office/powerpoint/2010/main" val="2723364762"/>
       </p:ext>
     </p:extLst>
   </p:cSld>
@@ -16854,7 +16309,7 @@
 </p:sld>
 </file>
 
-<file path=ppt/slides/slide5.xml><?xml version="1.0" encoding="utf-8"?>
+<file path=ppt/slides/slide4.xml><?xml version="1.0" encoding="utf-8"?>
 <p:sld xmlns:a="http://schemas.openxmlformats.org/drawingml/2006/main" xmlns:r="http://schemas.openxmlformats.org/officeDocument/2006/relationships" xmlns:p="http://schemas.openxmlformats.org/presentationml/2006/main">
   <p:cSld>
     <p:bg>
@@ -16870,7 +16325,7 @@
         <p:cNvPr id="1" name="">
           <a:extLst>
             <a:ext uri="{FF2B5EF4-FFF2-40B4-BE49-F238E27FC236}">
-              <a16:creationId xmlns:a16="http://schemas.microsoft.com/office/drawing/2014/main" id="{AF6F51DD-D06B-C7B8-F16E-83ECD752CFFB}"/>
+              <a16:creationId xmlns:a16="http://schemas.microsoft.com/office/drawing/2014/main" id="{D6A32D94-B11E-19CF-94C5-D38DE309AA69}"/>
             </a:ext>
           </a:extLst>
         </p:cNvPr>
@@ -16890,7 +16345,7 @@
           <p:cNvPr id="29" name="Rectangle 28">
             <a:extLst>
               <a:ext uri="{FF2B5EF4-FFF2-40B4-BE49-F238E27FC236}">
-                <a16:creationId xmlns:a16="http://schemas.microsoft.com/office/drawing/2014/main" id="{32587214-4240-0691-535B-D160F19B3562}"/>
+                <a16:creationId xmlns:a16="http://schemas.microsoft.com/office/drawing/2014/main" id="{63B55CE6-9AE2-7F9D-28A5-596A3900E9F0}"/>
               </a:ext>
               <a:ext uri="{C183D7F6-B498-43B3-948B-1728B52AA6E4}">
                 <adec:decorative xmlns:adec="http://schemas.microsoft.com/office/drawing/2017/decorative" val="1"/>
@@ -16992,7 +16447,7 @@
           <p:cNvPr id="31" name="Rectangle 30">
             <a:extLst>
               <a:ext uri="{FF2B5EF4-FFF2-40B4-BE49-F238E27FC236}">
-                <a16:creationId xmlns:a16="http://schemas.microsoft.com/office/drawing/2014/main" id="{7B802D65-8599-B984-655A-E1A5619EC301}"/>
+                <a16:creationId xmlns:a16="http://schemas.microsoft.com/office/drawing/2014/main" id="{5DAE085F-2511-5595-3E26-3CEBC77276F4}"/>
               </a:ext>
               <a:ext uri="{C183D7F6-B498-43B3-948B-1728B52AA6E4}">
                 <adec:decorative xmlns:adec="http://schemas.microsoft.com/office/drawing/2017/decorative" val="1"/>
@@ -17082,7 +16537,7 @@
           <p:cNvPr id="33" name="Rectangle 32">
             <a:extLst>
               <a:ext uri="{FF2B5EF4-FFF2-40B4-BE49-F238E27FC236}">
-                <a16:creationId xmlns:a16="http://schemas.microsoft.com/office/drawing/2014/main" id="{9BB11663-1FD7-0A49-37B2-9D4D1B513CFD}"/>
+                <a16:creationId xmlns:a16="http://schemas.microsoft.com/office/drawing/2014/main" id="{D160E1A2-1C6C-6585-73B7-3D903E5ACACD}"/>
               </a:ext>
               <a:ext uri="{C183D7F6-B498-43B3-948B-1728B52AA6E4}">
                 <adec:decorative xmlns:adec="http://schemas.microsoft.com/office/drawing/2017/decorative" val="1"/>
@@ -17174,7 +16629,7 @@
           <p:cNvPr id="35" name="Rectangle 34">
             <a:extLst>
               <a:ext uri="{FF2B5EF4-FFF2-40B4-BE49-F238E27FC236}">
-                <a16:creationId xmlns:a16="http://schemas.microsoft.com/office/drawing/2014/main" id="{A7DD6410-A401-57D9-5B9D-C20D21FE0A88}"/>
+                <a16:creationId xmlns:a16="http://schemas.microsoft.com/office/drawing/2014/main" id="{DFDCD7A2-B35A-FFD2-A404-DD29B753DFC4}"/>
               </a:ext>
               <a:ext uri="{C183D7F6-B498-43B3-948B-1728B52AA6E4}">
                 <adec:decorative xmlns:adec="http://schemas.microsoft.com/office/drawing/2017/decorative" val="1"/>
@@ -17234,7 +16689,7 @@
           <p:cNvPr id="37" name="Rectangle 36">
             <a:extLst>
               <a:ext uri="{FF2B5EF4-FFF2-40B4-BE49-F238E27FC236}">
-                <a16:creationId xmlns:a16="http://schemas.microsoft.com/office/drawing/2014/main" id="{B60D31F5-7413-7D37-650D-2F28AF8251EA}"/>
+                <a16:creationId xmlns:a16="http://schemas.microsoft.com/office/drawing/2014/main" id="{B46C994E-CAFA-3D90-403B-077D92F45153}"/>
               </a:ext>
               <a:ext uri="{C183D7F6-B498-43B3-948B-1728B52AA6E4}">
                 <adec:decorative xmlns:adec="http://schemas.microsoft.com/office/drawing/2017/decorative" val="1"/>
@@ -17320,7 +16775,7 @@
           <p:cNvPr id="24" name="TextBox 23">
             <a:extLst>
               <a:ext uri="{FF2B5EF4-FFF2-40B4-BE49-F238E27FC236}">
-                <a16:creationId xmlns:a16="http://schemas.microsoft.com/office/drawing/2014/main" id="{A552DA07-B8D2-5890-7026-29EFE66082F9}"/>
+                <a16:creationId xmlns:a16="http://schemas.microsoft.com/office/drawing/2014/main" id="{D4476A09-97C9-87B9-5FF7-01CA50242AB7}"/>
               </a:ext>
             </a:extLst>
           </p:cNvPr>
@@ -17338,7 +16793,7 @@
         </p:spPr>
         <p:txBody>
           <a:bodyPr vert="horz" lIns="91440" tIns="45720" rIns="91440" bIns="45720" rtlCol="0" anchor="b">
-            <a:normAutofit lnSpcReduction="10000"/>
+            <a:normAutofit/>
           </a:bodyPr>
           <a:lstStyle/>
           <a:p>
@@ -17361,12 +16816,12 @@
                   </a:solidFill>
                 </a:ln>
                 <a:solidFill>
-                  <a:srgbClr val="134A84"/>
+                  <a:srgbClr val="050E8B"/>
                 </a:solidFill>
                 <a:effectLst/>
                 <a:latin typeface="system-ui"/>
               </a:rPr>
-              <a:t>Exploratory</a:t>
+              <a:t>Preparing</a:t>
             </a:r>
             <a:r>
               <a:rPr lang="en-GB" sz="4000" b="1" dirty="0">
@@ -17390,17 +16845,14 @@
                   </a:solidFill>
                 </a:ln>
                 <a:solidFill>
-                  <a:srgbClr val="D71F25"/>
+                  <a:srgbClr val="D41515"/>
                 </a:solidFill>
                 <a:effectLst/>
                 <a:latin typeface="system-ui"/>
               </a:rPr>
-              <a:t>Data Analysis</a:t>
+              <a:t>Data</a:t>
             </a:r>
             <a:endParaRPr lang="en-US" sz="4000" b="1" dirty="0">
-              <a:solidFill>
-                <a:srgbClr val="D71F25"/>
-              </a:solidFill>
               <a:latin typeface="+mj-lt"/>
               <a:ea typeface="+mj-ea"/>
               <a:cs typeface="+mj-cs"/>
@@ -17413,7 +16865,7 @@
           <p:cNvPr id="39" name="Rectangle 38">
             <a:extLst>
               <a:ext uri="{FF2B5EF4-FFF2-40B4-BE49-F238E27FC236}">
-                <a16:creationId xmlns:a16="http://schemas.microsoft.com/office/drawing/2014/main" id="{C1FBCF16-EC6B-47D2-EC30-30E02C02EBF3}"/>
+                <a16:creationId xmlns:a16="http://schemas.microsoft.com/office/drawing/2014/main" id="{CECA7B59-0646-D084-2370-EAB346C64724}"/>
               </a:ext>
               <a:ext uri="{C183D7F6-B498-43B3-948B-1728B52AA6E4}">
                 <adec:decorative xmlns:adec="http://schemas.microsoft.com/office/drawing/2017/decorative" val="1"/>
@@ -17505,7 +16957,7 @@
           <p:cNvPr id="41" name="Rectangle 40">
             <a:extLst>
               <a:ext uri="{FF2B5EF4-FFF2-40B4-BE49-F238E27FC236}">
-                <a16:creationId xmlns:a16="http://schemas.microsoft.com/office/drawing/2014/main" id="{5ECAAAD9-0ECB-1D68-2C4F-691284C03965}"/>
+                <a16:creationId xmlns:a16="http://schemas.microsoft.com/office/drawing/2014/main" id="{8E9C2CA0-62A6-806E-C7A0-3E7D6CDA4E75}"/>
               </a:ext>
               <a:ext uri="{C183D7F6-B498-43B3-948B-1728B52AA6E4}">
                 <adec:decorative xmlns:adec="http://schemas.microsoft.com/office/drawing/2017/decorative" val="1"/>
@@ -17606,7 +17058,7 @@
           <p:cNvPr id="11" name="TextBox 10">
             <a:extLst>
               <a:ext uri="{FF2B5EF4-FFF2-40B4-BE49-F238E27FC236}">
-                <a16:creationId xmlns:a16="http://schemas.microsoft.com/office/drawing/2014/main" id="{F90330B5-41B4-CEB6-AC5A-A5CD59827705}"/>
+                <a16:creationId xmlns:a16="http://schemas.microsoft.com/office/drawing/2014/main" id="{1C2AE4BB-E3B1-9960-7F82-FACE3067476E}"/>
               </a:ext>
             </a:extLst>
           </p:cNvPr>
@@ -17615,48 +17067,159 @@
         </p:nvSpPr>
         <p:spPr>
           <a:xfrm>
-            <a:off x="4062282" y="1190143"/>
-            <a:ext cx="3789882" cy="1067002"/>
+            <a:off x="371094" y="2718054"/>
+            <a:ext cx="3438906" cy="3207258"/>
           </a:xfrm>
           <a:prstGeom prst="rect">
             <a:avLst/>
           </a:prstGeom>
         </p:spPr>
         <p:txBody>
-          <a:bodyPr vert="horz" lIns="91440" tIns="45720" rIns="91440" bIns="45720" numCol="1" rtlCol="0" anchor="t">
+          <a:bodyPr vert="horz" lIns="91440" tIns="45720" rIns="91440" bIns="45720" rtlCol="0" anchor="t">
             <a:normAutofit/>
           </a:bodyPr>
           <a:lstStyle/>
           <a:p>
-            <a:pPr marL="114300">
+            <a:pPr marL="342900" indent="-228600">
+              <a:spcAft>
+                <a:spcPts val="600"/>
+              </a:spcAft>
+              <a:buFont typeface="Arial" panose="020B0604020202020204" pitchFamily="34" charset="0"/>
+              <a:buChar char="•"/>
+            </a:pPr>
+            <a:endParaRPr lang="en-US" sz="1600" b="1" dirty="0"/>
+          </a:p>
+          <a:p>
+            <a:pPr marL="342900" indent="-228600">
+              <a:spcAft>
+                <a:spcPts val="600"/>
+              </a:spcAft>
+              <a:buFont typeface="Arial" panose="020B0604020202020204" pitchFamily="34" charset="0"/>
+              <a:buChar char="•"/>
+            </a:pPr>
+            <a:endParaRPr lang="en-US" sz="1600" b="1" dirty="0"/>
+          </a:p>
+          <a:p>
+            <a:pPr marL="342900" indent="-228600">
+              <a:spcAft>
+                <a:spcPts val="600"/>
+              </a:spcAft>
+              <a:buFont typeface="Arial" panose="020B0604020202020204" pitchFamily="34" charset="0"/>
+              <a:buChar char="•"/>
+            </a:pPr>
+            <a:endParaRPr lang="en-US" sz="1600" b="1" dirty="0"/>
+          </a:p>
+          <a:p>
+            <a:pPr marL="342900" indent="-228600">
+              <a:spcAft>
+                <a:spcPts val="600"/>
+              </a:spcAft>
+              <a:buFont typeface="Arial" panose="020B0604020202020204" pitchFamily="34" charset="0"/>
+              <a:buChar char="•"/>
+            </a:pPr>
+            <a:endParaRPr lang="en-US" sz="1600" b="1" dirty="0"/>
+          </a:p>
+          <a:p>
+            <a:pPr marL="342900" indent="-228600">
+              <a:spcAft>
+                <a:spcPts val="600"/>
+              </a:spcAft>
+              <a:buFont typeface="Arial" panose="020B0604020202020204" pitchFamily="34" charset="0"/>
+              <a:buChar char="•"/>
+            </a:pPr>
+            <a:endParaRPr lang="en-US" sz="1600" b="1" dirty="0"/>
+          </a:p>
+          <a:p>
+            <a:pPr marL="342900" indent="-228600">
+              <a:spcAft>
+                <a:spcPts val="600"/>
+              </a:spcAft>
+              <a:buFont typeface="Arial" panose="020B0604020202020204" pitchFamily="34" charset="0"/>
+              <a:buChar char="•"/>
+            </a:pPr>
+            <a:r>
+              <a:rPr lang="en-US" sz="1600" b="1" dirty="0"/>
+              <a:t>Concatenate Title and Body</a:t>
+            </a:r>
+          </a:p>
+          <a:p>
+            <a:pPr marL="342900" indent="-228600">
+              <a:spcAft>
+                <a:spcPts val="600"/>
+              </a:spcAft>
+              <a:buFont typeface="Arial" panose="020B0604020202020204" pitchFamily="34" charset="0"/>
+              <a:buChar char="•"/>
+            </a:pPr>
+            <a:r>
+              <a:rPr lang="en-US" sz="1600" b="1" dirty="0"/>
+              <a:t>Create column </a:t>
+            </a:r>
+            <a:r>
+              <a:rPr lang="en-US" sz="1600" b="1" dirty="0">
+                <a:solidFill>
+                  <a:srgbClr val="D61F25"/>
+                </a:solidFill>
+              </a:rPr>
+              <a:t>is_</a:t>
+            </a:r>
+            <a:r>
+              <a:rPr lang="en-US" sz="1600" b="1" dirty="0">
+                <a:solidFill>
+                  <a:srgbClr val="004A97"/>
+                </a:solidFill>
+              </a:rPr>
+              <a:t>pepsi</a:t>
+            </a:r>
+          </a:p>
+          <a:p>
+            <a:pPr marL="342900" indent="-228600">
+              <a:spcAft>
+                <a:spcPts val="600"/>
+              </a:spcAft>
+              <a:buFont typeface="Arial" panose="020B0604020202020204" pitchFamily="34" charset="0"/>
+              <a:buChar char="•"/>
+            </a:pPr>
+            <a:r>
+              <a:rPr lang="en-US" sz="1600" b="1" dirty="0"/>
+              <a:t>Lower text and remove related words; </a:t>
+            </a:r>
+            <a:r>
+              <a:rPr lang="en-US" sz="1600" b="1" dirty="0">
+                <a:solidFill>
+                  <a:srgbClr val="004A97"/>
+                </a:solidFill>
+              </a:rPr>
+              <a:t>pepsi, pepsico,</a:t>
+            </a:r>
+            <a:r>
+              <a:rPr lang="en-US" sz="1600" b="1" dirty="0"/>
+              <a:t> </a:t>
+            </a:r>
+            <a:r>
+              <a:rPr lang="en-US" sz="1600" b="1" dirty="0">
+                <a:solidFill>
+                  <a:srgbClr val="D61F25"/>
+                </a:solidFill>
+              </a:rPr>
+              <a:t>coca, cola, coke</a:t>
+            </a:r>
+          </a:p>
+          <a:p>
+            <a:pPr marL="571500" lvl="1">
               <a:spcAft>
                 <a:spcPts val="600"/>
               </a:spcAft>
             </a:pPr>
-            <a:r>
-              <a:rPr lang="en-US" sz="2400" b="1" dirty="0"/>
-              <a:t>Common Words</a:t>
-            </a:r>
-          </a:p>
-          <a:p>
-            <a:pPr marL="114300">
-              <a:spcAft>
-                <a:spcPts val="600"/>
-              </a:spcAft>
-            </a:pPr>
-            <a:r>
-              <a:rPr lang="en-US" sz="1600" b="1" dirty="0"/>
-              <a:t>Words that frequently show across all documents</a:t>
-            </a:r>
+            <a:endParaRPr lang="en-US" sz="1600" b="1" dirty="0"/>
           </a:p>
         </p:txBody>
       </p:sp>
       <p:pic>
         <p:nvPicPr>
-          <p:cNvPr id="3" name="Picture 2" descr="A graph of red and blue bars&#10;&#10;Description automatically generated">
-            <a:extLst>
-              <a:ext uri="{FF2B5EF4-FFF2-40B4-BE49-F238E27FC236}">
-                <a16:creationId xmlns:a16="http://schemas.microsoft.com/office/drawing/2014/main" id="{6EAC9D7B-35C8-9EC1-D1E6-8F447A8B20AF}"/>
+          <p:cNvPr id="6" name="Picture 5">
+            <a:extLst>
+              <a:ext uri="{FF2B5EF4-FFF2-40B4-BE49-F238E27FC236}">
+                <a16:creationId xmlns:a16="http://schemas.microsoft.com/office/drawing/2014/main" id="{DA883CC9-4924-6FFD-BBEC-F45B3544CC96}"/>
               </a:ext>
             </a:extLst>
           </p:cNvPr>
@@ -17666,104 +17229,74 @@
           <p:nvPr/>
         </p:nvPicPr>
         <p:blipFill>
-          <a:blip r:embed="rId2">
-            <a:extLst>
-              <a:ext uri="{28A0092B-C50C-407E-A947-70E740481C1C}">
-                <a14:useLocalDpi xmlns:a14="http://schemas.microsoft.com/office/drawing/2010/main" val="0"/>
-              </a:ext>
-            </a:extLst>
-          </a:blip>
-          <a:srcRect b="12627"/>
-          <a:stretch/>
+          <a:blip r:embed="rId2"/>
+          <a:stretch>
+            <a:fillRect/>
+          </a:stretch>
         </p:blipFill>
         <p:spPr>
           <a:xfrm>
-            <a:off x="195060" y="2579502"/>
-            <a:ext cx="11801880" cy="3922776"/>
+            <a:off x="4801442" y="483955"/>
+            <a:ext cx="6171336" cy="5890089"/>
           </a:xfrm>
           <a:prstGeom prst="rect">
             <a:avLst/>
           </a:prstGeom>
         </p:spPr>
       </p:pic>
-      <p:sp>
-        <p:nvSpPr>
-          <p:cNvPr id="13" name="TextBox 12">
-            <a:extLst>
-              <a:ext uri="{FF2B5EF4-FFF2-40B4-BE49-F238E27FC236}">
-                <a16:creationId xmlns:a16="http://schemas.microsoft.com/office/drawing/2014/main" id="{C8E91F45-6ADC-AAA7-9D4D-94A72E98E333}"/>
-              </a:ext>
-            </a:extLst>
-          </p:cNvPr>
-          <p:cNvSpPr txBox="1"/>
+      <p:pic>
+        <p:nvPicPr>
+          <p:cNvPr id="3" name="Picture 4" descr="Reddit - Wikipedia">
+            <a:extLst>
+              <a:ext uri="{FF2B5EF4-FFF2-40B4-BE49-F238E27FC236}">
+                <a16:creationId xmlns:a16="http://schemas.microsoft.com/office/drawing/2014/main" id="{D56EEECA-EE93-234C-6682-4DE9ED0215C0}"/>
+              </a:ext>
+            </a:extLst>
+          </p:cNvPr>
+          <p:cNvPicPr>
+            <a:picLocks noChangeAspect="1" noChangeArrowheads="1"/>
+          </p:cNvPicPr>
           <p:nvPr/>
-        </p:nvSpPr>
-        <p:spPr>
+        </p:nvPicPr>
+        <p:blipFill>
+          <a:blip r:embed="rId3">
+            <a:extLst>
+              <a:ext uri="{28A0092B-C50C-407E-A947-70E740481C1C}">
+                <a14:useLocalDpi xmlns:a14="http://schemas.microsoft.com/office/drawing/2010/main" val="0"/>
+              </a:ext>
+            </a:extLst>
+          </a:blip>
+          <a:srcRect/>
+          <a:stretch>
+            <a:fillRect/>
+          </a:stretch>
+        </p:blipFill>
+        <p:spPr bwMode="auto">
           <a:xfrm>
-            <a:off x="8105209" y="1223507"/>
-            <a:ext cx="4044972" cy="1000274"/>
+            <a:off x="9129004" y="4956102"/>
+            <a:ext cx="880537" cy="880537"/>
           </a:xfrm>
           <a:prstGeom prst="rect">
             <a:avLst/>
           </a:prstGeom>
           <a:noFill/>
+          <a:extLst>
+            <a:ext uri="{909E8E84-426E-40DD-AFC4-6F175D3DCCD1}">
+              <a14:hiddenFill xmlns:a14="http://schemas.microsoft.com/office/drawing/2010/main">
+                <a:solidFill>
+                  <a:srgbClr val="FFFFFF"/>
+                </a:solidFill>
+              </a14:hiddenFill>
+            </a:ext>
+          </a:extLst>
         </p:spPr>
-        <p:txBody>
-          <a:bodyPr wrap="square">
-            <a:spAutoFit/>
-          </a:bodyPr>
-          <a:lstStyle/>
-          <a:p>
-            <a:pPr marL="114300">
-              <a:spcAft>
-                <a:spcPts val="600"/>
-              </a:spcAft>
-            </a:pPr>
-            <a:r>
-              <a:rPr lang="en-US" sz="1800" b="1" dirty="0" err="1"/>
-              <a:t>Stopwords</a:t>
-            </a:r>
-            <a:r>
-              <a:rPr lang="en-US" sz="1800" b="1" dirty="0"/>
-              <a:t>: </a:t>
-            </a:r>
-            <a:r>
-              <a:rPr lang="en-US" sz="1800" dirty="0"/>
-              <a:t>like, just, know, new, </a:t>
-            </a:r>
-            <a:r>
-              <a:rPr lang="en-US" sz="1800" dirty="0" err="1"/>
-              <a:t>im</a:t>
-            </a:r>
-            <a:r>
-              <a:rPr lang="en-US" sz="1800" dirty="0"/>
-              <a:t> (I’m), does</a:t>
-            </a:r>
-          </a:p>
-          <a:p>
-            <a:pPr marL="114300">
-              <a:spcAft>
-                <a:spcPts val="600"/>
-              </a:spcAft>
-            </a:pPr>
-            <a:r>
-              <a:rPr lang="en-US" sz="1800" b="1" dirty="0"/>
-              <a:t>Keywords: </a:t>
-            </a:r>
-            <a:r>
-              <a:rPr lang="en-US" sz="1800" dirty="0"/>
-              <a:t>zero, sugar, bottle</a:t>
-            </a:r>
-            <a:endParaRPr lang="en-US" sz="1800" b="1" dirty="0"/>
-          </a:p>
-        </p:txBody>
-      </p:sp>
+      </p:pic>
       <p:sp>
         <p:nvSpPr>
-          <p:cNvPr id="14" name="Arrow: Down 13">
-            <a:extLst>
-              <a:ext uri="{FF2B5EF4-FFF2-40B4-BE49-F238E27FC236}">
-                <a16:creationId xmlns:a16="http://schemas.microsoft.com/office/drawing/2014/main" id="{A3AAD459-5819-4FED-1E95-D9B97D09280D}"/>
+          <p:cNvPr id="7" name="Rectangle 6">
+            <a:extLst>
+              <a:ext uri="{FF2B5EF4-FFF2-40B4-BE49-F238E27FC236}">
+                <a16:creationId xmlns:a16="http://schemas.microsoft.com/office/drawing/2014/main" id="{A6B81A6E-9A8A-75DD-0AA2-419868695A2A}"/>
               </a:ext>
             </a:extLst>
           </p:cNvPr>
@@ -17772,30 +17305,24 @@
         </p:nvSpPr>
         <p:spPr>
           <a:xfrm>
-            <a:off x="8517683" y="3326627"/>
-            <a:ext cx="384048" cy="732862"/>
+            <a:off x="5145432" y="4674870"/>
+            <a:ext cx="963168" cy="286893"/>
           </a:xfrm>
-          <a:prstGeom prst="downArrow">
+          <a:prstGeom prst="rect">
             <a:avLst/>
           </a:prstGeom>
-          <a:solidFill>
-            <a:srgbClr val="FF4500"/>
-          </a:solidFill>
-          <a:ln>
-            <a:noFill/>
-          </a:ln>
         </p:spPr>
         <p:style>
           <a:lnRef idx="2">
-            <a:schemeClr val="accent1">
+            <a:schemeClr val="dk1">
               <a:shade val="15000"/>
             </a:schemeClr>
           </a:lnRef>
           <a:fillRef idx="1">
-            <a:schemeClr val="accent1"/>
+            <a:schemeClr val="dk1"/>
           </a:fillRef>
           <a:effectRef idx="0">
-            <a:schemeClr val="accent1"/>
+            <a:schemeClr val="dk1"/>
           </a:effectRef>
           <a:fontRef idx="minor">
             <a:schemeClr val="lt1"/>
@@ -17810,10 +17337,443 @@
           </a:p>
         </p:txBody>
       </p:sp>
+      <p:sp>
+        <p:nvSpPr>
+          <p:cNvPr id="8" name="Rectangle 7">
+            <a:extLst>
+              <a:ext uri="{FF2B5EF4-FFF2-40B4-BE49-F238E27FC236}">
+                <a16:creationId xmlns:a16="http://schemas.microsoft.com/office/drawing/2014/main" id="{E8077362-D49F-CC1C-4720-9595B7E1F7AF}"/>
+              </a:ext>
+            </a:extLst>
+          </p:cNvPr>
+          <p:cNvSpPr/>
+          <p:nvPr/>
+        </p:nvSpPr>
+        <p:spPr>
+          <a:xfrm>
+            <a:off x="5145432" y="5588554"/>
+            <a:ext cx="1219200" cy="286893"/>
+          </a:xfrm>
+          <a:prstGeom prst="rect">
+            <a:avLst/>
+          </a:prstGeom>
+        </p:spPr>
+        <p:style>
+          <a:lnRef idx="2">
+            <a:schemeClr val="dk1">
+              <a:shade val="15000"/>
+            </a:schemeClr>
+          </a:lnRef>
+          <a:fillRef idx="1">
+            <a:schemeClr val="dk1"/>
+          </a:fillRef>
+          <a:effectRef idx="0">
+            <a:schemeClr val="dk1"/>
+          </a:effectRef>
+          <a:fontRef idx="minor">
+            <a:schemeClr val="lt1"/>
+          </a:fontRef>
+        </p:style>
+        <p:txBody>
+          <a:bodyPr rtlCol="0" anchor="ctr"/>
+          <a:lstStyle/>
+          <a:p>
+            <a:pPr algn="ctr"/>
+            <a:endParaRPr lang="en-AE"/>
+          </a:p>
+        </p:txBody>
+      </p:sp>
+      <p:sp>
+        <p:nvSpPr>
+          <p:cNvPr id="9" name="Rectangle 8">
+            <a:extLst>
+              <a:ext uri="{FF2B5EF4-FFF2-40B4-BE49-F238E27FC236}">
+                <a16:creationId xmlns:a16="http://schemas.microsoft.com/office/drawing/2014/main" id="{DC4CD9B4-63B2-FF2F-AC0B-831A49D284D6}"/>
+              </a:ext>
+            </a:extLst>
+          </p:cNvPr>
+          <p:cNvSpPr/>
+          <p:nvPr/>
+        </p:nvSpPr>
+        <p:spPr>
+          <a:xfrm>
+            <a:off x="5130404" y="736663"/>
+            <a:ext cx="1023916" cy="106871"/>
+          </a:xfrm>
+          <a:prstGeom prst="rect">
+            <a:avLst/>
+          </a:prstGeom>
+        </p:spPr>
+        <p:style>
+          <a:lnRef idx="2">
+            <a:schemeClr val="dk1">
+              <a:shade val="15000"/>
+            </a:schemeClr>
+          </a:lnRef>
+          <a:fillRef idx="1">
+            <a:schemeClr val="dk1"/>
+          </a:fillRef>
+          <a:effectRef idx="0">
+            <a:schemeClr val="dk1"/>
+          </a:effectRef>
+          <a:fontRef idx="minor">
+            <a:schemeClr val="lt1"/>
+          </a:fontRef>
+        </p:style>
+        <p:txBody>
+          <a:bodyPr rtlCol="0" anchor="ctr"/>
+          <a:lstStyle/>
+          <a:p>
+            <a:pPr algn="ctr"/>
+            <a:endParaRPr lang="en-AE"/>
+          </a:p>
+        </p:txBody>
+      </p:sp>
+      <p:cxnSp>
+        <p:nvCxnSpPr>
+          <p:cNvPr id="14" name="Straight Arrow Connector 13">
+            <a:extLst>
+              <a:ext uri="{FF2B5EF4-FFF2-40B4-BE49-F238E27FC236}">
+                <a16:creationId xmlns:a16="http://schemas.microsoft.com/office/drawing/2014/main" id="{5AE7ED98-16AA-8727-A3C8-C00CB857592E}"/>
+              </a:ext>
+            </a:extLst>
+          </p:cNvPr>
+          <p:cNvCxnSpPr>
+            <a:cxnSpLocks/>
+            <a:endCxn id="17" idx="3"/>
+          </p:cNvCxnSpPr>
+          <p:nvPr/>
+        </p:nvCxnSpPr>
+        <p:spPr>
+          <a:xfrm>
+            <a:off x="7362455" y="1161288"/>
+            <a:ext cx="3626291" cy="21892"/>
+          </a:xfrm>
+          <a:prstGeom prst="straightConnector1">
+            <a:avLst/>
+          </a:prstGeom>
+          <a:ln w="57150">
+            <a:solidFill>
+              <a:srgbClr val="FF4500"/>
+            </a:solidFill>
+            <a:tailEnd type="triangle"/>
+          </a:ln>
+        </p:spPr>
+        <p:style>
+          <a:lnRef idx="1">
+            <a:schemeClr val="accent1"/>
+          </a:lnRef>
+          <a:fillRef idx="0">
+            <a:schemeClr val="accent1"/>
+          </a:fillRef>
+          <a:effectRef idx="0">
+            <a:schemeClr val="accent1"/>
+          </a:effectRef>
+          <a:fontRef idx="minor">
+            <a:schemeClr val="tx1"/>
+          </a:fontRef>
+        </p:style>
+      </p:cxnSp>
+      <p:cxnSp>
+        <p:nvCxnSpPr>
+          <p:cNvPr id="16" name="Straight Arrow Connector 15">
+            <a:extLst>
+              <a:ext uri="{FF2B5EF4-FFF2-40B4-BE49-F238E27FC236}">
+                <a16:creationId xmlns:a16="http://schemas.microsoft.com/office/drawing/2014/main" id="{2ADDDB5E-BB0C-7228-B4C1-802173E04BD5}"/>
+              </a:ext>
+            </a:extLst>
+          </p:cNvPr>
+          <p:cNvCxnSpPr>
+            <a:cxnSpLocks/>
+            <a:endCxn id="18" idx="3"/>
+          </p:cNvCxnSpPr>
+          <p:nvPr/>
+        </p:nvCxnSpPr>
+        <p:spPr>
+          <a:xfrm>
+            <a:off x="7362455" y="1461629"/>
+            <a:ext cx="3533099" cy="21892"/>
+          </a:xfrm>
+          <a:prstGeom prst="straightConnector1">
+            <a:avLst/>
+          </a:prstGeom>
+          <a:ln w="57150">
+            <a:solidFill>
+              <a:srgbClr val="FF4500"/>
+            </a:solidFill>
+            <a:tailEnd type="triangle"/>
+          </a:ln>
+        </p:spPr>
+        <p:style>
+          <a:lnRef idx="1">
+            <a:schemeClr val="accent1"/>
+          </a:lnRef>
+          <a:fillRef idx="0">
+            <a:schemeClr val="accent1"/>
+          </a:fillRef>
+          <a:effectRef idx="0">
+            <a:schemeClr val="accent1"/>
+          </a:effectRef>
+          <a:fontRef idx="minor">
+            <a:schemeClr val="tx1"/>
+          </a:fontRef>
+        </p:style>
+      </p:cxnSp>
+      <p:sp>
+        <p:nvSpPr>
+          <p:cNvPr id="17" name="TextBox 16">
+            <a:extLst>
+              <a:ext uri="{FF2B5EF4-FFF2-40B4-BE49-F238E27FC236}">
+                <a16:creationId xmlns:a16="http://schemas.microsoft.com/office/drawing/2014/main" id="{188778BD-F1B6-3D8C-5B8B-B9A813CEEE16}"/>
+              </a:ext>
+            </a:extLst>
+          </p:cNvPr>
+          <p:cNvSpPr txBox="1"/>
+          <p:nvPr/>
+        </p:nvSpPr>
+        <p:spPr>
+          <a:xfrm flipH="1">
+            <a:off x="10988746" y="998514"/>
+            <a:ext cx="699505" cy="369332"/>
+          </a:xfrm>
+          <a:prstGeom prst="rect">
+            <a:avLst/>
+          </a:prstGeom>
+          <a:noFill/>
+        </p:spPr>
+        <p:txBody>
+          <a:bodyPr wrap="square" rtlCol="0">
+            <a:spAutoFit/>
+          </a:bodyPr>
+          <a:lstStyle/>
+          <a:p>
+            <a:r>
+              <a:rPr lang="en-US" b="1" dirty="0">
+                <a:solidFill>
+                  <a:srgbClr val="FF0000"/>
+                </a:solidFill>
+              </a:rPr>
+              <a:t>Title</a:t>
+            </a:r>
+            <a:endParaRPr lang="en-AE" b="1" dirty="0">
+              <a:solidFill>
+                <a:srgbClr val="FF0000"/>
+              </a:solidFill>
+            </a:endParaRPr>
+          </a:p>
+        </p:txBody>
+      </p:sp>
+      <p:sp>
+        <p:nvSpPr>
+          <p:cNvPr id="18" name="TextBox 17">
+            <a:extLst>
+              <a:ext uri="{FF2B5EF4-FFF2-40B4-BE49-F238E27FC236}">
+                <a16:creationId xmlns:a16="http://schemas.microsoft.com/office/drawing/2014/main" id="{2809B77A-FE57-0CA7-4E88-49DBCCEFB705}"/>
+              </a:ext>
+            </a:extLst>
+          </p:cNvPr>
+          <p:cNvSpPr txBox="1"/>
+          <p:nvPr/>
+        </p:nvSpPr>
+        <p:spPr>
+          <a:xfrm flipH="1">
+            <a:off x="10895554" y="1298855"/>
+            <a:ext cx="797611" cy="369332"/>
+          </a:xfrm>
+          <a:prstGeom prst="rect">
+            <a:avLst/>
+          </a:prstGeom>
+          <a:noFill/>
+        </p:spPr>
+        <p:txBody>
+          <a:bodyPr wrap="square" rtlCol="0">
+            <a:spAutoFit/>
+          </a:bodyPr>
+          <a:lstStyle/>
+          <a:p>
+            <a:r>
+              <a:rPr lang="en-US" b="1" dirty="0">
+                <a:solidFill>
+                  <a:srgbClr val="FF0000"/>
+                </a:solidFill>
+              </a:rPr>
+              <a:t>Body</a:t>
+            </a:r>
+            <a:endParaRPr lang="en-AE" b="1" dirty="0">
+              <a:solidFill>
+                <a:srgbClr val="FF0000"/>
+              </a:solidFill>
+            </a:endParaRPr>
+          </a:p>
+        </p:txBody>
+      </p:sp>
+      <p:sp>
+        <p:nvSpPr>
+          <p:cNvPr id="22" name="TextBox 21">
+            <a:extLst>
+              <a:ext uri="{FF2B5EF4-FFF2-40B4-BE49-F238E27FC236}">
+                <a16:creationId xmlns:a16="http://schemas.microsoft.com/office/drawing/2014/main" id="{6FBD832C-837B-886E-61A5-224BDFEEBBB2}"/>
+              </a:ext>
+            </a:extLst>
+          </p:cNvPr>
+          <p:cNvSpPr txBox="1"/>
+          <p:nvPr/>
+        </p:nvSpPr>
+        <p:spPr>
+          <a:xfrm flipH="1">
+            <a:off x="9372959" y="529103"/>
+            <a:ext cx="1425211" cy="369332"/>
+          </a:xfrm>
+          <a:prstGeom prst="rect">
+            <a:avLst/>
+          </a:prstGeom>
+          <a:noFill/>
+        </p:spPr>
+        <p:txBody>
+          <a:bodyPr wrap="square" rtlCol="0">
+            <a:spAutoFit/>
+          </a:bodyPr>
+          <a:lstStyle/>
+          <a:p>
+            <a:r>
+              <a:rPr lang="en-US" b="1" dirty="0">
+                <a:solidFill>
+                  <a:srgbClr val="FF0000"/>
+                </a:solidFill>
+              </a:rPr>
+              <a:t>is_pepsi = 1</a:t>
+            </a:r>
+            <a:endParaRPr lang="en-AE" b="1" dirty="0">
+              <a:solidFill>
+                <a:srgbClr val="FF0000"/>
+              </a:solidFill>
+            </a:endParaRPr>
+          </a:p>
+        </p:txBody>
+      </p:sp>
+      <p:sp>
+        <p:nvSpPr>
+          <p:cNvPr id="23" name="TextBox 22">
+            <a:extLst>
+              <a:ext uri="{FF2B5EF4-FFF2-40B4-BE49-F238E27FC236}">
+                <a16:creationId xmlns:a16="http://schemas.microsoft.com/office/drawing/2014/main" id="{A149F613-606A-839B-EE7A-425107FBACF6}"/>
+              </a:ext>
+            </a:extLst>
+          </p:cNvPr>
+          <p:cNvSpPr txBox="1"/>
+          <p:nvPr/>
+        </p:nvSpPr>
+        <p:spPr>
+          <a:xfrm>
+            <a:off x="848087" y="2906974"/>
+            <a:ext cx="872355" cy="923330"/>
+          </a:xfrm>
+          <a:prstGeom prst="rect">
+            <a:avLst/>
+          </a:prstGeom>
+          <a:noFill/>
+        </p:spPr>
+        <p:txBody>
+          <a:bodyPr wrap="none" rtlCol="0">
+            <a:spAutoFit/>
+          </a:bodyPr>
+          <a:lstStyle/>
+          <a:p>
+            <a:pPr algn="ctr"/>
+            <a:r>
+              <a:rPr lang="en-US" b="1" dirty="0">
+                <a:solidFill>
+                  <a:srgbClr val="004A97"/>
+                </a:solidFill>
+              </a:rPr>
+              <a:t>Pepsi</a:t>
+            </a:r>
+            <a:r>
+              <a:rPr lang="en-US" dirty="0"/>
+              <a:t> </a:t>
+            </a:r>
+            <a:endParaRPr lang="en-US" b="1" dirty="0"/>
+          </a:p>
+          <a:p>
+            <a:pPr algn="ctr"/>
+            <a:r>
+              <a:rPr lang="en-US" b="1" dirty="0"/>
+              <a:t>995</a:t>
+            </a:r>
+          </a:p>
+          <a:p>
+            <a:pPr algn="ctr"/>
+            <a:r>
+              <a:rPr lang="en-US" b="1" dirty="0"/>
+              <a:t>Posts</a:t>
+            </a:r>
+            <a:endParaRPr lang="en-AE" b="1" dirty="0"/>
+          </a:p>
+        </p:txBody>
+      </p:sp>
+      <p:sp>
+        <p:nvSpPr>
+          <p:cNvPr id="25" name="TextBox 24">
+            <a:extLst>
+              <a:ext uri="{FF2B5EF4-FFF2-40B4-BE49-F238E27FC236}">
+                <a16:creationId xmlns:a16="http://schemas.microsoft.com/office/drawing/2014/main" id="{16F199D4-AD0F-021E-1BEF-A0F695CBE4B1}"/>
+              </a:ext>
+            </a:extLst>
+          </p:cNvPr>
+          <p:cNvSpPr txBox="1"/>
+          <p:nvPr/>
+        </p:nvSpPr>
+        <p:spPr>
+          <a:xfrm>
+            <a:off x="2058669" y="2888686"/>
+            <a:ext cx="1418978" cy="923330"/>
+          </a:xfrm>
+          <a:prstGeom prst="rect">
+            <a:avLst/>
+          </a:prstGeom>
+          <a:noFill/>
+        </p:spPr>
+        <p:txBody>
+          <a:bodyPr wrap="none" rtlCol="0">
+            <a:spAutoFit/>
+          </a:bodyPr>
+          <a:lstStyle/>
+          <a:p>
+            <a:pPr algn="ctr"/>
+            <a:r>
+              <a:rPr lang="en-US" b="1" dirty="0">
+                <a:solidFill>
+                  <a:srgbClr val="D61F25"/>
+                </a:solidFill>
+              </a:rPr>
+              <a:t>Coca-Cola</a:t>
+            </a:r>
+            <a:r>
+              <a:rPr lang="en-US" b="1" dirty="0"/>
+              <a:t> </a:t>
+            </a:r>
+          </a:p>
+          <a:p>
+            <a:pPr algn="ctr"/>
+            <a:r>
+              <a:rPr lang="en-US" b="1" dirty="0"/>
+              <a:t>963</a:t>
+            </a:r>
+          </a:p>
+          <a:p>
+            <a:pPr algn="ctr"/>
+            <a:r>
+              <a:rPr lang="en-US" b="1" dirty="0"/>
+              <a:t>Post</a:t>
+            </a:r>
+            <a:endParaRPr lang="en-AE" b="1" dirty="0"/>
+          </a:p>
+        </p:txBody>
+      </p:sp>
     </p:spTree>
     <p:extLst>
       <p:ext uri="{BB962C8B-B14F-4D97-AF65-F5344CB8AC3E}">
-        <p14:creationId xmlns:p14="http://schemas.microsoft.com/office/powerpoint/2010/main" val="2445773093"/>
+        <p14:creationId xmlns:p14="http://schemas.microsoft.com/office/powerpoint/2010/main" val="1491957436"/>
       </p:ext>
     </p:extLst>
   </p:cSld>
@@ -17823,7 +17783,7 @@
 </p:sld>
 </file>
 
-<file path=ppt/slides/slide6.xml><?xml version="1.0" encoding="utf-8"?>
+<file path=ppt/slides/slide5.xml><?xml version="1.0" encoding="utf-8"?>
 <p:sld xmlns:a="http://schemas.openxmlformats.org/drawingml/2006/main" xmlns:r="http://schemas.openxmlformats.org/officeDocument/2006/relationships" xmlns:p="http://schemas.openxmlformats.org/presentationml/2006/main">
   <p:cSld>
     <p:bg>
@@ -17839,7 +17799,7 @@
         <p:cNvPr id="1" name="">
           <a:extLst>
             <a:ext uri="{FF2B5EF4-FFF2-40B4-BE49-F238E27FC236}">
-              <a16:creationId xmlns:a16="http://schemas.microsoft.com/office/drawing/2014/main" id="{2323CE06-CE9B-902E-18DD-35CABAEB6265}"/>
+              <a16:creationId xmlns:a16="http://schemas.microsoft.com/office/drawing/2014/main" id="{C288AC5A-61D9-1A24-37D9-B7F850B204EA}"/>
             </a:ext>
           </a:extLst>
         </p:cNvPr>
@@ -17859,7 +17819,7 @@
           <p:cNvPr id="29" name="Rectangle 28">
             <a:extLst>
               <a:ext uri="{FF2B5EF4-FFF2-40B4-BE49-F238E27FC236}">
-                <a16:creationId xmlns:a16="http://schemas.microsoft.com/office/drawing/2014/main" id="{E1CDAFE6-F2A2-FF22-0B43-DB5227ECBD57}"/>
+                <a16:creationId xmlns:a16="http://schemas.microsoft.com/office/drawing/2014/main" id="{8F5D788B-BD87-B29E-E036-C5E747511046}"/>
               </a:ext>
               <a:ext uri="{C183D7F6-B498-43B3-948B-1728B52AA6E4}">
                 <adec:decorative xmlns:adec="http://schemas.microsoft.com/office/drawing/2017/decorative" val="1"/>
@@ -17961,7 +17921,7 @@
           <p:cNvPr id="31" name="Rectangle 30">
             <a:extLst>
               <a:ext uri="{FF2B5EF4-FFF2-40B4-BE49-F238E27FC236}">
-                <a16:creationId xmlns:a16="http://schemas.microsoft.com/office/drawing/2014/main" id="{CC76E3BF-5996-EFE4-4B2E-E46FFC0C7A95}"/>
+                <a16:creationId xmlns:a16="http://schemas.microsoft.com/office/drawing/2014/main" id="{3DEFE4F9-1900-081D-EE6C-D9184B244C38}"/>
               </a:ext>
               <a:ext uri="{C183D7F6-B498-43B3-948B-1728B52AA6E4}">
                 <adec:decorative xmlns:adec="http://schemas.microsoft.com/office/drawing/2017/decorative" val="1"/>
@@ -18051,7 +18011,7 @@
           <p:cNvPr id="33" name="Rectangle 32">
             <a:extLst>
               <a:ext uri="{FF2B5EF4-FFF2-40B4-BE49-F238E27FC236}">
-                <a16:creationId xmlns:a16="http://schemas.microsoft.com/office/drawing/2014/main" id="{9159142A-AAAD-6238-BB29-DE5A7BBC2D0E}"/>
+                <a16:creationId xmlns:a16="http://schemas.microsoft.com/office/drawing/2014/main" id="{7E1B7086-B841-4D71-59B3-9CE357A04F1C}"/>
               </a:ext>
               <a:ext uri="{C183D7F6-B498-43B3-948B-1728B52AA6E4}">
                 <adec:decorative xmlns:adec="http://schemas.microsoft.com/office/drawing/2017/decorative" val="1"/>
@@ -18143,7 +18103,7 @@
           <p:cNvPr id="35" name="Rectangle 34">
             <a:extLst>
               <a:ext uri="{FF2B5EF4-FFF2-40B4-BE49-F238E27FC236}">
-                <a16:creationId xmlns:a16="http://schemas.microsoft.com/office/drawing/2014/main" id="{3E38FD63-6CE5-92EE-D38A-DD73609AA656}"/>
+                <a16:creationId xmlns:a16="http://schemas.microsoft.com/office/drawing/2014/main" id="{813D45DA-B74D-70B5-9A46-0B75B27AF4B4}"/>
               </a:ext>
               <a:ext uri="{C183D7F6-B498-43B3-948B-1728B52AA6E4}">
                 <adec:decorative xmlns:adec="http://schemas.microsoft.com/office/drawing/2017/decorative" val="1"/>
@@ -18203,7 +18163,7 @@
           <p:cNvPr id="37" name="Rectangle 36">
             <a:extLst>
               <a:ext uri="{FF2B5EF4-FFF2-40B4-BE49-F238E27FC236}">
-                <a16:creationId xmlns:a16="http://schemas.microsoft.com/office/drawing/2014/main" id="{908D8BBC-5A13-F76B-C40B-42ACCBF568E5}"/>
+                <a16:creationId xmlns:a16="http://schemas.microsoft.com/office/drawing/2014/main" id="{5E8CDE99-77F9-1330-A212-22C9A494E929}"/>
               </a:ext>
               <a:ext uri="{C183D7F6-B498-43B3-948B-1728B52AA6E4}">
                 <adec:decorative xmlns:adec="http://schemas.microsoft.com/office/drawing/2017/decorative" val="1"/>
@@ -18289,7 +18249,7 @@
           <p:cNvPr id="24" name="TextBox 23">
             <a:extLst>
               <a:ext uri="{FF2B5EF4-FFF2-40B4-BE49-F238E27FC236}">
-                <a16:creationId xmlns:a16="http://schemas.microsoft.com/office/drawing/2014/main" id="{251C9BCE-875E-922F-077B-78271202C5F6}"/>
+                <a16:creationId xmlns:a16="http://schemas.microsoft.com/office/drawing/2014/main" id="{819C3008-8F32-1DD2-F1FD-CF9B1223180C}"/>
               </a:ext>
             </a:extLst>
           </p:cNvPr>
@@ -18382,7 +18342,7 @@
           <p:cNvPr id="39" name="Rectangle 38">
             <a:extLst>
               <a:ext uri="{FF2B5EF4-FFF2-40B4-BE49-F238E27FC236}">
-                <a16:creationId xmlns:a16="http://schemas.microsoft.com/office/drawing/2014/main" id="{4F7838D1-18B1-3997-5FD0-CDDE7FDC6967}"/>
+                <a16:creationId xmlns:a16="http://schemas.microsoft.com/office/drawing/2014/main" id="{8F49DC3C-1EF7-8703-6A04-2247611F89FF}"/>
               </a:ext>
               <a:ext uri="{C183D7F6-B498-43B3-948B-1728B52AA6E4}">
                 <adec:decorative xmlns:adec="http://schemas.microsoft.com/office/drawing/2017/decorative" val="1"/>
@@ -18474,7 +18434,7 @@
           <p:cNvPr id="41" name="Rectangle 40">
             <a:extLst>
               <a:ext uri="{FF2B5EF4-FFF2-40B4-BE49-F238E27FC236}">
-                <a16:creationId xmlns:a16="http://schemas.microsoft.com/office/drawing/2014/main" id="{A5BA996F-04A1-EFE1-AAB3-E2FBA4C840A4}"/>
+                <a16:creationId xmlns:a16="http://schemas.microsoft.com/office/drawing/2014/main" id="{3467AA8B-209F-FC12-6C2E-EA7DB0C432E8}"/>
               </a:ext>
               <a:ext uri="{C183D7F6-B498-43B3-948B-1728B52AA6E4}">
                 <adec:decorative xmlns:adec="http://schemas.microsoft.com/office/drawing/2017/decorative" val="1"/>
@@ -18570,12 +18530,124 @@
           </a:p>
         </p:txBody>
       </p:sp>
+      <p:sp>
+        <p:nvSpPr>
+          <p:cNvPr id="11" name="TextBox 10">
+            <a:extLst>
+              <a:ext uri="{FF2B5EF4-FFF2-40B4-BE49-F238E27FC236}">
+                <a16:creationId xmlns:a16="http://schemas.microsoft.com/office/drawing/2014/main" id="{D8395523-AD42-7046-2B41-ECEBA446FE13}"/>
+              </a:ext>
+            </a:extLst>
+          </p:cNvPr>
+          <p:cNvSpPr txBox="1"/>
+          <p:nvPr/>
+        </p:nvSpPr>
+        <p:spPr>
+          <a:xfrm>
+            <a:off x="371094" y="2718054"/>
+            <a:ext cx="3438906" cy="3207258"/>
+          </a:xfrm>
+          <a:prstGeom prst="rect">
+            <a:avLst/>
+          </a:prstGeom>
+        </p:spPr>
+        <p:txBody>
+          <a:bodyPr vert="horz" lIns="91440" tIns="45720" rIns="91440" bIns="45720" rtlCol="0" anchor="t">
+            <a:normAutofit/>
+          </a:bodyPr>
+          <a:lstStyle/>
+          <a:p>
+            <a:pPr marL="114300">
+              <a:spcAft>
+                <a:spcPts val="600"/>
+              </a:spcAft>
+            </a:pPr>
+            <a:r>
+              <a:rPr lang="en-US" sz="2400" b="1" dirty="0"/>
+              <a:t>Word Counts</a:t>
+            </a:r>
+          </a:p>
+          <a:p>
+            <a:pPr marL="114300">
+              <a:spcAft>
+                <a:spcPts val="600"/>
+              </a:spcAft>
+            </a:pPr>
+            <a:endParaRPr lang="en-US" sz="2400" b="1" dirty="0"/>
+          </a:p>
+          <a:p>
+            <a:pPr marL="114300">
+              <a:spcAft>
+                <a:spcPts val="600"/>
+              </a:spcAft>
+            </a:pPr>
+            <a:r>
+              <a:rPr lang="en-US" sz="1600" b="1" dirty="0"/>
+              <a:t>Similarities in Lower Quartiles</a:t>
+            </a:r>
+          </a:p>
+          <a:p>
+            <a:pPr marL="114300">
+              <a:spcAft>
+                <a:spcPts val="600"/>
+              </a:spcAft>
+            </a:pPr>
+            <a:endParaRPr lang="en-US" sz="1600" b="1" dirty="0"/>
+          </a:p>
+          <a:p>
+            <a:pPr marL="114300">
+              <a:spcAft>
+                <a:spcPts val="600"/>
+              </a:spcAft>
+            </a:pPr>
+            <a:r>
+              <a:rPr lang="en-US" sz="1600" b="1" dirty="0"/>
+              <a:t>Differences in Higher Quartiles</a:t>
+            </a:r>
+          </a:p>
+          <a:p>
+            <a:pPr marL="114300">
+              <a:spcAft>
+                <a:spcPts val="600"/>
+              </a:spcAft>
+            </a:pPr>
+            <a:r>
+              <a:rPr lang="en-US" sz="1600" dirty="0">
+                <a:solidFill>
+                  <a:srgbClr val="134A84"/>
+                </a:solidFill>
+              </a:rPr>
+              <a:t>Pepsi </a:t>
+            </a:r>
+            <a:r>
+              <a:rPr lang="en-US" sz="1600" dirty="0"/>
+              <a:t>have more word counts than </a:t>
+            </a:r>
+            <a:r>
+              <a:rPr lang="en-US" sz="1600" dirty="0">
+                <a:solidFill>
+                  <a:srgbClr val="D61F25"/>
+                </a:solidFill>
+              </a:rPr>
+              <a:t>Coca-Cola</a:t>
+            </a:r>
+          </a:p>
+          <a:p>
+            <a:pPr marL="571500" lvl="1">
+              <a:spcAft>
+                <a:spcPts val="600"/>
+              </a:spcAft>
+            </a:pPr>
+            <a:endParaRPr lang="en-US" sz="1600" b="1" dirty="0"/>
+          </a:p>
+        </p:txBody>
+      </p:sp>
       <p:pic>
         <p:nvPicPr>
-          <p:cNvPr id="2" name="Picture 1" descr="A graph of red and blue bars&#10;&#10;Description automatically generated">
-            <a:extLst>
-              <a:ext uri="{FF2B5EF4-FFF2-40B4-BE49-F238E27FC236}">
-                <a16:creationId xmlns:a16="http://schemas.microsoft.com/office/drawing/2014/main" id="{18E2AE6D-5DB4-FBBC-9F3F-3249C7A1D03D}"/>
+          <p:cNvPr id="6" name="Picture 5" descr="A red and blue diagram&#10;&#10;Description automatically generated">
+            <a:extLst>
+              <a:ext uri="{FF2B5EF4-FFF2-40B4-BE49-F238E27FC236}">
+                <a16:creationId xmlns:a16="http://schemas.microsoft.com/office/drawing/2014/main" id="{E486C81D-BCAE-8560-7947-7038AED53990}"/>
               </a:ext>
             </a:extLst>
           </p:cNvPr>
@@ -18592,13 +18664,13 @@
               </a:ext>
             </a:extLst>
           </a:blip>
-          <a:srcRect t="-814" b="5397"/>
+          <a:srcRect l="51555" r="1915" b="8879"/>
           <a:stretch/>
         </p:blipFill>
         <p:spPr>
           <a:xfrm>
-            <a:off x="195060" y="2574027"/>
-            <a:ext cx="11801880" cy="4283973"/>
+            <a:off x="5639754" y="1295969"/>
+            <a:ext cx="5484496" cy="4266062"/>
           </a:xfrm>
           <a:prstGeom prst="rect">
             <a:avLst/>
@@ -18607,10 +18679,10 @@
       </p:pic>
       <p:sp>
         <p:nvSpPr>
-          <p:cNvPr id="4" name="TextBox 3">
-            <a:extLst>
-              <a:ext uri="{FF2B5EF4-FFF2-40B4-BE49-F238E27FC236}">
-                <a16:creationId xmlns:a16="http://schemas.microsoft.com/office/drawing/2014/main" id="{9C09B7D4-978B-3561-DAC9-73C07EBFEE49}"/>
+          <p:cNvPr id="10" name="TextBox 9">
+            <a:extLst>
+              <a:ext uri="{FF2B5EF4-FFF2-40B4-BE49-F238E27FC236}">
+                <a16:creationId xmlns:a16="http://schemas.microsoft.com/office/drawing/2014/main" id="{E03429B0-ABA1-DB64-E438-FBFD8205E418}"/>
               </a:ext>
             </a:extLst>
           </p:cNvPr>
@@ -18619,68 +18691,46 @@
         </p:nvSpPr>
         <p:spPr>
           <a:xfrm>
-            <a:off x="4062282" y="1190143"/>
-            <a:ext cx="3789882" cy="1067002"/>
+            <a:off x="9488855" y="2938307"/>
+            <a:ext cx="1133854" cy="369332"/>
           </a:xfrm>
           <a:prstGeom prst="rect">
             <a:avLst/>
           </a:prstGeom>
+          <a:noFill/>
         </p:spPr>
         <p:txBody>
-          <a:bodyPr vert="horz" lIns="91440" tIns="45720" rIns="91440" bIns="45720" numCol="1" rtlCol="0" anchor="t">
-            <a:normAutofit/>
+          <a:bodyPr wrap="square">
+            <a:spAutoFit/>
           </a:bodyPr>
           <a:lstStyle/>
           <a:p>
-            <a:pPr marL="114300">
-              <a:spcAft>
-                <a:spcPts val="600"/>
-              </a:spcAft>
-            </a:pPr>
-            <a:r>
-              <a:rPr lang="en-US" sz="2400" b="1" dirty="0"/>
-              <a:t>Exclusive Words</a:t>
-            </a:r>
-          </a:p>
-          <a:p>
-            <a:pPr marL="114300">
-              <a:spcAft>
-                <a:spcPts val="600"/>
-              </a:spcAft>
-            </a:pPr>
-            <a:r>
-              <a:rPr lang="en-US" sz="1600" b="1" dirty="0"/>
-              <a:t>Words that mostly show either in </a:t>
-            </a:r>
-            <a:r>
-              <a:rPr lang="en-US" sz="1600" b="1" dirty="0">
+            <a:pPr algn="ctr"/>
+            <a:r>
+              <a:rPr lang="en-GB" sz="1800" b="1" i="0" dirty="0">
+                <a:ln>
+                  <a:solidFill>
+                    <a:schemeClr val="bg1"/>
+                  </a:solidFill>
+                </a:ln>
                 <a:solidFill>
-                  <a:srgbClr val="134A84"/>
+                  <a:srgbClr val="D71F25"/>
                 </a:solidFill>
-              </a:rPr>
-              <a:t>Pepsi</a:t>
-            </a:r>
-            <a:r>
-              <a:rPr lang="en-US" sz="1600" b="1" dirty="0"/>
-              <a:t> or </a:t>
-            </a:r>
-            <a:r>
-              <a:rPr lang="en-US" sz="1600" b="1" dirty="0">
-                <a:solidFill>
-                  <a:srgbClr val="F40009"/>
-                </a:solidFill>
+                <a:effectLst/>
+                <a:latin typeface="system-ui"/>
               </a:rPr>
               <a:t>Coca-Cola</a:t>
             </a:r>
+            <a:endParaRPr lang="en-AE" b="1" dirty="0"/>
           </a:p>
         </p:txBody>
       </p:sp>
       <p:sp>
         <p:nvSpPr>
-          <p:cNvPr id="5" name="TextBox 4">
-            <a:extLst>
-              <a:ext uri="{FF2B5EF4-FFF2-40B4-BE49-F238E27FC236}">
-                <a16:creationId xmlns:a16="http://schemas.microsoft.com/office/drawing/2014/main" id="{39166528-FA06-3588-E3EF-70AE58315C9D}"/>
+          <p:cNvPr id="12" name="TextBox 11">
+            <a:extLst>
+              <a:ext uri="{FF2B5EF4-FFF2-40B4-BE49-F238E27FC236}">
+                <a16:creationId xmlns:a16="http://schemas.microsoft.com/office/drawing/2014/main" id="{05B6AFF2-36DB-829D-95FE-67851010E0ED}"/>
               </a:ext>
             </a:extLst>
           </p:cNvPr>
@@ -18689,51 +18739,225 @@
         </p:nvSpPr>
         <p:spPr>
           <a:xfrm>
-            <a:off x="7852164" y="1429604"/>
-            <a:ext cx="3789882" cy="827541"/>
+            <a:off x="9488855" y="3504642"/>
+            <a:ext cx="1133854" cy="369332"/>
           </a:xfrm>
           <a:prstGeom prst="rect">
             <a:avLst/>
           </a:prstGeom>
+          <a:noFill/>
         </p:spPr>
         <p:txBody>
-          <a:bodyPr vert="horz" lIns="91440" tIns="45720" rIns="91440" bIns="45720" numCol="1" rtlCol="0" anchor="t">
-            <a:normAutofit/>
+          <a:bodyPr wrap="square">
+            <a:spAutoFit/>
           </a:bodyPr>
           <a:lstStyle/>
           <a:p>
-            <a:pPr marL="114300">
-              <a:spcAft>
-                <a:spcPts val="600"/>
-              </a:spcAft>
-            </a:pPr>
-            <a:r>
-              <a:rPr lang="en-US" sz="1600" b="1" dirty="0"/>
-              <a:t>Find the difference in the count of occurrences between </a:t>
-            </a:r>
-            <a:r>
-              <a:rPr lang="en-US" sz="1600" b="1" dirty="0">
+            <a:pPr algn="ctr"/>
+            <a:r>
+              <a:rPr lang="en-GB" sz="1800" b="1" i="0" dirty="0">
+                <a:ln>
+                  <a:solidFill>
+                    <a:schemeClr val="bg1"/>
+                  </a:solidFill>
+                </a:ln>
                 <a:solidFill>
                   <a:srgbClr val="134A84"/>
                 </a:solidFill>
+                <a:effectLst/>
+                <a:latin typeface="system-ui"/>
               </a:rPr>
               <a:t>Pepsi</a:t>
             </a:r>
-            <a:r>
-              <a:rPr lang="en-US" sz="1600" b="1" dirty="0"/>
-              <a:t> and </a:t>
-            </a:r>
-            <a:r>
-              <a:rPr lang="en-US" sz="1600" b="1" dirty="0">
+            <a:endParaRPr lang="en-AE" dirty="0">
+              <a:solidFill>
+                <a:srgbClr val="134A84"/>
+              </a:solidFill>
+            </a:endParaRPr>
+          </a:p>
+        </p:txBody>
+      </p:sp>
+      <p:sp>
+        <p:nvSpPr>
+          <p:cNvPr id="17" name="TextBox 16">
+            <a:extLst>
+              <a:ext uri="{FF2B5EF4-FFF2-40B4-BE49-F238E27FC236}">
+                <a16:creationId xmlns:a16="http://schemas.microsoft.com/office/drawing/2014/main" id="{089F5E00-602A-5D83-7FFA-45029DDAC56D}"/>
+              </a:ext>
+            </a:extLst>
+          </p:cNvPr>
+          <p:cNvSpPr txBox="1"/>
+          <p:nvPr/>
+        </p:nvSpPr>
+        <p:spPr>
+          <a:xfrm>
+            <a:off x="7787579" y="2011680"/>
+            <a:ext cx="1601385" cy="369332"/>
+          </a:xfrm>
+          <a:prstGeom prst="rect">
+            <a:avLst/>
+          </a:prstGeom>
+          <a:noFill/>
+        </p:spPr>
+        <p:txBody>
+          <a:bodyPr wrap="square">
+            <a:spAutoFit/>
+          </a:bodyPr>
+          <a:lstStyle/>
+          <a:p>
+            <a:pPr algn="ctr"/>
+            <a:r>
+              <a:rPr lang="en-GB" sz="1800" b="1" i="0" dirty="0">
+                <a:ln>
+                  <a:solidFill>
+                    <a:schemeClr val="bg1"/>
+                  </a:solidFill>
+                </a:ln>
                 <a:solidFill>
-                  <a:srgbClr val="F40009"/>
+                  <a:srgbClr val="D71F25"/>
                 </a:solidFill>
+                <a:effectLst/>
+                <a:latin typeface="system-ui"/>
               </a:rPr>
-              <a:t>Coca-Cola</a:t>
-            </a:r>
-            <a:endParaRPr lang="en-US" sz="1100" b="1" dirty="0">
+              <a:t>Q3 – 43 words</a:t>
+            </a:r>
+            <a:endParaRPr lang="en-AE" dirty="0"/>
+          </a:p>
+        </p:txBody>
+      </p:sp>
+      <p:cxnSp>
+        <p:nvCxnSpPr>
+          <p:cNvPr id="19" name="Connector: Elbow 18">
+            <a:extLst>
+              <a:ext uri="{FF2B5EF4-FFF2-40B4-BE49-F238E27FC236}">
+                <a16:creationId xmlns:a16="http://schemas.microsoft.com/office/drawing/2014/main" id="{2638F757-B99E-E84E-7102-114F3E47C87E}"/>
+              </a:ext>
+            </a:extLst>
+          </p:cNvPr>
+          <p:cNvCxnSpPr>
+            <a:cxnSpLocks/>
+            <a:endCxn id="17" idx="1"/>
+          </p:cNvCxnSpPr>
+          <p:nvPr/>
+        </p:nvCxnSpPr>
+        <p:spPr>
+          <a:xfrm flipV="1">
+            <a:off x="6885432" y="2196346"/>
+            <a:ext cx="902147" cy="629150"/>
+          </a:xfrm>
+          <a:prstGeom prst="bentConnector3">
+            <a:avLst/>
+          </a:prstGeom>
+          <a:ln w="38100">
+            <a:headEnd type="triangle"/>
+            <a:tailEnd type="triangle"/>
+          </a:ln>
+        </p:spPr>
+        <p:style>
+          <a:lnRef idx="1">
+            <a:schemeClr val="accent1"/>
+          </a:lnRef>
+          <a:fillRef idx="0">
+            <a:schemeClr val="accent1"/>
+          </a:fillRef>
+          <a:effectRef idx="0">
+            <a:schemeClr val="accent1"/>
+          </a:effectRef>
+          <a:fontRef idx="minor">
+            <a:schemeClr val="tx1"/>
+          </a:fontRef>
+        </p:style>
+      </p:cxnSp>
+      <p:cxnSp>
+        <p:nvCxnSpPr>
+          <p:cNvPr id="21" name="Connector: Elbow 20">
+            <a:extLst>
+              <a:ext uri="{FF2B5EF4-FFF2-40B4-BE49-F238E27FC236}">
+                <a16:creationId xmlns:a16="http://schemas.microsoft.com/office/drawing/2014/main" id="{03016860-0010-C04F-7551-E53D907B273C}"/>
+              </a:ext>
+            </a:extLst>
+          </p:cNvPr>
+          <p:cNvCxnSpPr>
+            <a:cxnSpLocks/>
+            <a:endCxn id="25" idx="1"/>
+          </p:cNvCxnSpPr>
+          <p:nvPr/>
+        </p:nvCxnSpPr>
+        <p:spPr>
+          <a:xfrm>
+            <a:off x="7123176" y="4121455"/>
+            <a:ext cx="652939" cy="423367"/>
+          </a:xfrm>
+          <a:prstGeom prst="bentConnector3">
+            <a:avLst/>
+          </a:prstGeom>
+          <a:ln w="38100">
+            <a:headEnd type="triangle"/>
+            <a:tailEnd type="triangle"/>
+          </a:ln>
+        </p:spPr>
+        <p:style>
+          <a:lnRef idx="1">
+            <a:schemeClr val="accent1"/>
+          </a:lnRef>
+          <a:fillRef idx="0">
+            <a:schemeClr val="accent1"/>
+          </a:fillRef>
+          <a:effectRef idx="0">
+            <a:schemeClr val="accent1"/>
+          </a:effectRef>
+          <a:fontRef idx="minor">
+            <a:schemeClr val="tx1"/>
+          </a:fontRef>
+        </p:style>
+      </p:cxnSp>
+      <p:sp>
+        <p:nvSpPr>
+          <p:cNvPr id="25" name="TextBox 24">
+            <a:extLst>
+              <a:ext uri="{FF2B5EF4-FFF2-40B4-BE49-F238E27FC236}">
+                <a16:creationId xmlns:a16="http://schemas.microsoft.com/office/drawing/2014/main" id="{A15B810C-76D3-88D1-0F3B-625C4B0614BB}"/>
+              </a:ext>
+            </a:extLst>
+          </p:cNvPr>
+          <p:cNvSpPr txBox="1"/>
+          <p:nvPr/>
+        </p:nvSpPr>
+        <p:spPr>
+          <a:xfrm>
+            <a:off x="7776115" y="4360156"/>
+            <a:ext cx="1601385" cy="369332"/>
+          </a:xfrm>
+          <a:prstGeom prst="rect">
+            <a:avLst/>
+          </a:prstGeom>
+          <a:noFill/>
+        </p:spPr>
+        <p:txBody>
+          <a:bodyPr wrap="square">
+            <a:spAutoFit/>
+          </a:bodyPr>
+          <a:lstStyle/>
+          <a:p>
+            <a:pPr algn="ctr"/>
+            <a:r>
+              <a:rPr lang="en-GB" sz="1800" b="1" i="0" dirty="0">
+                <a:ln>
+                  <a:solidFill>
+                    <a:schemeClr val="bg1"/>
+                  </a:solidFill>
+                </a:ln>
+                <a:solidFill>
+                  <a:srgbClr val="134A84"/>
+                </a:solidFill>
+                <a:effectLst/>
+                <a:latin typeface="system-ui"/>
+              </a:rPr>
+              <a:t>Q3 – 51 words</a:t>
+            </a:r>
+            <a:endParaRPr lang="en-AE" dirty="0">
               <a:solidFill>
-                <a:srgbClr val="F40009"/>
+                <a:srgbClr val="134A84"/>
               </a:solidFill>
             </a:endParaRPr>
           </a:p>
@@ -18742,7 +18966,7 @@
     </p:spTree>
     <p:extLst>
       <p:ext uri="{BB962C8B-B14F-4D97-AF65-F5344CB8AC3E}">
-        <p14:creationId xmlns:p14="http://schemas.microsoft.com/office/powerpoint/2010/main" val="2009258326"/>
+        <p14:creationId xmlns:p14="http://schemas.microsoft.com/office/powerpoint/2010/main" val="2893670814"/>
       </p:ext>
     </p:extLst>
   </p:cSld>
@@ -18752,7 +18976,7 @@
 </p:sld>
 </file>
 
-<file path=ppt/slides/slide7.xml><?xml version="1.0" encoding="utf-8"?>
+<file path=ppt/slides/slide6.xml><?xml version="1.0" encoding="utf-8"?>
 <p:sld xmlns:a="http://schemas.openxmlformats.org/drawingml/2006/main" xmlns:r="http://schemas.openxmlformats.org/officeDocument/2006/relationships" xmlns:p="http://schemas.openxmlformats.org/presentationml/2006/main">
   <p:cSld>
     <p:bg>
@@ -18768,7 +18992,7 @@
         <p:cNvPr id="1" name="">
           <a:extLst>
             <a:ext uri="{FF2B5EF4-FFF2-40B4-BE49-F238E27FC236}">
-              <a16:creationId xmlns:a16="http://schemas.microsoft.com/office/drawing/2014/main" id="{F1AC326A-5380-4B2F-A366-BEF46B4912D5}"/>
+              <a16:creationId xmlns:a16="http://schemas.microsoft.com/office/drawing/2014/main" id="{AF6F51DD-D06B-C7B8-F16E-83ECD752CFFB}"/>
             </a:ext>
           </a:extLst>
         </p:cNvPr>
@@ -18788,7 +19012,7 @@
           <p:cNvPr id="29" name="Rectangle 28">
             <a:extLst>
               <a:ext uri="{FF2B5EF4-FFF2-40B4-BE49-F238E27FC236}">
-                <a16:creationId xmlns:a16="http://schemas.microsoft.com/office/drawing/2014/main" id="{D9A00EEF-6498-6EA6-9851-3EA3F237A40C}"/>
+                <a16:creationId xmlns:a16="http://schemas.microsoft.com/office/drawing/2014/main" id="{32587214-4240-0691-535B-D160F19B3562}"/>
               </a:ext>
               <a:ext uri="{C183D7F6-B498-43B3-948B-1728B52AA6E4}">
                 <adec:decorative xmlns:adec="http://schemas.microsoft.com/office/drawing/2017/decorative" val="1"/>
@@ -18890,7 +19114,7 @@
           <p:cNvPr id="31" name="Rectangle 30">
             <a:extLst>
               <a:ext uri="{FF2B5EF4-FFF2-40B4-BE49-F238E27FC236}">
-                <a16:creationId xmlns:a16="http://schemas.microsoft.com/office/drawing/2014/main" id="{1DB8FAC0-D288-84AE-831C-A53FE50E7C9F}"/>
+                <a16:creationId xmlns:a16="http://schemas.microsoft.com/office/drawing/2014/main" id="{7B802D65-8599-B984-655A-E1A5619EC301}"/>
               </a:ext>
               <a:ext uri="{C183D7F6-B498-43B3-948B-1728B52AA6E4}">
                 <adec:decorative xmlns:adec="http://schemas.microsoft.com/office/drawing/2017/decorative" val="1"/>
@@ -18980,7 +19204,7 @@
           <p:cNvPr id="33" name="Rectangle 32">
             <a:extLst>
               <a:ext uri="{FF2B5EF4-FFF2-40B4-BE49-F238E27FC236}">
-                <a16:creationId xmlns:a16="http://schemas.microsoft.com/office/drawing/2014/main" id="{4A334AF3-D16B-E373-4BB6-2CA4040B8828}"/>
+                <a16:creationId xmlns:a16="http://schemas.microsoft.com/office/drawing/2014/main" id="{9BB11663-1FD7-0A49-37B2-9D4D1B513CFD}"/>
               </a:ext>
               <a:ext uri="{C183D7F6-B498-43B3-948B-1728B52AA6E4}">
                 <adec:decorative xmlns:adec="http://schemas.microsoft.com/office/drawing/2017/decorative" val="1"/>
@@ -19072,7 +19296,7 @@
           <p:cNvPr id="35" name="Rectangle 34">
             <a:extLst>
               <a:ext uri="{FF2B5EF4-FFF2-40B4-BE49-F238E27FC236}">
-                <a16:creationId xmlns:a16="http://schemas.microsoft.com/office/drawing/2014/main" id="{391954FC-17DB-5B0E-46A5-E81E4206885E}"/>
+                <a16:creationId xmlns:a16="http://schemas.microsoft.com/office/drawing/2014/main" id="{A7DD6410-A401-57D9-5B9D-C20D21FE0A88}"/>
               </a:ext>
               <a:ext uri="{C183D7F6-B498-43B3-948B-1728B52AA6E4}">
                 <adec:decorative xmlns:adec="http://schemas.microsoft.com/office/drawing/2017/decorative" val="1"/>
@@ -19132,7 +19356,7 @@
           <p:cNvPr id="37" name="Rectangle 36">
             <a:extLst>
               <a:ext uri="{FF2B5EF4-FFF2-40B4-BE49-F238E27FC236}">
-                <a16:creationId xmlns:a16="http://schemas.microsoft.com/office/drawing/2014/main" id="{D9ED3737-F0FD-6B5F-2DFB-6CF5738C1F7A}"/>
+                <a16:creationId xmlns:a16="http://schemas.microsoft.com/office/drawing/2014/main" id="{B60D31F5-7413-7D37-650D-2F28AF8251EA}"/>
               </a:ext>
               <a:ext uri="{C183D7F6-B498-43B3-948B-1728B52AA6E4}">
                 <adec:decorative xmlns:adec="http://schemas.microsoft.com/office/drawing/2017/decorative" val="1"/>
@@ -19218,7 +19442,7 @@
           <p:cNvPr id="24" name="TextBox 23">
             <a:extLst>
               <a:ext uri="{FF2B5EF4-FFF2-40B4-BE49-F238E27FC236}">
-                <a16:creationId xmlns:a16="http://schemas.microsoft.com/office/drawing/2014/main" id="{67EDDACF-CCC1-159B-E83C-57D66586531A}"/>
+                <a16:creationId xmlns:a16="http://schemas.microsoft.com/office/drawing/2014/main" id="{A552DA07-B8D2-5890-7026-29EFE66082F9}"/>
               </a:ext>
             </a:extLst>
           </p:cNvPr>
@@ -19311,7 +19535,7 @@
           <p:cNvPr id="39" name="Rectangle 38">
             <a:extLst>
               <a:ext uri="{FF2B5EF4-FFF2-40B4-BE49-F238E27FC236}">
-                <a16:creationId xmlns:a16="http://schemas.microsoft.com/office/drawing/2014/main" id="{7C522502-2428-4C4A-4628-0CA4EB55AB23}"/>
+                <a16:creationId xmlns:a16="http://schemas.microsoft.com/office/drawing/2014/main" id="{C1FBCF16-EC6B-47D2-EC30-30E02C02EBF3}"/>
               </a:ext>
               <a:ext uri="{C183D7F6-B498-43B3-948B-1728B52AA6E4}">
                 <adec:decorative xmlns:adec="http://schemas.microsoft.com/office/drawing/2017/decorative" val="1"/>
@@ -19403,7 +19627,7 @@
           <p:cNvPr id="41" name="Rectangle 40">
             <a:extLst>
               <a:ext uri="{FF2B5EF4-FFF2-40B4-BE49-F238E27FC236}">
-                <a16:creationId xmlns:a16="http://schemas.microsoft.com/office/drawing/2014/main" id="{7ED725D5-70C0-867D-7D6A-31B38F0C5128}"/>
+                <a16:creationId xmlns:a16="http://schemas.microsoft.com/office/drawing/2014/main" id="{5ECAAAD9-0ECB-1D68-2C4F-691284C03965}"/>
               </a:ext>
               <a:ext uri="{C183D7F6-B498-43B3-948B-1728B52AA6E4}">
                 <adec:decorative xmlns:adec="http://schemas.microsoft.com/office/drawing/2017/decorative" val="1"/>
@@ -19499,6 +19723,1904 @@
           </a:p>
         </p:txBody>
       </p:sp>
+      <p:sp>
+        <p:nvSpPr>
+          <p:cNvPr id="11" name="TextBox 10">
+            <a:extLst>
+              <a:ext uri="{FF2B5EF4-FFF2-40B4-BE49-F238E27FC236}">
+                <a16:creationId xmlns:a16="http://schemas.microsoft.com/office/drawing/2014/main" id="{F90330B5-41B4-CEB6-AC5A-A5CD59827705}"/>
+              </a:ext>
+            </a:extLst>
+          </p:cNvPr>
+          <p:cNvSpPr txBox="1"/>
+          <p:nvPr/>
+        </p:nvSpPr>
+        <p:spPr>
+          <a:xfrm>
+            <a:off x="4062282" y="1190143"/>
+            <a:ext cx="3789882" cy="1067002"/>
+          </a:xfrm>
+          <a:prstGeom prst="rect">
+            <a:avLst/>
+          </a:prstGeom>
+        </p:spPr>
+        <p:txBody>
+          <a:bodyPr vert="horz" lIns="91440" tIns="45720" rIns="91440" bIns="45720" numCol="1" rtlCol="0" anchor="t">
+            <a:normAutofit/>
+          </a:bodyPr>
+          <a:lstStyle/>
+          <a:p>
+            <a:pPr marL="114300">
+              <a:spcAft>
+                <a:spcPts val="600"/>
+              </a:spcAft>
+            </a:pPr>
+            <a:r>
+              <a:rPr lang="en-US" sz="2400" b="1" dirty="0"/>
+              <a:t>Common Words</a:t>
+            </a:r>
+          </a:p>
+          <a:p>
+            <a:pPr marL="114300">
+              <a:spcAft>
+                <a:spcPts val="600"/>
+              </a:spcAft>
+            </a:pPr>
+            <a:r>
+              <a:rPr lang="en-US" sz="1600" b="1" dirty="0"/>
+              <a:t>Words that frequently show across all documents</a:t>
+            </a:r>
+          </a:p>
+        </p:txBody>
+      </p:sp>
+      <p:pic>
+        <p:nvPicPr>
+          <p:cNvPr id="3" name="Picture 2" descr="A graph of red and blue bars&#10;&#10;Description automatically generated">
+            <a:extLst>
+              <a:ext uri="{FF2B5EF4-FFF2-40B4-BE49-F238E27FC236}">
+                <a16:creationId xmlns:a16="http://schemas.microsoft.com/office/drawing/2014/main" id="{6EAC9D7B-35C8-9EC1-D1E6-8F447A8B20AF}"/>
+              </a:ext>
+            </a:extLst>
+          </p:cNvPr>
+          <p:cNvPicPr>
+            <a:picLocks noChangeAspect="1"/>
+          </p:cNvPicPr>
+          <p:nvPr/>
+        </p:nvPicPr>
+        <p:blipFill>
+          <a:blip r:embed="rId2">
+            <a:extLst>
+              <a:ext uri="{28A0092B-C50C-407E-A947-70E740481C1C}">
+                <a14:useLocalDpi xmlns:a14="http://schemas.microsoft.com/office/drawing/2010/main" val="0"/>
+              </a:ext>
+            </a:extLst>
+          </a:blip>
+          <a:srcRect b="12627"/>
+          <a:stretch/>
+        </p:blipFill>
+        <p:spPr>
+          <a:xfrm>
+            <a:off x="195060" y="2579502"/>
+            <a:ext cx="11801880" cy="3922776"/>
+          </a:xfrm>
+          <a:prstGeom prst="rect">
+            <a:avLst/>
+          </a:prstGeom>
+        </p:spPr>
+      </p:pic>
+      <p:sp>
+        <p:nvSpPr>
+          <p:cNvPr id="13" name="TextBox 12">
+            <a:extLst>
+              <a:ext uri="{FF2B5EF4-FFF2-40B4-BE49-F238E27FC236}">
+                <a16:creationId xmlns:a16="http://schemas.microsoft.com/office/drawing/2014/main" id="{C8E91F45-6ADC-AAA7-9D4D-94A72E98E333}"/>
+              </a:ext>
+            </a:extLst>
+          </p:cNvPr>
+          <p:cNvSpPr txBox="1"/>
+          <p:nvPr/>
+        </p:nvSpPr>
+        <p:spPr>
+          <a:xfrm>
+            <a:off x="8105209" y="1223507"/>
+            <a:ext cx="4044972" cy="1000274"/>
+          </a:xfrm>
+          <a:prstGeom prst="rect">
+            <a:avLst/>
+          </a:prstGeom>
+          <a:noFill/>
+        </p:spPr>
+        <p:txBody>
+          <a:bodyPr wrap="square">
+            <a:spAutoFit/>
+          </a:bodyPr>
+          <a:lstStyle/>
+          <a:p>
+            <a:pPr marL="114300">
+              <a:spcAft>
+                <a:spcPts val="600"/>
+              </a:spcAft>
+            </a:pPr>
+            <a:r>
+              <a:rPr lang="en-US" sz="1800" b="1" dirty="0" err="1"/>
+              <a:t>Stopwords</a:t>
+            </a:r>
+            <a:r>
+              <a:rPr lang="en-US" sz="1800" b="1" dirty="0"/>
+              <a:t>: </a:t>
+            </a:r>
+            <a:r>
+              <a:rPr lang="en-US" sz="1800" dirty="0"/>
+              <a:t>like, just, know, new, </a:t>
+            </a:r>
+            <a:r>
+              <a:rPr lang="en-US" sz="1800" dirty="0" err="1"/>
+              <a:t>im</a:t>
+            </a:r>
+            <a:r>
+              <a:rPr lang="en-US" sz="1800" dirty="0"/>
+              <a:t> (I’m), does</a:t>
+            </a:r>
+          </a:p>
+          <a:p>
+            <a:pPr marL="114300">
+              <a:spcAft>
+                <a:spcPts val="600"/>
+              </a:spcAft>
+            </a:pPr>
+            <a:r>
+              <a:rPr lang="en-US" sz="1800" b="1" dirty="0"/>
+              <a:t>Keywords: </a:t>
+            </a:r>
+            <a:r>
+              <a:rPr lang="en-US" sz="1800" dirty="0"/>
+              <a:t>zero, sugar, bottle</a:t>
+            </a:r>
+            <a:endParaRPr lang="en-US" sz="1800" b="1" dirty="0"/>
+          </a:p>
+        </p:txBody>
+      </p:sp>
+      <p:sp>
+        <p:nvSpPr>
+          <p:cNvPr id="14" name="Arrow: Down 13">
+            <a:extLst>
+              <a:ext uri="{FF2B5EF4-FFF2-40B4-BE49-F238E27FC236}">
+                <a16:creationId xmlns:a16="http://schemas.microsoft.com/office/drawing/2014/main" id="{A3AAD459-5819-4FED-1E95-D9B97D09280D}"/>
+              </a:ext>
+            </a:extLst>
+          </p:cNvPr>
+          <p:cNvSpPr/>
+          <p:nvPr/>
+        </p:nvSpPr>
+        <p:spPr>
+          <a:xfrm>
+            <a:off x="8517683" y="3326627"/>
+            <a:ext cx="384048" cy="732862"/>
+          </a:xfrm>
+          <a:prstGeom prst="downArrow">
+            <a:avLst/>
+          </a:prstGeom>
+          <a:solidFill>
+            <a:srgbClr val="FF4500"/>
+          </a:solidFill>
+          <a:ln>
+            <a:noFill/>
+          </a:ln>
+        </p:spPr>
+        <p:style>
+          <a:lnRef idx="2">
+            <a:schemeClr val="accent1">
+              <a:shade val="15000"/>
+            </a:schemeClr>
+          </a:lnRef>
+          <a:fillRef idx="1">
+            <a:schemeClr val="accent1"/>
+          </a:fillRef>
+          <a:effectRef idx="0">
+            <a:schemeClr val="accent1"/>
+          </a:effectRef>
+          <a:fontRef idx="minor">
+            <a:schemeClr val="lt1"/>
+          </a:fontRef>
+        </p:style>
+        <p:txBody>
+          <a:bodyPr rtlCol="0" anchor="ctr"/>
+          <a:lstStyle/>
+          <a:p>
+            <a:pPr algn="ctr"/>
+            <a:endParaRPr lang="en-AE"/>
+          </a:p>
+        </p:txBody>
+      </p:sp>
+    </p:spTree>
+    <p:extLst>
+      <p:ext uri="{BB962C8B-B14F-4D97-AF65-F5344CB8AC3E}">
+        <p14:creationId xmlns:p14="http://schemas.microsoft.com/office/powerpoint/2010/main" val="2445773093"/>
+      </p:ext>
+    </p:extLst>
+  </p:cSld>
+  <p:clrMapOvr>
+    <a:masterClrMapping/>
+  </p:clrMapOvr>
+</p:sld>
+</file>
+
+<file path=ppt/slides/slide7.xml><?xml version="1.0" encoding="utf-8"?>
+<p:sld xmlns:a="http://schemas.openxmlformats.org/drawingml/2006/main" xmlns:r="http://schemas.openxmlformats.org/officeDocument/2006/relationships" xmlns:p="http://schemas.openxmlformats.org/presentationml/2006/main">
+  <p:cSld>
+    <p:bg>
+      <p:bgPr>
+        <a:solidFill>
+          <a:schemeClr val="bg1"/>
+        </a:solidFill>
+        <a:effectLst/>
+      </p:bgPr>
+    </p:bg>
+    <p:spTree>
+      <p:nvGrpSpPr>
+        <p:cNvPr id="1" name="">
+          <a:extLst>
+            <a:ext uri="{FF2B5EF4-FFF2-40B4-BE49-F238E27FC236}">
+              <a16:creationId xmlns:a16="http://schemas.microsoft.com/office/drawing/2014/main" id="{2323CE06-CE9B-902E-18DD-35CABAEB6265}"/>
+            </a:ext>
+          </a:extLst>
+        </p:cNvPr>
+        <p:cNvGrpSpPr/>
+        <p:nvPr/>
+      </p:nvGrpSpPr>
+      <p:grpSpPr>
+        <a:xfrm>
+          <a:off x="0" y="0"/>
+          <a:ext cx="0" cy="0"/>
+          <a:chOff x="0" y="0"/>
+          <a:chExt cx="0" cy="0"/>
+        </a:xfrm>
+      </p:grpSpPr>
+      <p:sp useBgFill="1">
+        <p:nvSpPr>
+          <p:cNvPr id="29" name="Rectangle 28">
+            <a:extLst>
+              <a:ext uri="{FF2B5EF4-FFF2-40B4-BE49-F238E27FC236}">
+                <a16:creationId xmlns:a16="http://schemas.microsoft.com/office/drawing/2014/main" id="{E1CDAFE6-F2A2-FF22-0B43-DB5227ECBD57}"/>
+              </a:ext>
+              <a:ext uri="{C183D7F6-B498-43B3-948B-1728B52AA6E4}">
+                <adec:decorative xmlns:adec="http://schemas.microsoft.com/office/drawing/2017/decorative" val="1"/>
+              </a:ext>
+            </a:extLst>
+          </p:cNvPr>
+          <p:cNvSpPr>
+            <a:spLocks noGrp="1" noRot="1" noChangeAspect="1" noMove="1" noResize="1" noEditPoints="1" noAdjustHandles="1" noChangeArrowheads="1" noChangeShapeType="1" noTextEdit="1"/>
+          </p:cNvSpPr>
+          <p:nvPr>
+            <p:extLst>
+              <p:ext uri="{386F3935-93C4-4BCD-93E2-E3B085C9AB24}">
+                <p16:designElem xmlns:p16="http://schemas.microsoft.com/office/powerpoint/2015/main" val="1"/>
+              </p:ext>
+            </p:extLst>
+          </p:nvPr>
+        </p:nvSpPr>
+        <p:spPr>
+          <a:xfrm>
+            <a:off x="558209" y="0"/>
+            <a:ext cx="11167447" cy="2018806"/>
+          </a:xfrm>
+          <a:prstGeom prst="rect">
+            <a:avLst/>
+          </a:prstGeom>
+          <a:ln w="9525">
+            <a:solidFill>
+              <a:schemeClr val="tx2">
+                <a:lumMod val="10000"/>
+                <a:lumOff val="90000"/>
+              </a:schemeClr>
+            </a:solidFill>
+          </a:ln>
+          <a:effectLst>
+            <a:outerShdw blurRad="50800" dist="38100" dir="2700000" algn="tl" rotWithShape="0">
+              <a:schemeClr val="bg1">
+                <a:lumMod val="85000"/>
+                <a:alpha val="30000"/>
+              </a:schemeClr>
+            </a:outerShdw>
+          </a:effectLst>
+        </p:spPr>
+        <p:style>
+          <a:lnRef idx="2">
+            <a:schemeClr val="accent1">
+              <a:shade val="50000"/>
+            </a:schemeClr>
+          </a:lnRef>
+          <a:fillRef idx="1">
+            <a:schemeClr val="accent1"/>
+          </a:fillRef>
+          <a:effectRef idx="0">
+            <a:schemeClr val="accent1"/>
+          </a:effectRef>
+          <a:fontRef idx="minor">
+            <a:schemeClr val="lt1"/>
+          </a:fontRef>
+        </p:style>
+        <p:txBody>
+          <a:bodyPr rtlCol="0" anchor="ctr"/>
+          <a:lstStyle/>
+          <a:p>
+            <a:pPr marL="0" marR="0" lvl="0" indent="0" algn="ctr" defTabSz="914400" rtl="0" eaLnBrk="1" fontAlgn="auto" latinLnBrk="0" hangingPunct="1">
+              <a:lnSpc>
+                <a:spcPct val="100000"/>
+              </a:lnSpc>
+              <a:spcBef>
+                <a:spcPts val="0"/>
+              </a:spcBef>
+              <a:spcAft>
+                <a:spcPts val="0"/>
+              </a:spcAft>
+              <a:buClrTx/>
+              <a:buSzTx/>
+              <a:buFontTx/>
+              <a:buNone/>
+              <a:tabLst/>
+              <a:defRPr/>
+            </a:pPr>
+            <a:endParaRPr kumimoji="0" lang="en-US" sz="1800" b="0" i="0" u="none" strike="noStrike" kern="1200" cap="none" spc="0" normalizeH="0" baseline="0" noProof="0">
+              <a:ln>
+                <a:noFill/>
+              </a:ln>
+              <a:solidFill>
+                <a:prstClr val="white"/>
+              </a:solidFill>
+              <a:effectLst/>
+              <a:uLnTx/>
+              <a:uFillTx/>
+              <a:latin typeface="Calibri" panose="020F0502020204030204"/>
+              <a:ea typeface="+mn-ea"/>
+              <a:cs typeface="+mn-cs"/>
+            </a:endParaRPr>
+          </a:p>
+        </p:txBody>
+      </p:sp>
+      <p:sp useBgFill="1">
+        <p:nvSpPr>
+          <p:cNvPr id="31" name="Rectangle 30">
+            <a:extLst>
+              <a:ext uri="{FF2B5EF4-FFF2-40B4-BE49-F238E27FC236}">
+                <a16:creationId xmlns:a16="http://schemas.microsoft.com/office/drawing/2014/main" id="{CC76E3BF-5996-EFE4-4B2E-E46FFC0C7A95}"/>
+              </a:ext>
+              <a:ext uri="{C183D7F6-B498-43B3-948B-1728B52AA6E4}">
+                <adec:decorative xmlns:adec="http://schemas.microsoft.com/office/drawing/2017/decorative" val="1"/>
+              </a:ext>
+            </a:extLst>
+          </p:cNvPr>
+          <p:cNvSpPr>
+            <a:spLocks noGrp="1" noRot="1" noChangeAspect="1" noMove="1" noResize="1" noEditPoints="1" noAdjustHandles="1" noChangeArrowheads="1" noChangeShapeType="1" noTextEdit="1"/>
+          </p:cNvSpPr>
+          <p:nvPr>
+            <p:extLst>
+              <p:ext uri="{386F3935-93C4-4BCD-93E2-E3B085C9AB24}">
+                <p16:designElem xmlns:p16="http://schemas.microsoft.com/office/powerpoint/2015/main" val="1"/>
+              </p:ext>
+            </p:extLst>
+          </p:nvPr>
+        </p:nvSpPr>
+        <p:spPr>
+          <a:xfrm>
+            <a:off x="566928" y="0"/>
+            <a:ext cx="11155680" cy="2011680"/>
+          </a:xfrm>
+          <a:prstGeom prst="rect">
+            <a:avLst/>
+          </a:prstGeom>
+          <a:ln w="9525">
+            <a:noFill/>
+          </a:ln>
+          <a:effectLst/>
+        </p:spPr>
+        <p:style>
+          <a:lnRef idx="2">
+            <a:schemeClr val="accent1">
+              <a:shade val="50000"/>
+            </a:schemeClr>
+          </a:lnRef>
+          <a:fillRef idx="1">
+            <a:schemeClr val="accent1"/>
+          </a:fillRef>
+          <a:effectRef idx="0">
+            <a:schemeClr val="accent1"/>
+          </a:effectRef>
+          <a:fontRef idx="minor">
+            <a:schemeClr val="lt1"/>
+          </a:fontRef>
+        </p:style>
+        <p:txBody>
+          <a:bodyPr rtlCol="0" anchor="ctr"/>
+          <a:lstStyle/>
+          <a:p>
+            <a:pPr marL="0" marR="0" lvl="0" indent="0" algn="ctr" defTabSz="914400" rtl="0" eaLnBrk="1" fontAlgn="auto" latinLnBrk="0" hangingPunct="1">
+              <a:lnSpc>
+                <a:spcPct val="100000"/>
+              </a:lnSpc>
+              <a:spcBef>
+                <a:spcPts val="0"/>
+              </a:spcBef>
+              <a:spcAft>
+                <a:spcPts val="0"/>
+              </a:spcAft>
+              <a:buClrTx/>
+              <a:buSzTx/>
+              <a:buFontTx/>
+              <a:buNone/>
+              <a:tabLst/>
+              <a:defRPr/>
+            </a:pPr>
+            <a:endParaRPr kumimoji="0" lang="en-US" sz="1800" b="0" i="0" u="none" strike="noStrike" kern="1200" cap="none" spc="0" normalizeH="0" baseline="0" noProof="0">
+              <a:ln>
+                <a:noFill/>
+              </a:ln>
+              <a:solidFill>
+                <a:prstClr val="white"/>
+              </a:solidFill>
+              <a:effectLst/>
+              <a:uLnTx/>
+              <a:uFillTx/>
+              <a:latin typeface="Calibri" panose="020F0502020204030204"/>
+              <a:ea typeface="+mn-ea"/>
+              <a:cs typeface="+mn-cs"/>
+            </a:endParaRPr>
+          </a:p>
+        </p:txBody>
+      </p:sp>
+      <p:sp>
+        <p:nvSpPr>
+          <p:cNvPr id="33" name="Rectangle 32">
+            <a:extLst>
+              <a:ext uri="{FF2B5EF4-FFF2-40B4-BE49-F238E27FC236}">
+                <a16:creationId xmlns:a16="http://schemas.microsoft.com/office/drawing/2014/main" id="{9159142A-AAAD-6238-BB29-DE5A7BBC2D0E}"/>
+              </a:ext>
+              <a:ext uri="{C183D7F6-B498-43B3-948B-1728B52AA6E4}">
+                <adec:decorative xmlns:adec="http://schemas.microsoft.com/office/drawing/2017/decorative" val="1"/>
+              </a:ext>
+            </a:extLst>
+          </p:cNvPr>
+          <p:cNvSpPr>
+            <a:spLocks noGrp="1" noRot="1" noChangeAspect="1" noMove="1" noResize="1" noEditPoints="1" noAdjustHandles="1" noChangeArrowheads="1" noChangeShapeType="1" noTextEdit="1"/>
+          </p:cNvSpPr>
+          <p:nvPr>
+            <p:extLst>
+              <p:ext uri="{386F3935-93C4-4BCD-93E2-E3B085C9AB24}">
+                <p16:designElem xmlns:p16="http://schemas.microsoft.com/office/powerpoint/2015/main" val="1"/>
+              </p:ext>
+            </p:extLst>
+          </p:nvPr>
+        </p:nvSpPr>
+        <p:spPr>
+          <a:xfrm>
+            <a:off x="498834" y="787352"/>
+            <a:ext cx="128016" cy="704088"/>
+          </a:xfrm>
+          <a:prstGeom prst="rect">
+            <a:avLst/>
+          </a:prstGeom>
+          <a:solidFill>
+            <a:schemeClr val="accent1"/>
+          </a:solidFill>
+          <a:ln>
+            <a:noFill/>
+          </a:ln>
+        </p:spPr>
+        <p:style>
+          <a:lnRef idx="2">
+            <a:schemeClr val="accent1">
+              <a:shade val="50000"/>
+            </a:schemeClr>
+          </a:lnRef>
+          <a:fillRef idx="1">
+            <a:schemeClr val="accent1"/>
+          </a:fillRef>
+          <a:effectRef idx="0">
+            <a:schemeClr val="accent1"/>
+          </a:effectRef>
+          <a:fontRef idx="minor">
+            <a:schemeClr val="lt1"/>
+          </a:fontRef>
+        </p:style>
+        <p:txBody>
+          <a:bodyPr rtlCol="0" anchor="ctr"/>
+          <a:lstStyle/>
+          <a:p>
+            <a:pPr marL="0" marR="0" lvl="0" indent="0" algn="ctr" defTabSz="914400" rtl="0" eaLnBrk="1" fontAlgn="auto" latinLnBrk="0" hangingPunct="1">
+              <a:lnSpc>
+                <a:spcPct val="100000"/>
+              </a:lnSpc>
+              <a:spcBef>
+                <a:spcPts val="0"/>
+              </a:spcBef>
+              <a:spcAft>
+                <a:spcPts val="0"/>
+              </a:spcAft>
+              <a:buClrTx/>
+              <a:buSzTx/>
+              <a:buFontTx/>
+              <a:buNone/>
+              <a:tabLst/>
+              <a:defRPr/>
+            </a:pPr>
+            <a:endParaRPr kumimoji="0" lang="en-US" sz="1800" b="0" i="0" u="none" strike="noStrike" kern="1200" cap="none" spc="0" normalizeH="0" baseline="0" noProof="0">
+              <a:ln>
+                <a:noFill/>
+              </a:ln>
+              <a:solidFill>
+                <a:prstClr val="white"/>
+              </a:solidFill>
+              <a:effectLst/>
+              <a:uLnTx/>
+              <a:uFillTx/>
+              <a:latin typeface="Calibri" panose="020F0502020204030204"/>
+              <a:ea typeface="+mn-ea"/>
+              <a:cs typeface="+mn-cs"/>
+            </a:endParaRPr>
+          </a:p>
+        </p:txBody>
+      </p:sp>
+      <p:sp useBgFill="1">
+        <p:nvSpPr>
+          <p:cNvPr id="35" name="Rectangle 34">
+            <a:extLst>
+              <a:ext uri="{FF2B5EF4-FFF2-40B4-BE49-F238E27FC236}">
+                <a16:creationId xmlns:a16="http://schemas.microsoft.com/office/drawing/2014/main" id="{3E38FD63-6CE5-92EE-D38A-DD73609AA656}"/>
+              </a:ext>
+              <a:ext uri="{C183D7F6-B498-43B3-948B-1728B52AA6E4}">
+                <adec:decorative xmlns:adec="http://schemas.microsoft.com/office/drawing/2017/decorative" val="1"/>
+              </a:ext>
+            </a:extLst>
+          </p:cNvPr>
+          <p:cNvSpPr>
+            <a:spLocks noGrp="1" noRot="1" noChangeAspect="1" noMove="1" noResize="1" noEditPoints="1" noAdjustHandles="1" noChangeArrowheads="1" noChangeShapeType="1" noTextEdit="1"/>
+          </p:cNvSpPr>
+          <p:nvPr>
+            <p:extLst>
+              <p:ext uri="{386F3935-93C4-4BCD-93E2-E3B085C9AB24}">
+                <p16:designElem xmlns:p16="http://schemas.microsoft.com/office/powerpoint/2015/main" val="1"/>
+              </p:ext>
+            </p:extLst>
+          </p:nvPr>
+        </p:nvSpPr>
+        <p:spPr>
+          <a:xfrm>
+            <a:off x="0" y="0"/>
+            <a:ext cx="12192000" cy="6858000"/>
+          </a:xfrm>
+          <a:prstGeom prst="rect">
+            <a:avLst/>
+          </a:prstGeom>
+          <a:ln>
+            <a:noFill/>
+          </a:ln>
+        </p:spPr>
+        <p:style>
+          <a:lnRef idx="2">
+            <a:schemeClr val="accent1">
+              <a:shade val="50000"/>
+            </a:schemeClr>
+          </a:lnRef>
+          <a:fillRef idx="1">
+            <a:schemeClr val="accent1"/>
+          </a:fillRef>
+          <a:effectRef idx="0">
+            <a:schemeClr val="accent1"/>
+          </a:effectRef>
+          <a:fontRef idx="minor">
+            <a:schemeClr val="lt1"/>
+          </a:fontRef>
+        </p:style>
+        <p:txBody>
+          <a:bodyPr rtlCol="0" anchor="ctr"/>
+          <a:lstStyle/>
+          <a:p>
+            <a:pPr algn="ctr"/>
+            <a:endParaRPr lang="en-US"/>
+          </a:p>
+        </p:txBody>
+      </p:sp>
+      <p:sp>
+        <p:nvSpPr>
+          <p:cNvPr id="37" name="Rectangle 36">
+            <a:extLst>
+              <a:ext uri="{FF2B5EF4-FFF2-40B4-BE49-F238E27FC236}">
+                <a16:creationId xmlns:a16="http://schemas.microsoft.com/office/drawing/2014/main" id="{908D8BBC-5A13-F76B-C40B-42ACCBF568E5}"/>
+              </a:ext>
+              <a:ext uri="{C183D7F6-B498-43B3-948B-1728B52AA6E4}">
+                <adec:decorative xmlns:adec="http://schemas.microsoft.com/office/drawing/2017/decorative" val="1"/>
+              </a:ext>
+            </a:extLst>
+          </p:cNvPr>
+          <p:cNvSpPr>
+            <a:spLocks noGrp="1" noRot="1" noChangeAspect="1" noMove="1" noResize="1" noEditPoints="1" noAdjustHandles="1" noChangeArrowheads="1" noChangeShapeType="1" noTextEdit="1"/>
+          </p:cNvSpPr>
+          <p:nvPr>
+            <p:extLst>
+              <p:ext uri="{386F3935-93C4-4BCD-93E2-E3B085C9AB24}">
+                <p16:designElem xmlns:p16="http://schemas.microsoft.com/office/powerpoint/2015/main" val="1"/>
+              </p:ext>
+            </p:extLst>
+          </p:nvPr>
+        </p:nvSpPr>
+        <p:spPr>
+          <a:xfrm>
+            <a:off x="2" y="0"/>
+            <a:ext cx="9756601" cy="6858000"/>
+          </a:xfrm>
+          <a:prstGeom prst="rect">
+            <a:avLst/>
+          </a:prstGeom>
+          <a:gradFill>
+            <a:gsLst>
+              <a:gs pos="58000">
+                <a:schemeClr val="bg1"/>
+              </a:gs>
+              <a:gs pos="35000">
+                <a:schemeClr val="bg1">
+                  <a:alpha val="78000"/>
+                </a:schemeClr>
+              </a:gs>
+              <a:gs pos="19000">
+                <a:schemeClr val="bg1">
+                  <a:alpha val="38000"/>
+                </a:schemeClr>
+              </a:gs>
+              <a:gs pos="0">
+                <a:schemeClr val="bg1">
+                  <a:alpha val="0"/>
+                </a:schemeClr>
+              </a:gs>
+              <a:gs pos="100000">
+                <a:schemeClr val="bg1"/>
+              </a:gs>
+            </a:gsLst>
+            <a:lin ang="10800000" scaled="0"/>
+          </a:gradFill>
+          <a:ln>
+            <a:noFill/>
+          </a:ln>
+        </p:spPr>
+        <p:style>
+          <a:lnRef idx="2">
+            <a:schemeClr val="accent1">
+              <a:shade val="50000"/>
+            </a:schemeClr>
+          </a:lnRef>
+          <a:fillRef idx="1">
+            <a:schemeClr val="accent1"/>
+          </a:fillRef>
+          <a:effectRef idx="0">
+            <a:schemeClr val="accent1"/>
+          </a:effectRef>
+          <a:fontRef idx="minor">
+            <a:schemeClr val="lt1"/>
+          </a:fontRef>
+        </p:style>
+        <p:txBody>
+          <a:bodyPr rtlCol="0" anchor="ctr"/>
+          <a:lstStyle/>
+          <a:p>
+            <a:pPr algn="ctr"/>
+            <a:endParaRPr lang="en-US" dirty="0"/>
+          </a:p>
+        </p:txBody>
+      </p:sp>
+      <p:sp>
+        <p:nvSpPr>
+          <p:cNvPr id="24" name="TextBox 23">
+            <a:extLst>
+              <a:ext uri="{FF2B5EF4-FFF2-40B4-BE49-F238E27FC236}">
+                <a16:creationId xmlns:a16="http://schemas.microsoft.com/office/drawing/2014/main" id="{251C9BCE-875E-922F-077B-78271202C5F6}"/>
+              </a:ext>
+            </a:extLst>
+          </p:cNvPr>
+          <p:cNvSpPr txBox="1"/>
+          <p:nvPr/>
+        </p:nvSpPr>
+        <p:spPr>
+          <a:xfrm>
+            <a:off x="371094" y="1161288"/>
+            <a:ext cx="3438144" cy="1124712"/>
+          </a:xfrm>
+          <a:prstGeom prst="rect">
+            <a:avLst/>
+          </a:prstGeom>
+        </p:spPr>
+        <p:txBody>
+          <a:bodyPr vert="horz" lIns="91440" tIns="45720" rIns="91440" bIns="45720" rtlCol="0" anchor="b">
+            <a:normAutofit lnSpcReduction="10000"/>
+          </a:bodyPr>
+          <a:lstStyle/>
+          <a:p>
+            <a:pPr>
+              <a:lnSpc>
+                <a:spcPct val="90000"/>
+              </a:lnSpc>
+              <a:spcBef>
+                <a:spcPct val="0"/>
+              </a:spcBef>
+              <a:spcAft>
+                <a:spcPts val="600"/>
+              </a:spcAft>
+            </a:pPr>
+            <a:r>
+              <a:rPr lang="en-GB" sz="4000" b="1" i="0" dirty="0">
+                <a:ln>
+                  <a:solidFill>
+                    <a:schemeClr val="bg1"/>
+                  </a:solidFill>
+                </a:ln>
+                <a:solidFill>
+                  <a:srgbClr val="134A84"/>
+                </a:solidFill>
+                <a:effectLst/>
+                <a:latin typeface="system-ui"/>
+              </a:rPr>
+              <a:t>Exploratory</a:t>
+            </a:r>
+            <a:r>
+              <a:rPr lang="en-GB" sz="4000" b="1" dirty="0">
+                <a:ln>
+                  <a:solidFill>
+                    <a:schemeClr val="bg1"/>
+                  </a:solidFill>
+                </a:ln>
+                <a:solidFill>
+                  <a:schemeClr val="bg1"/>
+                </a:solidFill>
+                <a:latin typeface="system-ui"/>
+              </a:rPr>
+              <a:t> </a:t>
+            </a:r>
+            <a:r>
+              <a:rPr lang="en-GB" sz="4000" b="1" i="0" dirty="0">
+                <a:ln>
+                  <a:solidFill>
+                    <a:schemeClr val="bg1"/>
+                  </a:solidFill>
+                </a:ln>
+                <a:solidFill>
+                  <a:srgbClr val="D71F25"/>
+                </a:solidFill>
+                <a:effectLst/>
+                <a:latin typeface="system-ui"/>
+              </a:rPr>
+              <a:t>Data Analysis</a:t>
+            </a:r>
+            <a:endParaRPr lang="en-US" sz="4000" b="1" dirty="0">
+              <a:solidFill>
+                <a:srgbClr val="D71F25"/>
+              </a:solidFill>
+              <a:latin typeface="+mj-lt"/>
+              <a:ea typeface="+mj-ea"/>
+              <a:cs typeface="+mj-cs"/>
+            </a:endParaRPr>
+          </a:p>
+        </p:txBody>
+      </p:sp>
+      <p:sp>
+        <p:nvSpPr>
+          <p:cNvPr id="39" name="Rectangle 38">
+            <a:extLst>
+              <a:ext uri="{FF2B5EF4-FFF2-40B4-BE49-F238E27FC236}">
+                <a16:creationId xmlns:a16="http://schemas.microsoft.com/office/drawing/2014/main" id="{4F7838D1-18B1-3997-5FD0-CDDE7FDC6967}"/>
+              </a:ext>
+              <a:ext uri="{C183D7F6-B498-43B3-948B-1728B52AA6E4}">
+                <adec:decorative xmlns:adec="http://schemas.microsoft.com/office/drawing/2017/decorative" val="1"/>
+              </a:ext>
+            </a:extLst>
+          </p:cNvPr>
+          <p:cNvSpPr>
+            <a:spLocks noGrp="1" noRot="1" noChangeAspect="1" noMove="1" noResize="1" noEditPoints="1" noAdjustHandles="1" noChangeArrowheads="1" noChangeShapeType="1" noTextEdit="1"/>
+          </p:cNvSpPr>
+          <p:nvPr>
+            <p:extLst>
+              <p:ext uri="{386F3935-93C4-4BCD-93E2-E3B085C9AB24}">
+                <p16:designElem xmlns:p16="http://schemas.microsoft.com/office/powerpoint/2015/main" val="1"/>
+              </p:ext>
+            </p:extLst>
+          </p:nvPr>
+        </p:nvSpPr>
+        <p:spPr>
+          <a:xfrm rot="5400000">
+            <a:off x="662559" y="605790"/>
+            <a:ext cx="73152" cy="548640"/>
+          </a:xfrm>
+          <a:prstGeom prst="rect">
+            <a:avLst/>
+          </a:prstGeom>
+          <a:solidFill>
+            <a:schemeClr val="accent1"/>
+          </a:solidFill>
+          <a:ln>
+            <a:noFill/>
+          </a:ln>
+        </p:spPr>
+        <p:style>
+          <a:lnRef idx="2">
+            <a:schemeClr val="accent1">
+              <a:shade val="50000"/>
+            </a:schemeClr>
+          </a:lnRef>
+          <a:fillRef idx="1">
+            <a:schemeClr val="accent1"/>
+          </a:fillRef>
+          <a:effectRef idx="0">
+            <a:schemeClr val="accent1"/>
+          </a:effectRef>
+          <a:fontRef idx="minor">
+            <a:schemeClr val="lt1"/>
+          </a:fontRef>
+        </p:style>
+        <p:txBody>
+          <a:bodyPr rtlCol="0" anchor="ctr"/>
+          <a:lstStyle/>
+          <a:p>
+            <a:pPr marL="0" marR="0" lvl="0" indent="0" algn="ctr" defTabSz="914400" rtl="0" eaLnBrk="1" fontAlgn="auto" latinLnBrk="0" hangingPunct="1">
+              <a:lnSpc>
+                <a:spcPct val="100000"/>
+              </a:lnSpc>
+              <a:spcBef>
+                <a:spcPts val="0"/>
+              </a:spcBef>
+              <a:spcAft>
+                <a:spcPts val="0"/>
+              </a:spcAft>
+              <a:buClrTx/>
+              <a:buSzTx/>
+              <a:buFontTx/>
+              <a:buNone/>
+              <a:tabLst/>
+              <a:defRPr/>
+            </a:pPr>
+            <a:endParaRPr kumimoji="0" lang="en-US" sz="1800" b="0" i="0" u="none" strike="noStrike" kern="1200" cap="none" spc="0" normalizeH="0" baseline="0" noProof="0">
+              <a:ln>
+                <a:noFill/>
+              </a:ln>
+              <a:solidFill>
+                <a:prstClr val="white"/>
+              </a:solidFill>
+              <a:effectLst/>
+              <a:uLnTx/>
+              <a:uFillTx/>
+              <a:latin typeface="Calibri" panose="020F0502020204030204"/>
+              <a:ea typeface="+mn-ea"/>
+              <a:cs typeface="+mn-cs"/>
+            </a:endParaRPr>
+          </a:p>
+        </p:txBody>
+      </p:sp>
+      <p:sp>
+        <p:nvSpPr>
+          <p:cNvPr id="41" name="Rectangle 40">
+            <a:extLst>
+              <a:ext uri="{FF2B5EF4-FFF2-40B4-BE49-F238E27FC236}">
+                <a16:creationId xmlns:a16="http://schemas.microsoft.com/office/drawing/2014/main" id="{A5BA996F-04A1-EFE1-AAB3-E2FBA4C840A4}"/>
+              </a:ext>
+              <a:ext uri="{C183D7F6-B498-43B3-948B-1728B52AA6E4}">
+                <adec:decorative xmlns:adec="http://schemas.microsoft.com/office/drawing/2017/decorative" val="1"/>
+              </a:ext>
+            </a:extLst>
+          </p:cNvPr>
+          <p:cNvSpPr>
+            <a:spLocks noGrp="1" noRot="1" noChangeAspect="1" noMove="1" noResize="1" noEditPoints="1" noAdjustHandles="1" noChangeArrowheads="1" noChangeShapeType="1" noTextEdit="1"/>
+          </p:cNvSpPr>
+          <p:nvPr>
+            <p:extLst>
+              <p:ext uri="{386F3935-93C4-4BCD-93E2-E3B085C9AB24}">
+                <p16:designElem xmlns:p16="http://schemas.microsoft.com/office/powerpoint/2015/main" val="1"/>
+              </p:ext>
+            </p:extLst>
+          </p:nvPr>
+        </p:nvSpPr>
+        <p:spPr>
+          <a:xfrm>
+            <a:off x="428244" y="2443480"/>
+            <a:ext cx="3300984" cy="9144"/>
+          </a:xfrm>
+          <a:prstGeom prst="rect">
+            <a:avLst/>
+          </a:prstGeom>
+          <a:solidFill>
+            <a:schemeClr val="tx2">
+              <a:lumMod val="25000"/>
+              <a:lumOff val="75000"/>
+            </a:schemeClr>
+          </a:solidFill>
+          <a:ln w="3175">
+            <a:solidFill>
+              <a:schemeClr val="tx2">
+                <a:lumMod val="25000"/>
+                <a:lumOff val="75000"/>
+              </a:schemeClr>
+            </a:solidFill>
+          </a:ln>
+          <a:effectLst/>
+        </p:spPr>
+        <p:style>
+          <a:lnRef idx="2">
+            <a:schemeClr val="accent1">
+              <a:shade val="50000"/>
+            </a:schemeClr>
+          </a:lnRef>
+          <a:fillRef idx="1">
+            <a:schemeClr val="accent1"/>
+          </a:fillRef>
+          <a:effectRef idx="0">
+            <a:schemeClr val="accent1"/>
+          </a:effectRef>
+          <a:fontRef idx="minor">
+            <a:schemeClr val="lt1"/>
+          </a:fontRef>
+        </p:style>
+        <p:txBody>
+          <a:bodyPr rtlCol="0" anchor="ctr"/>
+          <a:lstStyle/>
+          <a:p>
+            <a:pPr marL="0" marR="0" lvl="0" indent="0" algn="ctr" defTabSz="914400" rtl="0" eaLnBrk="1" fontAlgn="auto" latinLnBrk="0" hangingPunct="1">
+              <a:lnSpc>
+                <a:spcPct val="100000"/>
+              </a:lnSpc>
+              <a:spcBef>
+                <a:spcPts val="0"/>
+              </a:spcBef>
+              <a:spcAft>
+                <a:spcPts val="0"/>
+              </a:spcAft>
+              <a:buClrTx/>
+              <a:buSzTx/>
+              <a:buFontTx/>
+              <a:buNone/>
+              <a:tabLst/>
+              <a:defRPr/>
+            </a:pPr>
+            <a:endParaRPr kumimoji="0" lang="en-US" sz="1800" b="0" i="0" u="none" strike="noStrike" kern="1200" cap="none" spc="0" normalizeH="0" baseline="0" noProof="0">
+              <a:ln>
+                <a:noFill/>
+              </a:ln>
+              <a:solidFill>
+                <a:prstClr val="white"/>
+              </a:solidFill>
+              <a:effectLst/>
+              <a:uLnTx/>
+              <a:uFillTx/>
+              <a:latin typeface="Calibri" panose="020F0502020204030204"/>
+              <a:ea typeface="+mn-ea"/>
+              <a:cs typeface="+mn-cs"/>
+            </a:endParaRPr>
+          </a:p>
+        </p:txBody>
+      </p:sp>
+      <p:pic>
+        <p:nvPicPr>
+          <p:cNvPr id="2" name="Picture 1" descr="A graph of red and blue bars&#10;&#10;Description automatically generated">
+            <a:extLst>
+              <a:ext uri="{FF2B5EF4-FFF2-40B4-BE49-F238E27FC236}">
+                <a16:creationId xmlns:a16="http://schemas.microsoft.com/office/drawing/2014/main" id="{18E2AE6D-5DB4-FBBC-9F3F-3249C7A1D03D}"/>
+              </a:ext>
+            </a:extLst>
+          </p:cNvPr>
+          <p:cNvPicPr>
+            <a:picLocks noChangeAspect="1"/>
+          </p:cNvPicPr>
+          <p:nvPr/>
+        </p:nvPicPr>
+        <p:blipFill>
+          <a:blip r:embed="rId2">
+            <a:extLst>
+              <a:ext uri="{28A0092B-C50C-407E-A947-70E740481C1C}">
+                <a14:useLocalDpi xmlns:a14="http://schemas.microsoft.com/office/drawing/2010/main" val="0"/>
+              </a:ext>
+            </a:extLst>
+          </a:blip>
+          <a:srcRect t="-814" b="5397"/>
+          <a:stretch/>
+        </p:blipFill>
+        <p:spPr>
+          <a:xfrm>
+            <a:off x="195060" y="2574027"/>
+            <a:ext cx="11801880" cy="4283973"/>
+          </a:xfrm>
+          <a:prstGeom prst="rect">
+            <a:avLst/>
+          </a:prstGeom>
+        </p:spPr>
+      </p:pic>
+      <p:sp>
+        <p:nvSpPr>
+          <p:cNvPr id="4" name="TextBox 3">
+            <a:extLst>
+              <a:ext uri="{FF2B5EF4-FFF2-40B4-BE49-F238E27FC236}">
+                <a16:creationId xmlns:a16="http://schemas.microsoft.com/office/drawing/2014/main" id="{9C09B7D4-978B-3561-DAC9-73C07EBFEE49}"/>
+              </a:ext>
+            </a:extLst>
+          </p:cNvPr>
+          <p:cNvSpPr txBox="1"/>
+          <p:nvPr/>
+        </p:nvSpPr>
+        <p:spPr>
+          <a:xfrm>
+            <a:off x="4062282" y="1190143"/>
+            <a:ext cx="3789882" cy="1067002"/>
+          </a:xfrm>
+          <a:prstGeom prst="rect">
+            <a:avLst/>
+          </a:prstGeom>
+        </p:spPr>
+        <p:txBody>
+          <a:bodyPr vert="horz" lIns="91440" tIns="45720" rIns="91440" bIns="45720" numCol="1" rtlCol="0" anchor="t">
+            <a:normAutofit/>
+          </a:bodyPr>
+          <a:lstStyle/>
+          <a:p>
+            <a:pPr marL="114300">
+              <a:spcAft>
+                <a:spcPts val="600"/>
+              </a:spcAft>
+            </a:pPr>
+            <a:r>
+              <a:rPr lang="en-US" sz="2400" b="1" dirty="0"/>
+              <a:t>Exclusive Words</a:t>
+            </a:r>
+          </a:p>
+          <a:p>
+            <a:pPr marL="114300">
+              <a:spcAft>
+                <a:spcPts val="600"/>
+              </a:spcAft>
+            </a:pPr>
+            <a:r>
+              <a:rPr lang="en-US" sz="1600" b="1" dirty="0"/>
+              <a:t>Words that mostly show either in </a:t>
+            </a:r>
+            <a:r>
+              <a:rPr lang="en-US" sz="1600" b="1" dirty="0">
+                <a:solidFill>
+                  <a:srgbClr val="134A84"/>
+                </a:solidFill>
+              </a:rPr>
+              <a:t>Pepsi</a:t>
+            </a:r>
+            <a:r>
+              <a:rPr lang="en-US" sz="1600" b="1" dirty="0"/>
+              <a:t> or </a:t>
+            </a:r>
+            <a:r>
+              <a:rPr lang="en-US" sz="1600" b="1" dirty="0">
+                <a:solidFill>
+                  <a:srgbClr val="F40009"/>
+                </a:solidFill>
+              </a:rPr>
+              <a:t>Coca-Cola</a:t>
+            </a:r>
+          </a:p>
+        </p:txBody>
+      </p:sp>
+      <p:sp>
+        <p:nvSpPr>
+          <p:cNvPr id="5" name="TextBox 4">
+            <a:extLst>
+              <a:ext uri="{FF2B5EF4-FFF2-40B4-BE49-F238E27FC236}">
+                <a16:creationId xmlns:a16="http://schemas.microsoft.com/office/drawing/2014/main" id="{39166528-FA06-3588-E3EF-70AE58315C9D}"/>
+              </a:ext>
+            </a:extLst>
+          </p:cNvPr>
+          <p:cNvSpPr txBox="1"/>
+          <p:nvPr/>
+        </p:nvSpPr>
+        <p:spPr>
+          <a:xfrm>
+            <a:off x="7852164" y="1429604"/>
+            <a:ext cx="3789882" cy="827541"/>
+          </a:xfrm>
+          <a:prstGeom prst="rect">
+            <a:avLst/>
+          </a:prstGeom>
+        </p:spPr>
+        <p:txBody>
+          <a:bodyPr vert="horz" lIns="91440" tIns="45720" rIns="91440" bIns="45720" numCol="1" rtlCol="0" anchor="t">
+            <a:normAutofit/>
+          </a:bodyPr>
+          <a:lstStyle/>
+          <a:p>
+            <a:pPr marL="114300">
+              <a:spcAft>
+                <a:spcPts val="600"/>
+              </a:spcAft>
+            </a:pPr>
+            <a:r>
+              <a:rPr lang="en-US" sz="1600" b="1" dirty="0"/>
+              <a:t>Find the difference in the count of occurrences between </a:t>
+            </a:r>
+            <a:r>
+              <a:rPr lang="en-US" sz="1600" b="1" dirty="0">
+                <a:solidFill>
+                  <a:srgbClr val="134A84"/>
+                </a:solidFill>
+              </a:rPr>
+              <a:t>Pepsi</a:t>
+            </a:r>
+            <a:r>
+              <a:rPr lang="en-US" sz="1600" b="1" dirty="0"/>
+              <a:t> and </a:t>
+            </a:r>
+            <a:r>
+              <a:rPr lang="en-US" sz="1600" b="1" dirty="0">
+                <a:solidFill>
+                  <a:srgbClr val="F40009"/>
+                </a:solidFill>
+              </a:rPr>
+              <a:t>Coca-Cola</a:t>
+            </a:r>
+            <a:endParaRPr lang="en-US" sz="1100" b="1" dirty="0">
+              <a:solidFill>
+                <a:srgbClr val="F40009"/>
+              </a:solidFill>
+            </a:endParaRPr>
+          </a:p>
+        </p:txBody>
+      </p:sp>
+    </p:spTree>
+    <p:extLst>
+      <p:ext uri="{BB962C8B-B14F-4D97-AF65-F5344CB8AC3E}">
+        <p14:creationId xmlns:p14="http://schemas.microsoft.com/office/powerpoint/2010/main" val="2009258326"/>
+      </p:ext>
+    </p:extLst>
+  </p:cSld>
+  <p:clrMapOvr>
+    <a:masterClrMapping/>
+  </p:clrMapOvr>
+</p:sld>
+</file>
+
+<file path=ppt/slides/slide8.xml><?xml version="1.0" encoding="utf-8"?>
+<p:sld xmlns:a="http://schemas.openxmlformats.org/drawingml/2006/main" xmlns:r="http://schemas.openxmlformats.org/officeDocument/2006/relationships" xmlns:p="http://schemas.openxmlformats.org/presentationml/2006/main">
+  <p:cSld>
+    <p:bg>
+      <p:bgPr>
+        <a:solidFill>
+          <a:schemeClr val="bg1"/>
+        </a:solidFill>
+        <a:effectLst/>
+      </p:bgPr>
+    </p:bg>
+    <p:spTree>
+      <p:nvGrpSpPr>
+        <p:cNvPr id="1" name="">
+          <a:extLst>
+            <a:ext uri="{FF2B5EF4-FFF2-40B4-BE49-F238E27FC236}">
+              <a16:creationId xmlns:a16="http://schemas.microsoft.com/office/drawing/2014/main" id="{F1AC326A-5380-4B2F-A366-BEF46B4912D5}"/>
+            </a:ext>
+          </a:extLst>
+        </p:cNvPr>
+        <p:cNvGrpSpPr/>
+        <p:nvPr/>
+      </p:nvGrpSpPr>
+      <p:grpSpPr>
+        <a:xfrm>
+          <a:off x="0" y="0"/>
+          <a:ext cx="0" cy="0"/>
+          <a:chOff x="0" y="0"/>
+          <a:chExt cx="0" cy="0"/>
+        </a:xfrm>
+      </p:grpSpPr>
+      <p:sp useBgFill="1">
+        <p:nvSpPr>
+          <p:cNvPr id="29" name="Rectangle 28">
+            <a:extLst>
+              <a:ext uri="{FF2B5EF4-FFF2-40B4-BE49-F238E27FC236}">
+                <a16:creationId xmlns:a16="http://schemas.microsoft.com/office/drawing/2014/main" id="{D9A00EEF-6498-6EA6-9851-3EA3F237A40C}"/>
+              </a:ext>
+              <a:ext uri="{C183D7F6-B498-43B3-948B-1728B52AA6E4}">
+                <adec:decorative xmlns:adec="http://schemas.microsoft.com/office/drawing/2017/decorative" val="1"/>
+              </a:ext>
+            </a:extLst>
+          </p:cNvPr>
+          <p:cNvSpPr>
+            <a:spLocks noGrp="1" noRot="1" noChangeAspect="1" noMove="1" noResize="1" noEditPoints="1" noAdjustHandles="1" noChangeArrowheads="1" noChangeShapeType="1" noTextEdit="1"/>
+          </p:cNvSpPr>
+          <p:nvPr>
+            <p:extLst>
+              <p:ext uri="{386F3935-93C4-4BCD-93E2-E3B085C9AB24}">
+                <p16:designElem xmlns:p16="http://schemas.microsoft.com/office/powerpoint/2015/main" val="1"/>
+              </p:ext>
+            </p:extLst>
+          </p:nvPr>
+        </p:nvSpPr>
+        <p:spPr>
+          <a:xfrm>
+            <a:off x="558209" y="0"/>
+            <a:ext cx="11167447" cy="2018806"/>
+          </a:xfrm>
+          <a:prstGeom prst="rect">
+            <a:avLst/>
+          </a:prstGeom>
+          <a:ln w="9525">
+            <a:solidFill>
+              <a:schemeClr val="tx2">
+                <a:lumMod val="10000"/>
+                <a:lumOff val="90000"/>
+              </a:schemeClr>
+            </a:solidFill>
+          </a:ln>
+          <a:effectLst>
+            <a:outerShdw blurRad="50800" dist="38100" dir="2700000" algn="tl" rotWithShape="0">
+              <a:schemeClr val="bg1">
+                <a:lumMod val="85000"/>
+                <a:alpha val="30000"/>
+              </a:schemeClr>
+            </a:outerShdw>
+          </a:effectLst>
+        </p:spPr>
+        <p:style>
+          <a:lnRef idx="2">
+            <a:schemeClr val="accent1">
+              <a:shade val="50000"/>
+            </a:schemeClr>
+          </a:lnRef>
+          <a:fillRef idx="1">
+            <a:schemeClr val="accent1"/>
+          </a:fillRef>
+          <a:effectRef idx="0">
+            <a:schemeClr val="accent1"/>
+          </a:effectRef>
+          <a:fontRef idx="minor">
+            <a:schemeClr val="lt1"/>
+          </a:fontRef>
+        </p:style>
+        <p:txBody>
+          <a:bodyPr rtlCol="0" anchor="ctr"/>
+          <a:lstStyle/>
+          <a:p>
+            <a:pPr marL="0" marR="0" lvl="0" indent="0" algn="ctr" defTabSz="914400" rtl="0" eaLnBrk="1" fontAlgn="auto" latinLnBrk="0" hangingPunct="1">
+              <a:lnSpc>
+                <a:spcPct val="100000"/>
+              </a:lnSpc>
+              <a:spcBef>
+                <a:spcPts val="0"/>
+              </a:spcBef>
+              <a:spcAft>
+                <a:spcPts val="0"/>
+              </a:spcAft>
+              <a:buClrTx/>
+              <a:buSzTx/>
+              <a:buFontTx/>
+              <a:buNone/>
+              <a:tabLst/>
+              <a:defRPr/>
+            </a:pPr>
+            <a:endParaRPr kumimoji="0" lang="en-US" sz="1800" b="0" i="0" u="none" strike="noStrike" kern="1200" cap="none" spc="0" normalizeH="0" baseline="0" noProof="0">
+              <a:ln>
+                <a:noFill/>
+              </a:ln>
+              <a:solidFill>
+                <a:prstClr val="white"/>
+              </a:solidFill>
+              <a:effectLst/>
+              <a:uLnTx/>
+              <a:uFillTx/>
+              <a:latin typeface="Calibri" panose="020F0502020204030204"/>
+              <a:ea typeface="+mn-ea"/>
+              <a:cs typeface="+mn-cs"/>
+            </a:endParaRPr>
+          </a:p>
+        </p:txBody>
+      </p:sp>
+      <p:sp useBgFill="1">
+        <p:nvSpPr>
+          <p:cNvPr id="31" name="Rectangle 30">
+            <a:extLst>
+              <a:ext uri="{FF2B5EF4-FFF2-40B4-BE49-F238E27FC236}">
+                <a16:creationId xmlns:a16="http://schemas.microsoft.com/office/drawing/2014/main" id="{1DB8FAC0-D288-84AE-831C-A53FE50E7C9F}"/>
+              </a:ext>
+              <a:ext uri="{C183D7F6-B498-43B3-948B-1728B52AA6E4}">
+                <adec:decorative xmlns:adec="http://schemas.microsoft.com/office/drawing/2017/decorative" val="1"/>
+              </a:ext>
+            </a:extLst>
+          </p:cNvPr>
+          <p:cNvSpPr>
+            <a:spLocks noGrp="1" noRot="1" noChangeAspect="1" noMove="1" noResize="1" noEditPoints="1" noAdjustHandles="1" noChangeArrowheads="1" noChangeShapeType="1" noTextEdit="1"/>
+          </p:cNvSpPr>
+          <p:nvPr>
+            <p:extLst>
+              <p:ext uri="{386F3935-93C4-4BCD-93E2-E3B085C9AB24}">
+                <p16:designElem xmlns:p16="http://schemas.microsoft.com/office/powerpoint/2015/main" val="1"/>
+              </p:ext>
+            </p:extLst>
+          </p:nvPr>
+        </p:nvSpPr>
+        <p:spPr>
+          <a:xfrm>
+            <a:off x="566928" y="0"/>
+            <a:ext cx="11155680" cy="2011680"/>
+          </a:xfrm>
+          <a:prstGeom prst="rect">
+            <a:avLst/>
+          </a:prstGeom>
+          <a:ln w="9525">
+            <a:noFill/>
+          </a:ln>
+          <a:effectLst/>
+        </p:spPr>
+        <p:style>
+          <a:lnRef idx="2">
+            <a:schemeClr val="accent1">
+              <a:shade val="50000"/>
+            </a:schemeClr>
+          </a:lnRef>
+          <a:fillRef idx="1">
+            <a:schemeClr val="accent1"/>
+          </a:fillRef>
+          <a:effectRef idx="0">
+            <a:schemeClr val="accent1"/>
+          </a:effectRef>
+          <a:fontRef idx="minor">
+            <a:schemeClr val="lt1"/>
+          </a:fontRef>
+        </p:style>
+        <p:txBody>
+          <a:bodyPr rtlCol="0" anchor="ctr"/>
+          <a:lstStyle/>
+          <a:p>
+            <a:pPr marL="0" marR="0" lvl="0" indent="0" algn="ctr" defTabSz="914400" rtl="0" eaLnBrk="1" fontAlgn="auto" latinLnBrk="0" hangingPunct="1">
+              <a:lnSpc>
+                <a:spcPct val="100000"/>
+              </a:lnSpc>
+              <a:spcBef>
+                <a:spcPts val="0"/>
+              </a:spcBef>
+              <a:spcAft>
+                <a:spcPts val="0"/>
+              </a:spcAft>
+              <a:buClrTx/>
+              <a:buSzTx/>
+              <a:buFontTx/>
+              <a:buNone/>
+              <a:tabLst/>
+              <a:defRPr/>
+            </a:pPr>
+            <a:endParaRPr kumimoji="0" lang="en-US" sz="1800" b="0" i="0" u="none" strike="noStrike" kern="1200" cap="none" spc="0" normalizeH="0" baseline="0" noProof="0">
+              <a:ln>
+                <a:noFill/>
+              </a:ln>
+              <a:solidFill>
+                <a:prstClr val="white"/>
+              </a:solidFill>
+              <a:effectLst/>
+              <a:uLnTx/>
+              <a:uFillTx/>
+              <a:latin typeface="Calibri" panose="020F0502020204030204"/>
+              <a:ea typeface="+mn-ea"/>
+              <a:cs typeface="+mn-cs"/>
+            </a:endParaRPr>
+          </a:p>
+        </p:txBody>
+      </p:sp>
+      <p:sp>
+        <p:nvSpPr>
+          <p:cNvPr id="33" name="Rectangle 32">
+            <a:extLst>
+              <a:ext uri="{FF2B5EF4-FFF2-40B4-BE49-F238E27FC236}">
+                <a16:creationId xmlns:a16="http://schemas.microsoft.com/office/drawing/2014/main" id="{4A334AF3-D16B-E373-4BB6-2CA4040B8828}"/>
+              </a:ext>
+              <a:ext uri="{C183D7F6-B498-43B3-948B-1728B52AA6E4}">
+                <adec:decorative xmlns:adec="http://schemas.microsoft.com/office/drawing/2017/decorative" val="1"/>
+              </a:ext>
+            </a:extLst>
+          </p:cNvPr>
+          <p:cNvSpPr>
+            <a:spLocks noGrp="1" noRot="1" noChangeAspect="1" noMove="1" noResize="1" noEditPoints="1" noAdjustHandles="1" noChangeArrowheads="1" noChangeShapeType="1" noTextEdit="1"/>
+          </p:cNvSpPr>
+          <p:nvPr>
+            <p:extLst>
+              <p:ext uri="{386F3935-93C4-4BCD-93E2-E3B085C9AB24}">
+                <p16:designElem xmlns:p16="http://schemas.microsoft.com/office/powerpoint/2015/main" val="1"/>
+              </p:ext>
+            </p:extLst>
+          </p:nvPr>
+        </p:nvSpPr>
+        <p:spPr>
+          <a:xfrm>
+            <a:off x="498834" y="787352"/>
+            <a:ext cx="128016" cy="704088"/>
+          </a:xfrm>
+          <a:prstGeom prst="rect">
+            <a:avLst/>
+          </a:prstGeom>
+          <a:solidFill>
+            <a:schemeClr val="accent1"/>
+          </a:solidFill>
+          <a:ln>
+            <a:noFill/>
+          </a:ln>
+        </p:spPr>
+        <p:style>
+          <a:lnRef idx="2">
+            <a:schemeClr val="accent1">
+              <a:shade val="50000"/>
+            </a:schemeClr>
+          </a:lnRef>
+          <a:fillRef idx="1">
+            <a:schemeClr val="accent1"/>
+          </a:fillRef>
+          <a:effectRef idx="0">
+            <a:schemeClr val="accent1"/>
+          </a:effectRef>
+          <a:fontRef idx="minor">
+            <a:schemeClr val="lt1"/>
+          </a:fontRef>
+        </p:style>
+        <p:txBody>
+          <a:bodyPr rtlCol="0" anchor="ctr"/>
+          <a:lstStyle/>
+          <a:p>
+            <a:pPr marL="0" marR="0" lvl="0" indent="0" algn="ctr" defTabSz="914400" rtl="0" eaLnBrk="1" fontAlgn="auto" latinLnBrk="0" hangingPunct="1">
+              <a:lnSpc>
+                <a:spcPct val="100000"/>
+              </a:lnSpc>
+              <a:spcBef>
+                <a:spcPts val="0"/>
+              </a:spcBef>
+              <a:spcAft>
+                <a:spcPts val="0"/>
+              </a:spcAft>
+              <a:buClrTx/>
+              <a:buSzTx/>
+              <a:buFontTx/>
+              <a:buNone/>
+              <a:tabLst/>
+              <a:defRPr/>
+            </a:pPr>
+            <a:endParaRPr kumimoji="0" lang="en-US" sz="1800" b="0" i="0" u="none" strike="noStrike" kern="1200" cap="none" spc="0" normalizeH="0" baseline="0" noProof="0">
+              <a:ln>
+                <a:noFill/>
+              </a:ln>
+              <a:solidFill>
+                <a:prstClr val="white"/>
+              </a:solidFill>
+              <a:effectLst/>
+              <a:uLnTx/>
+              <a:uFillTx/>
+              <a:latin typeface="Calibri" panose="020F0502020204030204"/>
+              <a:ea typeface="+mn-ea"/>
+              <a:cs typeface="+mn-cs"/>
+            </a:endParaRPr>
+          </a:p>
+        </p:txBody>
+      </p:sp>
+      <p:sp useBgFill="1">
+        <p:nvSpPr>
+          <p:cNvPr id="35" name="Rectangle 34">
+            <a:extLst>
+              <a:ext uri="{FF2B5EF4-FFF2-40B4-BE49-F238E27FC236}">
+                <a16:creationId xmlns:a16="http://schemas.microsoft.com/office/drawing/2014/main" id="{391954FC-17DB-5B0E-46A5-E81E4206885E}"/>
+              </a:ext>
+              <a:ext uri="{C183D7F6-B498-43B3-948B-1728B52AA6E4}">
+                <adec:decorative xmlns:adec="http://schemas.microsoft.com/office/drawing/2017/decorative" val="1"/>
+              </a:ext>
+            </a:extLst>
+          </p:cNvPr>
+          <p:cNvSpPr>
+            <a:spLocks noGrp="1" noRot="1" noChangeAspect="1" noMove="1" noResize="1" noEditPoints="1" noAdjustHandles="1" noChangeArrowheads="1" noChangeShapeType="1" noTextEdit="1"/>
+          </p:cNvSpPr>
+          <p:nvPr>
+            <p:extLst>
+              <p:ext uri="{386F3935-93C4-4BCD-93E2-E3B085C9AB24}">
+                <p16:designElem xmlns:p16="http://schemas.microsoft.com/office/powerpoint/2015/main" val="1"/>
+              </p:ext>
+            </p:extLst>
+          </p:nvPr>
+        </p:nvSpPr>
+        <p:spPr>
+          <a:xfrm>
+            <a:off x="0" y="0"/>
+            <a:ext cx="12192000" cy="6858000"/>
+          </a:xfrm>
+          <a:prstGeom prst="rect">
+            <a:avLst/>
+          </a:prstGeom>
+          <a:ln>
+            <a:noFill/>
+          </a:ln>
+        </p:spPr>
+        <p:style>
+          <a:lnRef idx="2">
+            <a:schemeClr val="accent1">
+              <a:shade val="50000"/>
+            </a:schemeClr>
+          </a:lnRef>
+          <a:fillRef idx="1">
+            <a:schemeClr val="accent1"/>
+          </a:fillRef>
+          <a:effectRef idx="0">
+            <a:schemeClr val="accent1"/>
+          </a:effectRef>
+          <a:fontRef idx="minor">
+            <a:schemeClr val="lt1"/>
+          </a:fontRef>
+        </p:style>
+        <p:txBody>
+          <a:bodyPr rtlCol="0" anchor="ctr"/>
+          <a:lstStyle/>
+          <a:p>
+            <a:pPr algn="ctr"/>
+            <a:endParaRPr lang="en-US"/>
+          </a:p>
+        </p:txBody>
+      </p:sp>
+      <p:sp>
+        <p:nvSpPr>
+          <p:cNvPr id="37" name="Rectangle 36">
+            <a:extLst>
+              <a:ext uri="{FF2B5EF4-FFF2-40B4-BE49-F238E27FC236}">
+                <a16:creationId xmlns:a16="http://schemas.microsoft.com/office/drawing/2014/main" id="{D9ED3737-F0FD-6B5F-2DFB-6CF5738C1F7A}"/>
+              </a:ext>
+              <a:ext uri="{C183D7F6-B498-43B3-948B-1728B52AA6E4}">
+                <adec:decorative xmlns:adec="http://schemas.microsoft.com/office/drawing/2017/decorative" val="1"/>
+              </a:ext>
+            </a:extLst>
+          </p:cNvPr>
+          <p:cNvSpPr>
+            <a:spLocks noGrp="1" noRot="1" noChangeAspect="1" noMove="1" noResize="1" noEditPoints="1" noAdjustHandles="1" noChangeArrowheads="1" noChangeShapeType="1" noTextEdit="1"/>
+          </p:cNvSpPr>
+          <p:nvPr>
+            <p:extLst>
+              <p:ext uri="{386F3935-93C4-4BCD-93E2-E3B085C9AB24}">
+                <p16:designElem xmlns:p16="http://schemas.microsoft.com/office/powerpoint/2015/main" val="1"/>
+              </p:ext>
+            </p:extLst>
+          </p:nvPr>
+        </p:nvSpPr>
+        <p:spPr>
+          <a:xfrm>
+            <a:off x="2" y="0"/>
+            <a:ext cx="9756601" cy="6858000"/>
+          </a:xfrm>
+          <a:prstGeom prst="rect">
+            <a:avLst/>
+          </a:prstGeom>
+          <a:gradFill>
+            <a:gsLst>
+              <a:gs pos="58000">
+                <a:schemeClr val="bg1"/>
+              </a:gs>
+              <a:gs pos="35000">
+                <a:schemeClr val="bg1">
+                  <a:alpha val="78000"/>
+                </a:schemeClr>
+              </a:gs>
+              <a:gs pos="19000">
+                <a:schemeClr val="bg1">
+                  <a:alpha val="38000"/>
+                </a:schemeClr>
+              </a:gs>
+              <a:gs pos="0">
+                <a:schemeClr val="bg1">
+                  <a:alpha val="0"/>
+                </a:schemeClr>
+              </a:gs>
+              <a:gs pos="100000">
+                <a:schemeClr val="bg1"/>
+              </a:gs>
+            </a:gsLst>
+            <a:lin ang="10800000" scaled="0"/>
+          </a:gradFill>
+          <a:ln>
+            <a:noFill/>
+          </a:ln>
+        </p:spPr>
+        <p:style>
+          <a:lnRef idx="2">
+            <a:schemeClr val="accent1">
+              <a:shade val="50000"/>
+            </a:schemeClr>
+          </a:lnRef>
+          <a:fillRef idx="1">
+            <a:schemeClr val="accent1"/>
+          </a:fillRef>
+          <a:effectRef idx="0">
+            <a:schemeClr val="accent1"/>
+          </a:effectRef>
+          <a:fontRef idx="minor">
+            <a:schemeClr val="lt1"/>
+          </a:fontRef>
+        </p:style>
+        <p:txBody>
+          <a:bodyPr rtlCol="0" anchor="ctr"/>
+          <a:lstStyle/>
+          <a:p>
+            <a:pPr algn="ctr"/>
+            <a:endParaRPr lang="en-US" dirty="0"/>
+          </a:p>
+        </p:txBody>
+      </p:sp>
+      <p:sp>
+        <p:nvSpPr>
+          <p:cNvPr id="24" name="TextBox 23">
+            <a:extLst>
+              <a:ext uri="{FF2B5EF4-FFF2-40B4-BE49-F238E27FC236}">
+                <a16:creationId xmlns:a16="http://schemas.microsoft.com/office/drawing/2014/main" id="{67EDDACF-CCC1-159B-E83C-57D66586531A}"/>
+              </a:ext>
+            </a:extLst>
+          </p:cNvPr>
+          <p:cNvSpPr txBox="1"/>
+          <p:nvPr/>
+        </p:nvSpPr>
+        <p:spPr>
+          <a:xfrm>
+            <a:off x="371094" y="1161288"/>
+            <a:ext cx="3438144" cy="1124712"/>
+          </a:xfrm>
+          <a:prstGeom prst="rect">
+            <a:avLst/>
+          </a:prstGeom>
+        </p:spPr>
+        <p:txBody>
+          <a:bodyPr vert="horz" lIns="91440" tIns="45720" rIns="91440" bIns="45720" rtlCol="0" anchor="b">
+            <a:normAutofit lnSpcReduction="10000"/>
+          </a:bodyPr>
+          <a:lstStyle/>
+          <a:p>
+            <a:pPr>
+              <a:lnSpc>
+                <a:spcPct val="90000"/>
+              </a:lnSpc>
+              <a:spcBef>
+                <a:spcPct val="0"/>
+              </a:spcBef>
+              <a:spcAft>
+                <a:spcPts val="600"/>
+              </a:spcAft>
+            </a:pPr>
+            <a:r>
+              <a:rPr lang="en-GB" sz="4000" b="1" i="0" dirty="0">
+                <a:ln>
+                  <a:solidFill>
+                    <a:schemeClr val="bg1"/>
+                  </a:solidFill>
+                </a:ln>
+                <a:solidFill>
+                  <a:srgbClr val="134A84"/>
+                </a:solidFill>
+                <a:effectLst/>
+                <a:latin typeface="system-ui"/>
+              </a:rPr>
+              <a:t>Exploratory</a:t>
+            </a:r>
+            <a:r>
+              <a:rPr lang="en-GB" sz="4000" b="1" dirty="0">
+                <a:ln>
+                  <a:solidFill>
+                    <a:schemeClr val="bg1"/>
+                  </a:solidFill>
+                </a:ln>
+                <a:solidFill>
+                  <a:schemeClr val="bg1"/>
+                </a:solidFill>
+                <a:latin typeface="system-ui"/>
+              </a:rPr>
+              <a:t> </a:t>
+            </a:r>
+            <a:r>
+              <a:rPr lang="en-GB" sz="4000" b="1" i="0" dirty="0">
+                <a:ln>
+                  <a:solidFill>
+                    <a:schemeClr val="bg1"/>
+                  </a:solidFill>
+                </a:ln>
+                <a:solidFill>
+                  <a:srgbClr val="D71F25"/>
+                </a:solidFill>
+                <a:effectLst/>
+                <a:latin typeface="system-ui"/>
+              </a:rPr>
+              <a:t>Data Analysis</a:t>
+            </a:r>
+            <a:endParaRPr lang="en-US" sz="4000" b="1" dirty="0">
+              <a:solidFill>
+                <a:srgbClr val="D71F25"/>
+              </a:solidFill>
+              <a:latin typeface="+mj-lt"/>
+              <a:ea typeface="+mj-ea"/>
+              <a:cs typeface="+mj-cs"/>
+            </a:endParaRPr>
+          </a:p>
+        </p:txBody>
+      </p:sp>
+      <p:sp>
+        <p:nvSpPr>
+          <p:cNvPr id="39" name="Rectangle 38">
+            <a:extLst>
+              <a:ext uri="{FF2B5EF4-FFF2-40B4-BE49-F238E27FC236}">
+                <a16:creationId xmlns:a16="http://schemas.microsoft.com/office/drawing/2014/main" id="{7C522502-2428-4C4A-4628-0CA4EB55AB23}"/>
+              </a:ext>
+              <a:ext uri="{C183D7F6-B498-43B3-948B-1728B52AA6E4}">
+                <adec:decorative xmlns:adec="http://schemas.microsoft.com/office/drawing/2017/decorative" val="1"/>
+              </a:ext>
+            </a:extLst>
+          </p:cNvPr>
+          <p:cNvSpPr>
+            <a:spLocks noGrp="1" noRot="1" noChangeAspect="1" noMove="1" noResize="1" noEditPoints="1" noAdjustHandles="1" noChangeArrowheads="1" noChangeShapeType="1" noTextEdit="1"/>
+          </p:cNvSpPr>
+          <p:nvPr>
+            <p:extLst>
+              <p:ext uri="{386F3935-93C4-4BCD-93E2-E3B085C9AB24}">
+                <p16:designElem xmlns:p16="http://schemas.microsoft.com/office/powerpoint/2015/main" val="1"/>
+              </p:ext>
+            </p:extLst>
+          </p:nvPr>
+        </p:nvSpPr>
+        <p:spPr>
+          <a:xfrm rot="5400000">
+            <a:off x="662559" y="605790"/>
+            <a:ext cx="73152" cy="548640"/>
+          </a:xfrm>
+          <a:prstGeom prst="rect">
+            <a:avLst/>
+          </a:prstGeom>
+          <a:solidFill>
+            <a:schemeClr val="accent1"/>
+          </a:solidFill>
+          <a:ln>
+            <a:noFill/>
+          </a:ln>
+        </p:spPr>
+        <p:style>
+          <a:lnRef idx="2">
+            <a:schemeClr val="accent1">
+              <a:shade val="50000"/>
+            </a:schemeClr>
+          </a:lnRef>
+          <a:fillRef idx="1">
+            <a:schemeClr val="accent1"/>
+          </a:fillRef>
+          <a:effectRef idx="0">
+            <a:schemeClr val="accent1"/>
+          </a:effectRef>
+          <a:fontRef idx="minor">
+            <a:schemeClr val="lt1"/>
+          </a:fontRef>
+        </p:style>
+        <p:txBody>
+          <a:bodyPr rtlCol="0" anchor="ctr"/>
+          <a:lstStyle/>
+          <a:p>
+            <a:pPr marL="0" marR="0" lvl="0" indent="0" algn="ctr" defTabSz="914400" rtl="0" eaLnBrk="1" fontAlgn="auto" latinLnBrk="0" hangingPunct="1">
+              <a:lnSpc>
+                <a:spcPct val="100000"/>
+              </a:lnSpc>
+              <a:spcBef>
+                <a:spcPts val="0"/>
+              </a:spcBef>
+              <a:spcAft>
+                <a:spcPts val="0"/>
+              </a:spcAft>
+              <a:buClrTx/>
+              <a:buSzTx/>
+              <a:buFontTx/>
+              <a:buNone/>
+              <a:tabLst/>
+              <a:defRPr/>
+            </a:pPr>
+            <a:endParaRPr kumimoji="0" lang="en-US" sz="1800" b="0" i="0" u="none" strike="noStrike" kern="1200" cap="none" spc="0" normalizeH="0" baseline="0" noProof="0">
+              <a:ln>
+                <a:noFill/>
+              </a:ln>
+              <a:solidFill>
+                <a:prstClr val="white"/>
+              </a:solidFill>
+              <a:effectLst/>
+              <a:uLnTx/>
+              <a:uFillTx/>
+              <a:latin typeface="Calibri" panose="020F0502020204030204"/>
+              <a:ea typeface="+mn-ea"/>
+              <a:cs typeface="+mn-cs"/>
+            </a:endParaRPr>
+          </a:p>
+        </p:txBody>
+      </p:sp>
+      <p:sp>
+        <p:nvSpPr>
+          <p:cNvPr id="41" name="Rectangle 40">
+            <a:extLst>
+              <a:ext uri="{FF2B5EF4-FFF2-40B4-BE49-F238E27FC236}">
+                <a16:creationId xmlns:a16="http://schemas.microsoft.com/office/drawing/2014/main" id="{7ED725D5-70C0-867D-7D6A-31B38F0C5128}"/>
+              </a:ext>
+              <a:ext uri="{C183D7F6-B498-43B3-948B-1728B52AA6E4}">
+                <adec:decorative xmlns:adec="http://schemas.microsoft.com/office/drawing/2017/decorative" val="1"/>
+              </a:ext>
+            </a:extLst>
+          </p:cNvPr>
+          <p:cNvSpPr>
+            <a:spLocks noGrp="1" noRot="1" noChangeAspect="1" noMove="1" noResize="1" noEditPoints="1" noAdjustHandles="1" noChangeArrowheads="1" noChangeShapeType="1" noTextEdit="1"/>
+          </p:cNvSpPr>
+          <p:nvPr>
+            <p:extLst>
+              <p:ext uri="{386F3935-93C4-4BCD-93E2-E3B085C9AB24}">
+                <p16:designElem xmlns:p16="http://schemas.microsoft.com/office/powerpoint/2015/main" val="1"/>
+              </p:ext>
+            </p:extLst>
+          </p:nvPr>
+        </p:nvSpPr>
+        <p:spPr>
+          <a:xfrm>
+            <a:off x="428244" y="2443480"/>
+            <a:ext cx="3300984" cy="9144"/>
+          </a:xfrm>
+          <a:prstGeom prst="rect">
+            <a:avLst/>
+          </a:prstGeom>
+          <a:solidFill>
+            <a:schemeClr val="tx2">
+              <a:lumMod val="25000"/>
+              <a:lumOff val="75000"/>
+            </a:schemeClr>
+          </a:solidFill>
+          <a:ln w="3175">
+            <a:solidFill>
+              <a:schemeClr val="tx2">
+                <a:lumMod val="25000"/>
+                <a:lumOff val="75000"/>
+              </a:schemeClr>
+            </a:solidFill>
+          </a:ln>
+          <a:effectLst/>
+        </p:spPr>
+        <p:style>
+          <a:lnRef idx="2">
+            <a:schemeClr val="accent1">
+              <a:shade val="50000"/>
+            </a:schemeClr>
+          </a:lnRef>
+          <a:fillRef idx="1">
+            <a:schemeClr val="accent1"/>
+          </a:fillRef>
+          <a:effectRef idx="0">
+            <a:schemeClr val="accent1"/>
+          </a:effectRef>
+          <a:fontRef idx="minor">
+            <a:schemeClr val="lt1"/>
+          </a:fontRef>
+        </p:style>
+        <p:txBody>
+          <a:bodyPr rtlCol="0" anchor="ctr"/>
+          <a:lstStyle/>
+          <a:p>
+            <a:pPr marL="0" marR="0" lvl="0" indent="0" algn="ctr" defTabSz="914400" rtl="0" eaLnBrk="1" fontAlgn="auto" latinLnBrk="0" hangingPunct="1">
+              <a:lnSpc>
+                <a:spcPct val="100000"/>
+              </a:lnSpc>
+              <a:spcBef>
+                <a:spcPts val="0"/>
+              </a:spcBef>
+              <a:spcAft>
+                <a:spcPts val="0"/>
+              </a:spcAft>
+              <a:buClrTx/>
+              <a:buSzTx/>
+              <a:buFontTx/>
+              <a:buNone/>
+              <a:tabLst/>
+              <a:defRPr/>
+            </a:pPr>
+            <a:endParaRPr kumimoji="0" lang="en-US" sz="1800" b="0" i="0" u="none" strike="noStrike" kern="1200" cap="none" spc="0" normalizeH="0" baseline="0" noProof="0">
+              <a:ln>
+                <a:noFill/>
+              </a:ln>
+              <a:solidFill>
+                <a:prstClr val="white"/>
+              </a:solidFill>
+              <a:effectLst/>
+              <a:uLnTx/>
+              <a:uFillTx/>
+              <a:latin typeface="Calibri" panose="020F0502020204030204"/>
+              <a:ea typeface="+mn-ea"/>
+              <a:cs typeface="+mn-cs"/>
+            </a:endParaRPr>
+          </a:p>
+        </p:txBody>
+      </p:sp>
       <p:pic>
         <p:nvPicPr>
           <p:cNvPr id="6" name="Picture 5" descr="A word cloud with blue and red text&#10;&#10;Description automatically generated">
@@ -19638,6 +21760,277 @@
           </a:p>
         </p:txBody>
       </p:sp>
+      <p:cxnSp>
+        <p:nvCxnSpPr>
+          <p:cNvPr id="12" name="Straight Connector 11">
+            <a:extLst>
+              <a:ext uri="{FF2B5EF4-FFF2-40B4-BE49-F238E27FC236}">
+                <a16:creationId xmlns:a16="http://schemas.microsoft.com/office/drawing/2014/main" id="{1CBC1AF5-1DEE-3349-60E7-7B9D9494AF50}"/>
+              </a:ext>
+            </a:extLst>
+          </p:cNvPr>
+          <p:cNvCxnSpPr>
+            <a:cxnSpLocks/>
+          </p:cNvCxnSpPr>
+          <p:nvPr/>
+        </p:nvCxnSpPr>
+        <p:spPr>
+          <a:xfrm>
+            <a:off x="4241800" y="3987800"/>
+            <a:ext cx="545062" cy="0"/>
+          </a:xfrm>
+          <a:prstGeom prst="line">
+            <a:avLst/>
+          </a:prstGeom>
+        </p:spPr>
+        <p:style>
+          <a:lnRef idx="1">
+            <a:schemeClr val="accent1"/>
+          </a:lnRef>
+          <a:fillRef idx="0">
+            <a:schemeClr val="accent1"/>
+          </a:fillRef>
+          <a:effectRef idx="0">
+            <a:schemeClr val="accent1"/>
+          </a:effectRef>
+          <a:fontRef idx="minor">
+            <a:schemeClr val="tx1"/>
+          </a:fontRef>
+        </p:style>
+      </p:cxnSp>
+      <p:cxnSp>
+        <p:nvCxnSpPr>
+          <p:cNvPr id="14" name="Straight Connector 13">
+            <a:extLst>
+              <a:ext uri="{FF2B5EF4-FFF2-40B4-BE49-F238E27FC236}">
+                <a16:creationId xmlns:a16="http://schemas.microsoft.com/office/drawing/2014/main" id="{A3721901-15B6-5ADE-6C09-8F9850203B2E}"/>
+              </a:ext>
+            </a:extLst>
+          </p:cNvPr>
+          <p:cNvCxnSpPr>
+            <a:cxnSpLocks/>
+          </p:cNvCxnSpPr>
+          <p:nvPr/>
+        </p:nvCxnSpPr>
+        <p:spPr>
+          <a:xfrm>
+            <a:off x="4241800" y="3987800"/>
+            <a:ext cx="0" cy="1403350"/>
+          </a:xfrm>
+          <a:prstGeom prst="line">
+            <a:avLst/>
+          </a:prstGeom>
+        </p:spPr>
+        <p:style>
+          <a:lnRef idx="1">
+            <a:schemeClr val="accent1"/>
+          </a:lnRef>
+          <a:fillRef idx="0">
+            <a:schemeClr val="accent1"/>
+          </a:fillRef>
+          <a:effectRef idx="0">
+            <a:schemeClr val="accent1"/>
+          </a:effectRef>
+          <a:fontRef idx="minor">
+            <a:schemeClr val="tx1"/>
+          </a:fontRef>
+        </p:style>
+      </p:cxnSp>
+      <p:sp>
+        <p:nvSpPr>
+          <p:cNvPr id="16" name="TextBox 15">
+            <a:extLst>
+              <a:ext uri="{FF2B5EF4-FFF2-40B4-BE49-F238E27FC236}">
+                <a16:creationId xmlns:a16="http://schemas.microsoft.com/office/drawing/2014/main" id="{D7C0584B-F703-4943-D900-A3DDD54F5EE4}"/>
+              </a:ext>
+            </a:extLst>
+          </p:cNvPr>
+          <p:cNvSpPr txBox="1"/>
+          <p:nvPr/>
+        </p:nvSpPr>
+        <p:spPr>
+          <a:xfrm>
+            <a:off x="3018753" y="5449805"/>
+            <a:ext cx="1655584" cy="338554"/>
+          </a:xfrm>
+          <a:prstGeom prst="rect">
+            <a:avLst/>
+          </a:prstGeom>
+          <a:noFill/>
+        </p:spPr>
+        <p:txBody>
+          <a:bodyPr wrap="square">
+            <a:spAutoFit/>
+          </a:bodyPr>
+          <a:lstStyle/>
+          <a:p>
+            <a:r>
+              <a:rPr lang="en-US" sz="800" dirty="0"/>
+              <a:t>Never seen this </a:t>
+            </a:r>
+            <a:r>
+              <a:rPr lang="en-US" sz="800" dirty="0" err="1"/>
+              <a:t>kinda</a:t>
+            </a:r>
+            <a:r>
+              <a:rPr lang="en-US" sz="800" dirty="0"/>
+              <a:t> Coke bottle. Pretty fun IMO.</a:t>
+            </a:r>
+          </a:p>
+        </p:txBody>
+      </p:sp>
+      <p:sp>
+        <p:nvSpPr>
+          <p:cNvPr id="18" name="TextBox 17">
+            <a:extLst>
+              <a:ext uri="{FF2B5EF4-FFF2-40B4-BE49-F238E27FC236}">
+                <a16:creationId xmlns:a16="http://schemas.microsoft.com/office/drawing/2014/main" id="{3D91278C-F32A-3E94-9722-F373AC1C4918}"/>
+              </a:ext>
+            </a:extLst>
+          </p:cNvPr>
+          <p:cNvSpPr txBox="1"/>
+          <p:nvPr/>
+        </p:nvSpPr>
+        <p:spPr>
+          <a:xfrm>
+            <a:off x="3018753" y="5753134"/>
+            <a:ext cx="1735047" cy="461665"/>
+          </a:xfrm>
+          <a:prstGeom prst="rect">
+            <a:avLst/>
+          </a:prstGeom>
+          <a:noFill/>
+        </p:spPr>
+        <p:txBody>
+          <a:bodyPr wrap="square">
+            <a:spAutoFit/>
+          </a:bodyPr>
+          <a:lstStyle/>
+          <a:p>
+            <a:r>
+              <a:rPr lang="en-US" sz="800" dirty="0"/>
+              <a:t>Does anyone have any info about this Coca-Cola Hip Hop bottle? </a:t>
+            </a:r>
+          </a:p>
+        </p:txBody>
+      </p:sp>
+      <p:sp>
+        <p:nvSpPr>
+          <p:cNvPr id="23" name="TextBox 22">
+            <a:extLst>
+              <a:ext uri="{FF2B5EF4-FFF2-40B4-BE49-F238E27FC236}">
+                <a16:creationId xmlns:a16="http://schemas.microsoft.com/office/drawing/2014/main" id="{D2E74803-E929-DE3D-CB6C-89DBF785A44F}"/>
+              </a:ext>
+            </a:extLst>
+          </p:cNvPr>
+          <p:cNvSpPr txBox="1"/>
+          <p:nvPr/>
+        </p:nvSpPr>
+        <p:spPr>
+          <a:xfrm>
+            <a:off x="10461108" y="217438"/>
+            <a:ext cx="1581150" cy="707886"/>
+          </a:xfrm>
+          <a:prstGeom prst="rect">
+            <a:avLst/>
+          </a:prstGeom>
+          <a:noFill/>
+        </p:spPr>
+        <p:txBody>
+          <a:bodyPr wrap="square">
+            <a:spAutoFit/>
+          </a:bodyPr>
+          <a:lstStyle/>
+          <a:p>
+            <a:r>
+              <a:rPr lang="en-US" sz="800" dirty="0"/>
+              <a:t>PepsiCo is closing 4 bottling plants and cutting nearly 400 jobs as it streamlines operations</a:t>
+            </a:r>
+          </a:p>
+          <a:p>
+            <a:r>
+              <a:rPr lang="en-US" sz="800" dirty="0"/>
+              <a:t>#pepsi</a:t>
+            </a:r>
+          </a:p>
+        </p:txBody>
+      </p:sp>
+      <p:cxnSp>
+        <p:nvCxnSpPr>
+          <p:cNvPr id="27" name="Straight Connector 26">
+            <a:extLst>
+              <a:ext uri="{FF2B5EF4-FFF2-40B4-BE49-F238E27FC236}">
+                <a16:creationId xmlns:a16="http://schemas.microsoft.com/office/drawing/2014/main" id="{59DD33F5-65D7-4C3B-6D2C-A9E7DDC8C7AE}"/>
+              </a:ext>
+            </a:extLst>
+          </p:cNvPr>
+          <p:cNvCxnSpPr>
+            <a:cxnSpLocks/>
+          </p:cNvCxnSpPr>
+          <p:nvPr/>
+        </p:nvCxnSpPr>
+        <p:spPr>
+          <a:xfrm>
+            <a:off x="9916046" y="495300"/>
+            <a:ext cx="545062" cy="0"/>
+          </a:xfrm>
+          <a:prstGeom prst="line">
+            <a:avLst/>
+          </a:prstGeom>
+        </p:spPr>
+        <p:style>
+          <a:lnRef idx="1">
+            <a:schemeClr val="accent1"/>
+          </a:lnRef>
+          <a:fillRef idx="0">
+            <a:schemeClr val="accent1"/>
+          </a:fillRef>
+          <a:effectRef idx="0">
+            <a:schemeClr val="accent1"/>
+          </a:effectRef>
+          <a:fontRef idx="minor">
+            <a:schemeClr val="tx1"/>
+          </a:fontRef>
+        </p:style>
+      </p:cxnSp>
+      <p:cxnSp>
+        <p:nvCxnSpPr>
+          <p:cNvPr id="28" name="Straight Connector 27">
+            <a:extLst>
+              <a:ext uri="{FF2B5EF4-FFF2-40B4-BE49-F238E27FC236}">
+                <a16:creationId xmlns:a16="http://schemas.microsoft.com/office/drawing/2014/main" id="{F38D6A65-7FE8-D5E6-0A22-D5317690B155}"/>
+              </a:ext>
+            </a:extLst>
+          </p:cNvPr>
+          <p:cNvCxnSpPr>
+            <a:cxnSpLocks/>
+          </p:cNvCxnSpPr>
+          <p:nvPr/>
+        </p:nvCxnSpPr>
+        <p:spPr>
+          <a:xfrm>
+            <a:off x="9916046" y="495300"/>
+            <a:ext cx="27672" cy="1228344"/>
+          </a:xfrm>
+          <a:prstGeom prst="line">
+            <a:avLst/>
+          </a:prstGeom>
+        </p:spPr>
+        <p:style>
+          <a:lnRef idx="1">
+            <a:schemeClr val="accent1"/>
+          </a:lnRef>
+          <a:fillRef idx="0">
+            <a:schemeClr val="accent1"/>
+          </a:fillRef>
+          <a:effectRef idx="0">
+            <a:schemeClr val="accent1"/>
+          </a:effectRef>
+          <a:fontRef idx="minor">
+            <a:schemeClr val="tx1"/>
+          </a:fontRef>
+        </p:style>
+      </p:cxnSp>
     </p:spTree>
     <p:extLst>
       <p:ext uri="{BB962C8B-B14F-4D97-AF65-F5344CB8AC3E}">
@@ -19651,7 +22044,7 @@
 </p:sld>
 </file>
 
-<file path=ppt/slides/slide8.xml><?xml version="1.0" encoding="utf-8"?>
+<file path=ppt/slides/slide9.xml><?xml version="1.0" encoding="utf-8"?>
 <p:sld xmlns:a="http://schemas.openxmlformats.org/drawingml/2006/main" xmlns:r="http://schemas.openxmlformats.org/officeDocument/2006/relationships" xmlns:p="http://schemas.openxmlformats.org/presentationml/2006/main">
   <p:cSld>
     <p:spTree>
@@ -20878,192 +23271,6 @@
     <p:extLst>
       <p:ext uri="{BB962C8B-B14F-4D97-AF65-F5344CB8AC3E}">
         <p14:creationId xmlns:p14="http://schemas.microsoft.com/office/powerpoint/2010/main" val="263502002"/>
-      </p:ext>
-    </p:extLst>
-  </p:cSld>
-  <p:clrMapOvr>
-    <a:masterClrMapping/>
-  </p:clrMapOvr>
-</p:sld>
-</file>
-
-<file path=ppt/slides/slide9.xml><?xml version="1.0" encoding="utf-8"?>
-<p:sld xmlns:a="http://schemas.openxmlformats.org/drawingml/2006/main" xmlns:r="http://schemas.openxmlformats.org/officeDocument/2006/relationships" xmlns:p="http://schemas.openxmlformats.org/presentationml/2006/main">
-  <p:cSld>
-    <p:spTree>
-      <p:nvGrpSpPr>
-        <p:cNvPr id="1" name=""/>
-        <p:cNvGrpSpPr/>
-        <p:nvPr/>
-      </p:nvGrpSpPr>
-      <p:grpSpPr>
-        <a:xfrm>
-          <a:off x="0" y="0"/>
-          <a:ext cx="0" cy="0"/>
-          <a:chOff x="0" y="0"/>
-          <a:chExt cx="0" cy="0"/>
-        </a:xfrm>
-      </p:grpSpPr>
-      <p:sp>
-        <p:nvSpPr>
-          <p:cNvPr id="2" name="Title 1">
-            <a:extLst>
-              <a:ext uri="{FF2B5EF4-FFF2-40B4-BE49-F238E27FC236}">
-                <a16:creationId xmlns:a16="http://schemas.microsoft.com/office/drawing/2014/main" id="{C503AEFE-B90E-F7A1-61A4-1081A2910E34}"/>
-              </a:ext>
-            </a:extLst>
-          </p:cNvPr>
-          <p:cNvSpPr>
-            <a:spLocks noGrp="1"/>
-          </p:cNvSpPr>
-          <p:nvPr>
-            <p:ph type="title"/>
-          </p:nvPr>
-        </p:nvSpPr>
-        <p:spPr>
-          <a:xfrm>
-            <a:off x="426317" y="1431416"/>
-            <a:ext cx="4451985" cy="1153923"/>
-          </a:xfrm>
-        </p:spPr>
-        <p:txBody>
-          <a:bodyPr/>
-          <a:lstStyle/>
-          <a:p>
-            <a:r>
-              <a:rPr lang="en-US" dirty="0"/>
-              <a:t>Vectorizer</a:t>
-            </a:r>
-          </a:p>
-        </p:txBody>
-      </p:sp>
-      <p:sp>
-        <p:nvSpPr>
-          <p:cNvPr id="3" name="Content Placeholder 1051">
-            <a:extLst>
-              <a:ext uri="{FF2B5EF4-FFF2-40B4-BE49-F238E27FC236}">
-                <a16:creationId xmlns:a16="http://schemas.microsoft.com/office/drawing/2014/main" id="{39238455-3290-8A12-24DF-5CDE8E0A7AF1}"/>
-              </a:ext>
-            </a:extLst>
-          </p:cNvPr>
-          <p:cNvSpPr>
-            <a:spLocks noGrp="1"/>
-          </p:cNvSpPr>
-          <p:nvPr>
-            <p:ph idx="1"/>
-          </p:nvPr>
-        </p:nvSpPr>
-        <p:spPr>
-          <a:xfrm>
-            <a:off x="371475" y="2717800"/>
-            <a:ext cx="3438525" cy="3206750"/>
-          </a:xfrm>
-        </p:spPr>
-        <p:txBody>
-          <a:bodyPr anchor="t">
-            <a:normAutofit/>
-          </a:bodyPr>
-          <a:lstStyle/>
-          <a:p>
-            <a:r>
-              <a:rPr lang="en-US" sz="1700" dirty="0"/>
-              <a:t>TF-IDF vectorizer</a:t>
-            </a:r>
-          </a:p>
-          <a:p>
-            <a:r>
-              <a:rPr lang="en-US" sz="1700" dirty="0"/>
-              <a:t>Count vectorizer</a:t>
-            </a:r>
-          </a:p>
-        </p:txBody>
-      </p:sp>
-      <p:pic>
-        <p:nvPicPr>
-          <p:cNvPr id="4" name="Picture 3" descr="A graph of blue and red bars&#10;&#10;Description automatically generated">
-            <a:extLst>
-              <a:ext uri="{FF2B5EF4-FFF2-40B4-BE49-F238E27FC236}">
-                <a16:creationId xmlns:a16="http://schemas.microsoft.com/office/drawing/2014/main" id="{93D2A8E2-20FE-C509-C020-1B4EEE577390}"/>
-              </a:ext>
-            </a:extLst>
-          </p:cNvPr>
-          <p:cNvPicPr>
-            <a:picLocks noChangeAspect="1"/>
-          </p:cNvPicPr>
-          <p:nvPr/>
-        </p:nvPicPr>
-        <p:blipFill rotWithShape="1">
-          <a:blip r:embed="rId2">
-            <a:extLst>
-              <a:ext uri="{28A0092B-C50C-407E-A947-70E740481C1C}">
-                <a14:useLocalDpi xmlns:a14="http://schemas.microsoft.com/office/drawing/2010/main" val="0"/>
-              </a:ext>
-            </a:extLst>
-          </a:blip>
-          <a:srcRect l="7163" r="7486"/>
-          <a:stretch/>
-        </p:blipFill>
-        <p:spPr>
-          <a:xfrm>
-            <a:off x="5449455" y="1545716"/>
-            <a:ext cx="6541595" cy="4379590"/>
-          </a:xfrm>
-          <a:prstGeom prst="rect">
-            <a:avLst/>
-          </a:prstGeom>
-        </p:spPr>
-      </p:pic>
-      <p:sp>
-        <p:nvSpPr>
-          <p:cNvPr id="5" name="TextBox 4">
-            <a:extLst>
-              <a:ext uri="{FF2B5EF4-FFF2-40B4-BE49-F238E27FC236}">
-                <a16:creationId xmlns:a16="http://schemas.microsoft.com/office/drawing/2014/main" id="{579DB309-44CB-87A2-BE25-3CF711BBA0E3}"/>
-              </a:ext>
-            </a:extLst>
-          </p:cNvPr>
-          <p:cNvSpPr txBox="1"/>
-          <p:nvPr/>
-        </p:nvSpPr>
-        <p:spPr>
-          <a:xfrm>
-            <a:off x="424815" y="4918752"/>
-            <a:ext cx="4228234" cy="1015663"/>
-          </a:xfrm>
-          <a:prstGeom prst="rect">
-            <a:avLst/>
-          </a:prstGeom>
-          <a:noFill/>
-        </p:spPr>
-        <p:txBody>
-          <a:bodyPr wrap="square">
-            <a:spAutoFit/>
-          </a:bodyPr>
-          <a:lstStyle/>
-          <a:p>
-            <a:r>
-              <a:rPr lang="en-US" sz="2000" dirty="0"/>
-              <a:t>The Train score increased     </a:t>
-            </a:r>
-          </a:p>
-          <a:p>
-            <a:r>
-              <a:rPr lang="en-US" sz="2000" dirty="0"/>
-              <a:t>when using the TF-IDF vectorizer.</a:t>
-            </a:r>
-          </a:p>
-          <a:p>
-            <a:r>
-              <a:rPr lang="en-US" sz="2000" dirty="0"/>
-              <a:t>But not affect with Test Score</a:t>
-            </a:r>
-          </a:p>
-        </p:txBody>
-      </p:sp>
-    </p:spTree>
-    <p:extLst>
-      <p:ext uri="{BB962C8B-B14F-4D97-AF65-F5344CB8AC3E}">
-        <p14:creationId xmlns:p14="http://schemas.microsoft.com/office/powerpoint/2010/main" val="2774357573"/>
       </p:ext>
     </p:extLst>
   </p:cSld>
